--- a/exec-deck/output/H&L Weekly Update - WC 21 Sep 2026.pptx
+++ b/exec-deck/output/H&L Weekly Update - WC 21 Sep 2026.pptx
@@ -26235,7 +26235,7 @@
                 <a:ea typeface="Poppins" pitchFamily="34" charset="-122"/>
                 <a:cs typeface="Poppins" pitchFamily="34" charset="-120"/>
               </a:rPr>
-              <a:t>closed-won this week 34 deals · $131k (HubSpot); new MRR held at $12.1k QTD — movement register not refreshed</a:t>
+              <a:t>closed-won this week 34 deals · $131k (HubSpot); no new MRR invoiced in the week — Q3 holds at $12.1k = 43% of OKR2</a:t>
             </a:r>
             <a:endParaRPr lang="en-US" sz="900" dirty="0"/>
           </a:p>
@@ -27555,7 +27555,7 @@
                 <a:ea typeface="Poppins" pitchFamily="34" charset="-122"/>
                 <a:cs typeface="Poppins" pitchFamily="34" charset="-120"/>
               </a:rPr>
-              <a:t>  of $28k target · register as at 20 Sep</a:t>
+              <a:t>  of $28k target · register live</a:t>
             </a:r>
             <a:endParaRPr lang="en-US" sz="2400" dirty="0"/>
           </a:p>
@@ -27594,7 +27594,7 @@
                 <a:ea typeface="Poppins" pitchFamily="34" charset="-122"/>
                 <a:cs typeface="Poppins" pitchFamily="34" charset="-120"/>
               </a:rPr>
-              <a:t>refresh pending</a:t>
+              <a:t>nil this wk</a:t>
             </a:r>
             <a:endParaRPr lang="en-US" sz="950" dirty="0"/>
           </a:p>
@@ -28109,7 +28109,7 @@
                 <a:ea typeface="Poppins" pitchFamily="34" charset="-122"/>
                 <a:cs typeface="Poppins" pitchFamily="34" charset="-120"/>
               </a:rPr>
-              <a:t>NEW MRR ($/qtr) · register 20 Sep</a:t>
+              <a:t>NEW MRR ($/qtr) · register live</a:t>
             </a:r>
             <a:endParaRPr lang="en-US" sz="800" dirty="0"/>
           </a:p>
@@ -31884,7 +31884,7 @@
                 <a:ea typeface="Poppins" pitchFamily="34" charset="-122"/>
                 <a:cs typeface="Poppins" pitchFamily="34" charset="-120"/>
               </a:rPr>
-              <a:t>MRR = net new + expansion invoiced in Q3 (movement register, as at 20 Sep) · H&amp;L Pay net new $1,770/mo is tracked separately and never sits inside core MRR</a:t>
+              <a:t>MRR = net new + expansion invoiced in Q3 (movement register, live 27 Sep) · H&amp;L Pay net new $1,770/mo is tracked separately and never sits inside core MRR</a:t>
             </a:r>
             <a:endParaRPr lang="en-US" sz="700" dirty="0"/>
           </a:p>
@@ -32081,7 +32081,7 @@
             <a:r>
               <a:rPr lang="en-US" sz="900" b="1" dirty="0">
                 <a:solidFill>
-                  <a:srgbClr val="2C8394"/>
+                  <a:srgbClr val="B4552D"/>
                 </a:solidFill>
                 <a:latin typeface="Poppins" pitchFamily="34" charset="0"/>
                 <a:ea typeface="Poppins" pitchFamily="34" charset="-122"/>
@@ -32101,7 +32101,7 @@
                 <a:ea typeface="Poppins" pitchFamily="34" charset="-122"/>
                 <a:cs typeface="Poppins" pitchFamily="34" charset="-120"/>
               </a:rPr>
-              <a:t>New MRR was not refreshed this week. </a:t>
+              <a:t>New MRR did not move at all this week. </a:t>
             </a:r>
             <a:pPr indent="0" marL="0">
               <a:spcAft>
@@ -32118,7 +32118,7 @@
                 <a:ea typeface="Poppins" pitchFamily="34" charset="-122"/>
                 <a:cs typeface="Poppins" pitchFamily="34" charset="-120"/>
               </a:rPr>
-              <a:t>It is held at $12,129 (43% of the $28k OKR2) as at 20 Sep, against a 97% pace mark. The Sysnet extract's own subscription line moved +$592, which is a different measure and is not carried into MRR.</a:t>
+              <a:t>The register carries no new-MRR rows dated 21–27 Sep 2026, so Q3 stays at $12,129 — 43% of the $28k OKR2 against a 97% pace mark. The last entry was 18 Sep; the next dated ones are 28 Sep ($598, Piermount) and 30 Sep ($62) — inside Q3 but after this reporting week.</a:t>
             </a:r>
             <a:endParaRPr lang="en-US" sz="900" dirty="0"/>
           </a:p>
@@ -32166,8 +32166,8 @@
         </p:nvSpPr>
         <p:spPr>
           <a:xfrm>
-            <a:off x="7088429" y="6510528"/>
-            <a:ext cx="4689043" cy="256032"/>
+            <a:off x="7585862" y="6510528"/>
+            <a:ext cx="4191610" cy="256032"/>
           </a:xfrm>
           <a:prstGeom prst="roundRect">
             <a:avLst>
@@ -32188,8 +32188,8 @@
         </p:nvSpPr>
         <p:spPr>
           <a:xfrm>
-            <a:off x="7088429" y="6510528"/>
-            <a:ext cx="4689043" cy="256032"/>
+            <a:off x="7585862" y="6510528"/>
+            <a:ext cx="4191610" cy="256032"/>
           </a:xfrm>
           <a:prstGeom prst="rect">
             <a:avLst/>
@@ -32213,7 +32213,7 @@
                 <a:ea typeface="Poppins" pitchFamily="34" charset="-122"/>
                 <a:cs typeface="Poppins" pitchFamily="34" charset="-120"/>
               </a:rPr>
-              <a:t>Source: Sysnet extract 21–27 Sep + MRR movement register (as at 20 Sep)</a:t>
+              <a:t>Source: Sysnet extract 21–27 Sep + MRR movement register (live)</a:t>
             </a:r>
             <a:endParaRPr lang="en-US" sz="700" dirty="0"/>
           </a:p>
@@ -44782,7 +44782,7 @@
                 <a:ea typeface="Poppins" pitchFamily="34" charset="-122"/>
                 <a:cs typeface="Poppins" pitchFamily="34" charset="-120"/>
               </a:rPr>
-              <a:t>262 logos lost · register as at 20 Sep</a:t>
+              <a:t>262 logos lost · register live</a:t>
             </a:r>
             <a:endParaRPr lang="en-US" sz="780" dirty="0"/>
           </a:p>
@@ -47737,7 +47737,7 @@
                 <a:ea typeface="Poppins" pitchFamily="34" charset="-122"/>
                 <a:cs typeface="Poppins" pitchFamily="34" charset="-120"/>
               </a:rPr>
-              <a:t>Churn reads from the movement register (as at 20 Sep): $1.17M of ARR across 262 logos since 2025, plus $235k lost to contraction on accounts that stayed. Q3 net MRR is -$6.3k — new business is not covering it.</a:t>
+              <a:t>Churn reads from the movement register (live): $1.17M of ARR across 262 logos since 2025, plus $235k lost to contraction on accounts that stayed. Q3 net MRR is -$6.3k — new business is not covering it.</a:t>
             </a:r>
             <a:endParaRPr lang="en-US" sz="850" dirty="0"/>
           </a:p>
@@ -47886,8 +47886,8 @@
         </p:nvSpPr>
         <p:spPr>
           <a:xfrm>
-            <a:off x="6280099" y="6510528"/>
-            <a:ext cx="5497373" cy="256032"/>
+            <a:off x="7337146" y="6510528"/>
+            <a:ext cx="4440326" cy="256032"/>
           </a:xfrm>
           <a:prstGeom prst="roundRect">
             <a:avLst>
@@ -47908,8 +47908,8 @@
         </p:nvSpPr>
         <p:spPr>
           <a:xfrm>
-            <a:off x="6280099" y="6510528"/>
-            <a:ext cx="5497373" cy="256032"/>
+            <a:off x="7337146" y="6510528"/>
+            <a:ext cx="4440326" cy="256032"/>
           </a:xfrm>
           <a:prstGeom prst="rect">
             <a:avLst/>
@@ -47933,7 +47933,7 @@
                 <a:ea typeface="Poppins" pitchFamily="34" charset="-122"/>
                 <a:cs typeface="Poppins" pitchFamily="34" charset="-120"/>
               </a:rPr>
-              <a:t>Source: Finance Weekly Invoicing &amp; Creatio · register as at 20 Sep — refresh pending</a:t>
+              <a:t>Source: Finance Weekly Invoicing &amp; Creatio · movement register live</a:t>
             </a:r>
             <a:endParaRPr lang="en-US" sz="700" dirty="0"/>
           </a:p>

--- a/exec-deck/output/H&L Weekly Update - WC 21 Sep 2026.pptx
+++ b/exec-deck/output/H&L Weekly Update - WC 21 Sep 2026.pptx
@@ -40004,7 +40004,7 @@
                 <a:ea typeface="Poppins" pitchFamily="34" charset="-122"/>
                 <a:cs typeface="Poppins" pitchFamily="34" charset="-120"/>
               </a:rPr>
-              <a:t>20.75h billed of 342h available · target 80%</a:t>
+              <a:t>20.75h billed of 342h available · target 80% · restates upward as hours land</a:t>
             </a:r>
             <a:endParaRPr lang="en-US" sz="780" dirty="0"/>
           </a:p>
@@ -40311,11 +40311,11 @@
         <p:spPr>
           <a:xfrm>
             <a:off x="411480" y="2395728"/>
-            <a:ext cx="6583680" cy="3566160"/>
+            <a:ext cx="6583680" cy="2962656"/>
           </a:xfrm>
           <a:prstGeom prst="roundRect">
             <a:avLst>
-              <a:gd name="adj" fmla="val 1795"/>
+              <a:gd name="adj" fmla="val 2160"/>
             </a:avLst>
           </a:prstGeom>
           <a:solidFill>
@@ -40588,7 +40588,7 @@
         <p:spPr>
           <a:xfrm>
             <a:off x="2944368" y="3017520"/>
-            <a:ext cx="5486" cy="2139696"/>
+            <a:ext cx="5486" cy="1744675"/>
           </a:xfrm>
           <a:prstGeom prst="rect">
             <a:avLst/>
@@ -40647,7 +40647,7 @@
         <p:spPr>
           <a:xfrm>
             <a:off x="3419856" y="3017520"/>
-            <a:ext cx="5486" cy="2139696"/>
+            <a:ext cx="5486" cy="1744675"/>
           </a:xfrm>
           <a:prstGeom prst="rect">
             <a:avLst/>
@@ -40706,7 +40706,7 @@
         <p:spPr>
           <a:xfrm>
             <a:off x="3895344" y="3017520"/>
-            <a:ext cx="5486" cy="2139696"/>
+            <a:ext cx="5486" cy="1744675"/>
           </a:xfrm>
           <a:prstGeom prst="rect">
             <a:avLst/>
@@ -40765,7 +40765,7 @@
         <p:spPr>
           <a:xfrm>
             <a:off x="4370832" y="3017520"/>
-            <a:ext cx="5486" cy="2139696"/>
+            <a:ext cx="5486" cy="1744675"/>
           </a:xfrm>
           <a:prstGeom prst="rect">
             <a:avLst/>
@@ -40824,7 +40824,7 @@
         <p:spPr>
           <a:xfrm>
             <a:off x="4846320" y="3017520"/>
-            <a:ext cx="5486" cy="2139696"/>
+            <a:ext cx="5486" cy="1744675"/>
           </a:xfrm>
           <a:prstGeom prst="rect">
             <a:avLst/>
@@ -40844,7 +40844,7 @@
         <p:spPr>
           <a:xfrm>
             <a:off x="640080" y="3054096"/>
-            <a:ext cx="1783080" cy="237744"/>
+            <a:ext cx="1783080" cy="193853"/>
           </a:xfrm>
           <a:prstGeom prst="rect">
             <a:avLst/>
@@ -40882,7 +40882,7 @@
         </p:nvSpPr>
         <p:spPr>
           <a:xfrm>
-            <a:off x="2468880" y="3143250"/>
+            <a:off x="2468880" y="3121304"/>
             <a:ext cx="2377440" cy="59436"/>
           </a:xfrm>
           <a:prstGeom prst="roundRect">
@@ -40904,7 +40904,7 @@
         </p:nvSpPr>
         <p:spPr>
           <a:xfrm>
-            <a:off x="2468880" y="3143250"/>
+            <a:off x="2468880" y="3121304"/>
             <a:ext cx="656173" cy="59436"/>
           </a:xfrm>
           <a:prstGeom prst="roundRect">
@@ -40927,7 +40927,7 @@
         <p:spPr>
           <a:xfrm>
             <a:off x="5029200" y="3054096"/>
-            <a:ext cx="822960" cy="237744"/>
+            <a:ext cx="822960" cy="193853"/>
           </a:xfrm>
           <a:prstGeom prst="rect">
             <a:avLst/>
@@ -40966,7 +40966,7 @@
         <p:spPr>
           <a:xfrm>
             <a:off x="5943600" y="3054096"/>
-            <a:ext cx="822960" cy="237744"/>
+            <a:ext cx="822960" cy="193853"/>
           </a:xfrm>
           <a:prstGeom prst="rect">
             <a:avLst/>
@@ -41004,8 +41004,8 @@
         </p:nvSpPr>
         <p:spPr>
           <a:xfrm>
-            <a:off x="640080" y="3291840"/>
-            <a:ext cx="1783080" cy="237744"/>
+            <a:off x="640080" y="3247949"/>
+            <a:ext cx="1783080" cy="193853"/>
           </a:xfrm>
           <a:prstGeom prst="rect">
             <a:avLst/>
@@ -41043,7 +41043,7 @@
         </p:nvSpPr>
         <p:spPr>
           <a:xfrm>
-            <a:off x="2468880" y="3380994"/>
+            <a:off x="2468880" y="3315157"/>
             <a:ext cx="2377440" cy="59436"/>
           </a:xfrm>
           <a:prstGeom prst="roundRect">
@@ -41065,7 +41065,7 @@
         </p:nvSpPr>
         <p:spPr>
           <a:xfrm>
-            <a:off x="2468880" y="3380994"/>
+            <a:off x="2468880" y="3315157"/>
             <a:ext cx="501640" cy="59436"/>
           </a:xfrm>
           <a:prstGeom prst="roundRect">
@@ -41087,8 +41087,8 @@
         </p:nvSpPr>
         <p:spPr>
           <a:xfrm>
-            <a:off x="5029200" y="3291840"/>
-            <a:ext cx="822960" cy="237744"/>
+            <a:off x="5029200" y="3247949"/>
+            <a:ext cx="822960" cy="193853"/>
           </a:xfrm>
           <a:prstGeom prst="rect">
             <a:avLst/>
@@ -41126,8 +41126,8 @@
         </p:nvSpPr>
         <p:spPr>
           <a:xfrm>
-            <a:off x="5943600" y="3291840"/>
-            <a:ext cx="822960" cy="237744"/>
+            <a:off x="5943600" y="3247949"/>
+            <a:ext cx="822960" cy="193853"/>
           </a:xfrm>
           <a:prstGeom prst="rect">
             <a:avLst/>
@@ -41165,8 +41165,8 @@
         </p:nvSpPr>
         <p:spPr>
           <a:xfrm>
-            <a:off x="640080" y="3529584"/>
-            <a:ext cx="1783080" cy="237744"/>
+            <a:off x="640080" y="3441802"/>
+            <a:ext cx="1783080" cy="193853"/>
           </a:xfrm>
           <a:prstGeom prst="rect">
             <a:avLst/>
@@ -41204,7 +41204,7 @@
         </p:nvSpPr>
         <p:spPr>
           <a:xfrm>
-            <a:off x="2468880" y="3618738"/>
+            <a:off x="2468880" y="3509010"/>
             <a:ext cx="2377440" cy="59436"/>
           </a:xfrm>
           <a:prstGeom prst="roundRect">
@@ -41226,7 +41226,7 @@
         </p:nvSpPr>
         <p:spPr>
           <a:xfrm>
-            <a:off x="2468880" y="3618738"/>
+            <a:off x="2468880" y="3509010"/>
             <a:ext cx="109362" cy="59436"/>
           </a:xfrm>
           <a:prstGeom prst="roundRect">
@@ -41248,8 +41248,8 @@
         </p:nvSpPr>
         <p:spPr>
           <a:xfrm>
-            <a:off x="5029200" y="3529584"/>
-            <a:ext cx="822960" cy="237744"/>
+            <a:off x="5029200" y="3441802"/>
+            <a:ext cx="822960" cy="193853"/>
           </a:xfrm>
           <a:prstGeom prst="rect">
             <a:avLst/>
@@ -41287,8 +41287,8 @@
         </p:nvSpPr>
         <p:spPr>
           <a:xfrm>
-            <a:off x="5943600" y="3529584"/>
-            <a:ext cx="822960" cy="237744"/>
+            <a:off x="5943600" y="3441802"/>
+            <a:ext cx="822960" cy="193853"/>
           </a:xfrm>
           <a:prstGeom prst="rect">
             <a:avLst/>
@@ -41326,8 +41326,8 @@
         </p:nvSpPr>
         <p:spPr>
           <a:xfrm>
-            <a:off x="640080" y="3767328"/>
-            <a:ext cx="1783080" cy="237744"/>
+            <a:off x="640080" y="3635654"/>
+            <a:ext cx="1783080" cy="193853"/>
           </a:xfrm>
           <a:prstGeom prst="rect">
             <a:avLst/>
@@ -41365,7 +41365,7 @@
         </p:nvSpPr>
         <p:spPr>
           <a:xfrm>
-            <a:off x="2468880" y="3856482"/>
+            <a:off x="2468880" y="3702863"/>
             <a:ext cx="2377440" cy="59436"/>
           </a:xfrm>
           <a:prstGeom prst="roundRect">
@@ -41387,7 +41387,7 @@
         </p:nvSpPr>
         <p:spPr>
           <a:xfrm>
-            <a:off x="2468880" y="3856482"/>
+            <a:off x="2468880" y="3702863"/>
             <a:ext cx="45720" cy="59436"/>
           </a:xfrm>
           <a:prstGeom prst="roundRect">
@@ -41409,8 +41409,8 @@
         </p:nvSpPr>
         <p:spPr>
           <a:xfrm>
-            <a:off x="5029200" y="3767328"/>
-            <a:ext cx="822960" cy="237744"/>
+            <a:off x="5029200" y="3635654"/>
+            <a:ext cx="822960" cy="193853"/>
           </a:xfrm>
           <a:prstGeom prst="rect">
             <a:avLst/>
@@ -41448,8 +41448,8 @@
         </p:nvSpPr>
         <p:spPr>
           <a:xfrm>
-            <a:off x="5943600" y="3767328"/>
-            <a:ext cx="822960" cy="237744"/>
+            <a:off x="5943600" y="3635654"/>
+            <a:ext cx="822960" cy="193853"/>
           </a:xfrm>
           <a:prstGeom prst="rect">
             <a:avLst/>
@@ -41487,8 +41487,8 @@
         </p:nvSpPr>
         <p:spPr>
           <a:xfrm>
-            <a:off x="640080" y="4005072"/>
-            <a:ext cx="1783080" cy="237744"/>
+            <a:off x="640080" y="3829507"/>
+            <a:ext cx="1783080" cy="193853"/>
           </a:xfrm>
           <a:prstGeom prst="rect">
             <a:avLst/>
@@ -41526,7 +41526,7 @@
         </p:nvSpPr>
         <p:spPr>
           <a:xfrm>
-            <a:off x="2468880" y="4094226"/>
+            <a:off x="2468880" y="3896716"/>
             <a:ext cx="2377440" cy="59436"/>
           </a:xfrm>
           <a:prstGeom prst="roundRect">
@@ -41548,8 +41548,8 @@
         </p:nvSpPr>
         <p:spPr>
           <a:xfrm>
-            <a:off x="5029200" y="4005072"/>
-            <a:ext cx="822960" cy="237744"/>
+            <a:off x="5029200" y="3829507"/>
+            <a:ext cx="822960" cy="193853"/>
           </a:xfrm>
           <a:prstGeom prst="rect">
             <a:avLst/>
@@ -41587,8 +41587,8 @@
         </p:nvSpPr>
         <p:spPr>
           <a:xfrm>
-            <a:off x="5943600" y="4005072"/>
-            <a:ext cx="822960" cy="237744"/>
+            <a:off x="5943600" y="3829507"/>
+            <a:ext cx="822960" cy="193853"/>
           </a:xfrm>
           <a:prstGeom prst="rect">
             <a:avLst/>
@@ -41626,8 +41626,8 @@
         </p:nvSpPr>
         <p:spPr>
           <a:xfrm>
-            <a:off x="640080" y="4242816"/>
-            <a:ext cx="1783080" cy="237744"/>
+            <a:off x="640080" y="4023360"/>
+            <a:ext cx="1783080" cy="193853"/>
           </a:xfrm>
           <a:prstGeom prst="rect">
             <a:avLst/>
@@ -41665,7 +41665,7 @@
         </p:nvSpPr>
         <p:spPr>
           <a:xfrm>
-            <a:off x="2468880" y="4331970"/>
+            <a:off x="2468880" y="4090568"/>
             <a:ext cx="2377440" cy="59436"/>
           </a:xfrm>
           <a:prstGeom prst="roundRect">
@@ -41687,8 +41687,8 @@
         </p:nvSpPr>
         <p:spPr>
           <a:xfrm>
-            <a:off x="5029200" y="4242816"/>
-            <a:ext cx="822960" cy="237744"/>
+            <a:off x="5029200" y="4023360"/>
+            <a:ext cx="822960" cy="193853"/>
           </a:xfrm>
           <a:prstGeom prst="rect">
             <a:avLst/>
@@ -41726,8 +41726,8 @@
         </p:nvSpPr>
         <p:spPr>
           <a:xfrm>
-            <a:off x="5943600" y="4242816"/>
-            <a:ext cx="822960" cy="237744"/>
+            <a:off x="5943600" y="4023360"/>
+            <a:ext cx="822960" cy="193853"/>
           </a:xfrm>
           <a:prstGeom prst="rect">
             <a:avLst/>
@@ -41765,8 +41765,8 @@
         </p:nvSpPr>
         <p:spPr>
           <a:xfrm>
-            <a:off x="640080" y="4480560"/>
-            <a:ext cx="1783080" cy="237744"/>
+            <a:off x="640080" y="4217213"/>
+            <a:ext cx="1783080" cy="193853"/>
           </a:xfrm>
           <a:prstGeom prst="rect">
             <a:avLst/>
@@ -41804,7 +41804,7 @@
         </p:nvSpPr>
         <p:spPr>
           <a:xfrm>
-            <a:off x="2468880" y="4569714"/>
+            <a:off x="2468880" y="4284421"/>
             <a:ext cx="2377440" cy="59436"/>
           </a:xfrm>
           <a:prstGeom prst="roundRect">
@@ -41826,8 +41826,8 @@
         </p:nvSpPr>
         <p:spPr>
           <a:xfrm>
-            <a:off x="5029200" y="4480560"/>
-            <a:ext cx="822960" cy="237744"/>
+            <a:off x="5029200" y="4217213"/>
+            <a:ext cx="822960" cy="193853"/>
           </a:xfrm>
           <a:prstGeom prst="rect">
             <a:avLst/>
@@ -41865,8 +41865,8 @@
         </p:nvSpPr>
         <p:spPr>
           <a:xfrm>
-            <a:off x="5943600" y="4480560"/>
-            <a:ext cx="822960" cy="237744"/>
+            <a:off x="5943600" y="4217213"/>
+            <a:ext cx="822960" cy="193853"/>
           </a:xfrm>
           <a:prstGeom prst="rect">
             <a:avLst/>
@@ -41904,8 +41904,8 @@
         </p:nvSpPr>
         <p:spPr>
           <a:xfrm>
-            <a:off x="640080" y="4718304"/>
-            <a:ext cx="1783080" cy="237744"/>
+            <a:off x="640080" y="4411066"/>
+            <a:ext cx="1783080" cy="193853"/>
           </a:xfrm>
           <a:prstGeom prst="rect">
             <a:avLst/>
@@ -41943,7 +41943,7 @@
         </p:nvSpPr>
         <p:spPr>
           <a:xfrm>
-            <a:off x="2468880" y="4807458"/>
+            <a:off x="2468880" y="4478274"/>
             <a:ext cx="2377440" cy="59436"/>
           </a:xfrm>
           <a:prstGeom prst="roundRect">
@@ -41965,8 +41965,8 @@
         </p:nvSpPr>
         <p:spPr>
           <a:xfrm>
-            <a:off x="5029200" y="4718304"/>
-            <a:ext cx="822960" cy="237744"/>
+            <a:off x="5029200" y="4411066"/>
+            <a:ext cx="822960" cy="193853"/>
           </a:xfrm>
           <a:prstGeom prst="rect">
             <a:avLst/>
@@ -42004,8 +42004,8 @@
         </p:nvSpPr>
         <p:spPr>
           <a:xfrm>
-            <a:off x="5943600" y="4718304"/>
-            <a:ext cx="822960" cy="237744"/>
+            <a:off x="5943600" y="4411066"/>
+            <a:ext cx="822960" cy="193853"/>
           </a:xfrm>
           <a:prstGeom prst="rect">
             <a:avLst/>
@@ -42043,8 +42043,8 @@
         </p:nvSpPr>
         <p:spPr>
           <a:xfrm>
-            <a:off x="640080" y="4956048"/>
-            <a:ext cx="1783080" cy="237744"/>
+            <a:off x="640080" y="4604918"/>
+            <a:ext cx="1783080" cy="193853"/>
           </a:xfrm>
           <a:prstGeom prst="rect">
             <a:avLst/>
@@ -42082,7 +42082,7 @@
         </p:nvSpPr>
         <p:spPr>
           <a:xfrm>
-            <a:off x="2468880" y="5045202"/>
+            <a:off x="2468880" y="4672127"/>
             <a:ext cx="2377440" cy="59436"/>
           </a:xfrm>
           <a:prstGeom prst="roundRect">
@@ -42104,8 +42104,8 @@
         </p:nvSpPr>
         <p:spPr>
           <a:xfrm>
-            <a:off x="5029200" y="4956048"/>
-            <a:ext cx="822960" cy="237744"/>
+            <a:off x="5029200" y="4604918"/>
+            <a:ext cx="822960" cy="193853"/>
           </a:xfrm>
           <a:prstGeom prst="rect">
             <a:avLst/>
@@ -42143,8 +42143,8 @@
         </p:nvSpPr>
         <p:spPr>
           <a:xfrm>
-            <a:off x="5943600" y="4956048"/>
-            <a:ext cx="822960" cy="237744"/>
+            <a:off x="5943600" y="4604918"/>
+            <a:ext cx="822960" cy="193853"/>
           </a:xfrm>
           <a:prstGeom prst="rect">
             <a:avLst/>
@@ -42182,7 +42182,7 @@
         </p:nvSpPr>
         <p:spPr>
           <a:xfrm>
-            <a:off x="640080" y="5230368"/>
+            <a:off x="640080" y="4817059"/>
             <a:ext cx="6126480" cy="10973"/>
           </a:xfrm>
           <a:prstGeom prst="rect">
@@ -42202,8 +42202,8 @@
         </p:nvSpPr>
         <p:spPr>
           <a:xfrm>
-            <a:off x="640080" y="5266944"/>
-            <a:ext cx="1783080" cy="237744"/>
+            <a:off x="640080" y="4844491"/>
+            <a:ext cx="1783080" cy="193853"/>
           </a:xfrm>
           <a:prstGeom prst="rect">
             <a:avLst/>
@@ -42241,8 +42241,8 @@
         </p:nvSpPr>
         <p:spPr>
           <a:xfrm>
-            <a:off x="2468880" y="5266944"/>
-            <a:ext cx="2377440" cy="237744"/>
+            <a:off x="2468880" y="4844491"/>
+            <a:ext cx="2377440" cy="193853"/>
           </a:xfrm>
           <a:prstGeom prst="rect">
             <a:avLst/>
@@ -42280,8 +42280,8 @@
         </p:nvSpPr>
         <p:spPr>
           <a:xfrm>
-            <a:off x="5029200" y="5266944"/>
-            <a:ext cx="822960" cy="237744"/>
+            <a:off x="5029200" y="4844491"/>
+            <a:ext cx="822960" cy="193853"/>
           </a:xfrm>
           <a:prstGeom prst="rect">
             <a:avLst/>
@@ -42319,8 +42319,8 @@
         </p:nvSpPr>
         <p:spPr>
           <a:xfrm>
-            <a:off x="5943600" y="5266944"/>
-            <a:ext cx="822960" cy="237744"/>
+            <a:off x="5943600" y="4844491"/>
+            <a:ext cx="822960" cy="193853"/>
           </a:xfrm>
           <a:prstGeom prst="rect">
             <a:avLst/>
@@ -42358,8 +42358,8 @@
         </p:nvSpPr>
         <p:spPr>
           <a:xfrm>
-            <a:off x="640080" y="5614416"/>
-            <a:ext cx="6126480" cy="292608"/>
+            <a:off x="640080" y="5029200"/>
+            <a:ext cx="6126480" cy="310896"/>
           </a:xfrm>
           <a:prstGeom prst="rect">
             <a:avLst/>
@@ -42383,7 +42383,7 @@
                 <a:ea typeface="Poppins" pitchFamily="34" charset="-122"/>
                 <a:cs typeface="Poppins" pitchFamily="34" charset="-120"/>
               </a:rPr>
-              <a:t>Available staff = the 9 Professional Services people assigned to PS-pipeline tickets open now or closed this week, at a 38h standard week. Anton Lopez, Jasmine Hikuroa, Bjorn Magabo, Phuong Ho, Katherine Fenwick and Yeran Hettiarachchy carry PS-pipeline tickets but are not Professional Services staff — they and their hours are excluded.</a:t>
+              <a:t>Available staff = the 9 PS people on PS-pipeline tickets open now or closed this week, at 38h each. Lopez, Hikuroa, Magabo, Ho, Fenwick and Hettiarachchy hold PS tickets but are not PS staff — they and their hours are excluded.</a:t>
             </a:r>
             <a:endParaRPr lang="en-US" sz="580" dirty="0"/>
           </a:p>
@@ -42398,11 +42398,11 @@
         <p:spPr>
           <a:xfrm>
             <a:off x="7178040" y="2395728"/>
-            <a:ext cx="4599432" cy="1700784"/>
+            <a:ext cx="4599432" cy="1481328"/>
           </a:xfrm>
           <a:prstGeom prst="roundRect">
             <a:avLst>
-              <a:gd name="adj" fmla="val 3763"/>
+              <a:gd name="adj" fmla="val 4321"/>
             </a:avLst>
           </a:prstGeom>
           <a:solidFill>
@@ -42426,8 +42426,8 @@
         </p:nvSpPr>
         <p:spPr>
           <a:xfrm>
-            <a:off x="7379208" y="2487168"/>
-            <a:ext cx="4197096" cy="237744"/>
+            <a:off x="7379208" y="2468880"/>
+            <a:ext cx="4197096" cy="219456"/>
           </a:xfrm>
           <a:prstGeom prst="rect">
             <a:avLst/>
@@ -42479,7 +42479,7 @@
         </p:nvSpPr>
         <p:spPr>
           <a:xfrm>
-            <a:off x="7379208" y="2743200"/>
+            <a:off x="7379208" y="2706624"/>
             <a:ext cx="1371600" cy="164592"/>
           </a:xfrm>
           <a:prstGeom prst="rect">
@@ -42518,7 +42518,7 @@
         </p:nvSpPr>
         <p:spPr>
           <a:xfrm>
-            <a:off x="10287000" y="2743200"/>
+            <a:off x="10287000" y="2706624"/>
             <a:ext cx="640080" cy="164592"/>
           </a:xfrm>
           <a:prstGeom prst="rect">
@@ -42557,7 +42557,7 @@
         </p:nvSpPr>
         <p:spPr>
           <a:xfrm>
-            <a:off x="10972800" y="2743200"/>
+            <a:off x="10972800" y="2706624"/>
             <a:ext cx="603504" cy="164592"/>
           </a:xfrm>
           <a:prstGeom prst="rect">
@@ -42596,8 +42596,8 @@
         </p:nvSpPr>
         <p:spPr>
           <a:xfrm>
-            <a:off x="7379208" y="2907792"/>
-            <a:ext cx="1371600" cy="152400"/>
+            <a:off x="7379208" y="2880360"/>
+            <a:ext cx="1371600" cy="126492"/>
           </a:xfrm>
           <a:prstGeom prst="rect">
             <a:avLst/>
@@ -42613,7 +42613,7 @@
               <a:buNone/>
             </a:pPr>
             <a:r>
-              <a:rPr lang="en-US" sz="800" b="1" dirty="0">
+              <a:rPr lang="en-US" sz="700" b="1" dirty="0">
                 <a:solidFill>
                   <a:srgbClr val="12293A"/>
                 </a:solidFill>
@@ -42623,7 +42623,7 @@
               </a:rPr>
               <a:t>Tech</a:t>
             </a:r>
-            <a:endParaRPr lang="en-US" sz="800" dirty="0"/>
+            <a:endParaRPr lang="en-US" sz="700" dirty="0"/>
           </a:p>
         </p:txBody>
       </p:sp>
@@ -42635,12 +42635,12 @@
         </p:nvSpPr>
         <p:spPr>
           <a:xfrm>
-            <a:off x="8823960" y="2954274"/>
-            <a:ext cx="1371600" cy="59436"/>
+            <a:off x="8823960" y="2916174"/>
+            <a:ext cx="1371600" cy="54864"/>
           </a:xfrm>
           <a:prstGeom prst="roundRect">
             <a:avLst>
-              <a:gd name="adj" fmla="val 49231"/>
+              <a:gd name="adj" fmla="val 50000"/>
             </a:avLst>
           </a:prstGeom>
           <a:solidFill>
@@ -42657,12 +42657,12 @@
         </p:nvSpPr>
         <p:spPr>
           <a:xfrm>
-            <a:off x="8823960" y="2954274"/>
-            <a:ext cx="1371600" cy="59436"/>
+            <a:off x="8823960" y="2916174"/>
+            <a:ext cx="1371600" cy="54864"/>
           </a:xfrm>
           <a:prstGeom prst="roundRect">
             <a:avLst>
-              <a:gd name="adj" fmla="val 49231"/>
+              <a:gd name="adj" fmla="val 50000"/>
             </a:avLst>
           </a:prstGeom>
           <a:solidFill>
@@ -42679,8 +42679,8 @@
         </p:nvSpPr>
         <p:spPr>
           <a:xfrm>
-            <a:off x="10287000" y="2907792"/>
-            <a:ext cx="640080" cy="152400"/>
+            <a:off x="10287000" y="2880360"/>
+            <a:ext cx="640080" cy="126492"/>
           </a:xfrm>
           <a:prstGeom prst="rect">
             <a:avLst/>
@@ -42696,7 +42696,7 @@
               <a:buNone/>
             </a:pPr>
             <a:r>
-              <a:rPr lang="en-US" sz="800" b="1" dirty="0">
+              <a:rPr lang="en-US" sz="750" b="1" dirty="0">
                 <a:solidFill>
                   <a:srgbClr val="2C8394"/>
                 </a:solidFill>
@@ -42706,7 +42706,7 @@
               </a:rPr>
               <a:t>16.50h</a:t>
             </a:r>
-            <a:endParaRPr lang="en-US" sz="800" dirty="0"/>
+            <a:endParaRPr lang="en-US" sz="750" dirty="0"/>
           </a:p>
         </p:txBody>
       </p:sp>
@@ -42718,8 +42718,8 @@
         </p:nvSpPr>
         <p:spPr>
           <a:xfrm>
-            <a:off x="10972800" y="2907792"/>
-            <a:ext cx="603504" cy="152400"/>
+            <a:off x="10972800" y="2880360"/>
+            <a:ext cx="603504" cy="126492"/>
           </a:xfrm>
           <a:prstGeom prst="rect">
             <a:avLst/>
@@ -42735,7 +42735,7 @@
               <a:buNone/>
             </a:pPr>
             <a:r>
-              <a:rPr lang="en-US" sz="800" dirty="0">
+              <a:rPr lang="en-US" sz="750" dirty="0">
                 <a:solidFill>
                   <a:srgbClr val="5E7280"/>
                 </a:solidFill>
@@ -42745,7 +42745,7 @@
               </a:rPr>
               <a:t>79.5%</a:t>
             </a:r>
-            <a:endParaRPr lang="en-US" sz="800" dirty="0"/>
+            <a:endParaRPr lang="en-US" sz="750" dirty="0"/>
           </a:p>
         </p:txBody>
       </p:sp>
@@ -42757,8 +42757,8 @@
         </p:nvSpPr>
         <p:spPr>
           <a:xfrm>
-            <a:off x="7379208" y="3060192"/>
-            <a:ext cx="1371600" cy="152400"/>
+            <a:off x="7379208" y="3006852"/>
+            <a:ext cx="1371600" cy="126492"/>
           </a:xfrm>
           <a:prstGeom prst="rect">
             <a:avLst/>
@@ -42774,7 +42774,7 @@
               <a:buNone/>
             </a:pPr>
             <a:r>
-              <a:rPr lang="en-US" sz="800" b="1" dirty="0">
+              <a:rPr lang="en-US" sz="700" b="1" dirty="0">
                 <a:solidFill>
                   <a:srgbClr val="12293A"/>
                 </a:solidFill>
@@ -42784,7 +42784,7 @@
               </a:rPr>
               <a:t>Integration</a:t>
             </a:r>
-            <a:endParaRPr lang="en-US" sz="800" dirty="0"/>
+            <a:endParaRPr lang="en-US" sz="700" dirty="0"/>
           </a:p>
         </p:txBody>
       </p:sp>
@@ -42796,12 +42796,12 @@
         </p:nvSpPr>
         <p:spPr>
           <a:xfrm>
-            <a:off x="8823960" y="3106674"/>
-            <a:ext cx="1371600" cy="59436"/>
+            <a:off x="8823960" y="3042666"/>
+            <a:ext cx="1371600" cy="54864"/>
           </a:xfrm>
           <a:prstGeom prst="roundRect">
             <a:avLst>
-              <a:gd name="adj" fmla="val 49231"/>
+              <a:gd name="adj" fmla="val 50000"/>
             </a:avLst>
           </a:prstGeom>
           <a:solidFill>
@@ -42818,12 +42818,12 @@
         </p:nvSpPr>
         <p:spPr>
           <a:xfrm>
-            <a:off x="8823960" y="3106674"/>
-            <a:ext cx="166255" cy="59436"/>
+            <a:off x="8823960" y="3042666"/>
+            <a:ext cx="166255" cy="54864"/>
           </a:xfrm>
           <a:prstGeom prst="roundRect">
             <a:avLst>
-              <a:gd name="adj" fmla="val 49231"/>
+              <a:gd name="adj" fmla="val 50000"/>
             </a:avLst>
           </a:prstGeom>
           <a:solidFill>
@@ -42840,8 +42840,8 @@
         </p:nvSpPr>
         <p:spPr>
           <a:xfrm>
-            <a:off x="10287000" y="3060192"/>
-            <a:ext cx="640080" cy="152400"/>
+            <a:off x="10287000" y="3006852"/>
+            <a:ext cx="640080" cy="126492"/>
           </a:xfrm>
           <a:prstGeom prst="rect">
             <a:avLst/>
@@ -42857,7 +42857,7 @@
               <a:buNone/>
             </a:pPr>
             <a:r>
-              <a:rPr lang="en-US" sz="800" b="1" dirty="0">
+              <a:rPr lang="en-US" sz="750" b="1" dirty="0">
                 <a:solidFill>
                   <a:srgbClr val="2C8394"/>
                 </a:solidFill>
@@ -42867,7 +42867,7 @@
               </a:rPr>
               <a:t>2.00h</a:t>
             </a:r>
-            <a:endParaRPr lang="en-US" sz="800" dirty="0"/>
+            <a:endParaRPr lang="en-US" sz="750" dirty="0"/>
           </a:p>
         </p:txBody>
       </p:sp>
@@ -42879,8 +42879,8 @@
         </p:nvSpPr>
         <p:spPr>
           <a:xfrm>
-            <a:off x="10972800" y="3060192"/>
-            <a:ext cx="603504" cy="152400"/>
+            <a:off x="10972800" y="3006852"/>
+            <a:ext cx="603504" cy="126492"/>
           </a:xfrm>
           <a:prstGeom prst="rect">
             <a:avLst/>
@@ -42896,7 +42896,7 @@
               <a:buNone/>
             </a:pPr>
             <a:r>
-              <a:rPr lang="en-US" sz="800" dirty="0">
+              <a:rPr lang="en-US" sz="750" dirty="0">
                 <a:solidFill>
                   <a:srgbClr val="5E7280"/>
                 </a:solidFill>
@@ -42906,7 +42906,7 @@
               </a:rPr>
               <a:t>9.6%</a:t>
             </a:r>
-            <a:endParaRPr lang="en-US" sz="800" dirty="0"/>
+            <a:endParaRPr lang="en-US" sz="750" dirty="0"/>
           </a:p>
         </p:txBody>
       </p:sp>
@@ -42918,8 +42918,8 @@
         </p:nvSpPr>
         <p:spPr>
           <a:xfrm>
-            <a:off x="7379208" y="3212592"/>
-            <a:ext cx="1371600" cy="152400"/>
+            <a:off x="7379208" y="3133344"/>
+            <a:ext cx="1371600" cy="126492"/>
           </a:xfrm>
           <a:prstGeom prst="rect">
             <a:avLst/>
@@ -42935,7 +42935,7 @@
               <a:buNone/>
             </a:pPr>
             <a:r>
-              <a:rPr lang="en-US" sz="800" b="1" dirty="0">
+              <a:rPr lang="en-US" sz="700" b="1" dirty="0">
                 <a:solidFill>
                   <a:srgbClr val="12293A"/>
                 </a:solidFill>
@@ -42945,7 +42945,7 @@
               </a:rPr>
               <a:t>Not required</a:t>
             </a:r>
-            <a:endParaRPr lang="en-US" sz="800" dirty="0"/>
+            <a:endParaRPr lang="en-US" sz="700" dirty="0"/>
           </a:p>
         </p:txBody>
       </p:sp>
@@ -42957,12 +42957,12 @@
         </p:nvSpPr>
         <p:spPr>
           <a:xfrm>
-            <a:off x="8823960" y="3259074"/>
-            <a:ext cx="1371600" cy="59436"/>
+            <a:off x="8823960" y="3169158"/>
+            <a:ext cx="1371600" cy="54864"/>
           </a:xfrm>
           <a:prstGeom prst="roundRect">
             <a:avLst>
-              <a:gd name="adj" fmla="val 49231"/>
+              <a:gd name="adj" fmla="val 50000"/>
             </a:avLst>
           </a:prstGeom>
           <a:solidFill>
@@ -42979,12 +42979,12 @@
         </p:nvSpPr>
         <p:spPr>
           <a:xfrm>
-            <a:off x="8823960" y="3259074"/>
-            <a:ext cx="166255" cy="59436"/>
+            <a:off x="8823960" y="3169158"/>
+            <a:ext cx="166255" cy="54864"/>
           </a:xfrm>
           <a:prstGeom prst="roundRect">
             <a:avLst>
-              <a:gd name="adj" fmla="val 49231"/>
+              <a:gd name="adj" fmla="val 50000"/>
             </a:avLst>
           </a:prstGeom>
           <a:solidFill>
@@ -43001,8 +43001,8 @@
         </p:nvSpPr>
         <p:spPr>
           <a:xfrm>
-            <a:off x="10287000" y="3212592"/>
-            <a:ext cx="640080" cy="152400"/>
+            <a:off x="10287000" y="3133344"/>
+            <a:ext cx="640080" cy="126492"/>
           </a:xfrm>
           <a:prstGeom prst="rect">
             <a:avLst/>
@@ -43018,7 +43018,7 @@
               <a:buNone/>
             </a:pPr>
             <a:r>
-              <a:rPr lang="en-US" sz="800" b="1" dirty="0">
+              <a:rPr lang="en-US" sz="750" b="1" dirty="0">
                 <a:solidFill>
                   <a:srgbClr val="2C8394"/>
                 </a:solidFill>
@@ -43028,7 +43028,7 @@
               </a:rPr>
               <a:t>2.00h</a:t>
             </a:r>
-            <a:endParaRPr lang="en-US" sz="800" dirty="0"/>
+            <a:endParaRPr lang="en-US" sz="750" dirty="0"/>
           </a:p>
         </p:txBody>
       </p:sp>
@@ -43040,8 +43040,8 @@
         </p:nvSpPr>
         <p:spPr>
           <a:xfrm>
-            <a:off x="10972800" y="3212592"/>
-            <a:ext cx="603504" cy="152400"/>
+            <a:off x="10972800" y="3133344"/>
+            <a:ext cx="603504" cy="126492"/>
           </a:xfrm>
           <a:prstGeom prst="rect">
             <a:avLst/>
@@ -43057,7 +43057,7 @@
               <a:buNone/>
             </a:pPr>
             <a:r>
-              <a:rPr lang="en-US" sz="800" dirty="0">
+              <a:rPr lang="en-US" sz="750" dirty="0">
                 <a:solidFill>
                   <a:srgbClr val="5E7280"/>
                 </a:solidFill>
@@ -43067,7 +43067,7 @@
               </a:rPr>
               <a:t>9.6%</a:t>
             </a:r>
-            <a:endParaRPr lang="en-US" sz="800" dirty="0"/>
+            <a:endParaRPr lang="en-US" sz="750" dirty="0"/>
           </a:p>
         </p:txBody>
       </p:sp>
@@ -43079,8 +43079,8 @@
         </p:nvSpPr>
         <p:spPr>
           <a:xfrm>
-            <a:off x="7379208" y="3364992"/>
-            <a:ext cx="1371600" cy="152400"/>
+            <a:off x="7379208" y="3259836"/>
+            <a:ext cx="1371600" cy="126492"/>
           </a:xfrm>
           <a:prstGeom prst="rect">
             <a:avLst/>
@@ -43096,7 +43096,7 @@
               <a:buNone/>
             </a:pPr>
             <a:r>
-              <a:rPr lang="en-US" sz="800" b="1" dirty="0">
+              <a:rPr lang="en-US" sz="700" b="1" dirty="0">
                 <a:solidFill>
                   <a:srgbClr val="12293A"/>
                 </a:solidFill>
@@ -43106,7 +43106,7 @@
               </a:rPr>
               <a:t>Warranty</a:t>
             </a:r>
-            <a:endParaRPr lang="en-US" sz="800" dirty="0"/>
+            <a:endParaRPr lang="en-US" sz="700" dirty="0"/>
           </a:p>
         </p:txBody>
       </p:sp>
@@ -43118,12 +43118,12 @@
         </p:nvSpPr>
         <p:spPr>
           <a:xfrm>
-            <a:off x="8823960" y="3411474"/>
-            <a:ext cx="1371600" cy="59436"/>
+            <a:off x="8823960" y="3295650"/>
+            <a:ext cx="1371600" cy="54864"/>
           </a:xfrm>
           <a:prstGeom prst="roundRect">
             <a:avLst>
-              <a:gd name="adj" fmla="val 49231"/>
+              <a:gd name="adj" fmla="val 50000"/>
             </a:avLst>
           </a:prstGeom>
           <a:solidFill>
@@ -43140,12 +43140,12 @@
         </p:nvSpPr>
         <p:spPr>
           <a:xfrm>
-            <a:off x="8823960" y="3411474"/>
-            <a:ext cx="45720" cy="59436"/>
+            <a:off x="8823960" y="3295650"/>
+            <a:ext cx="45720" cy="54864"/>
           </a:xfrm>
           <a:prstGeom prst="roundRect">
             <a:avLst>
-              <a:gd name="adj" fmla="val 64000"/>
+              <a:gd name="adj" fmla="val 60000"/>
             </a:avLst>
           </a:prstGeom>
           <a:solidFill>
@@ -43162,8 +43162,8 @@
         </p:nvSpPr>
         <p:spPr>
           <a:xfrm>
-            <a:off x="10287000" y="3364992"/>
-            <a:ext cx="640080" cy="152400"/>
+            <a:off x="10287000" y="3259836"/>
+            <a:ext cx="640080" cy="126492"/>
           </a:xfrm>
           <a:prstGeom prst="rect">
             <a:avLst/>
@@ -43179,7 +43179,7 @@
               <a:buNone/>
             </a:pPr>
             <a:r>
-              <a:rPr lang="en-US" sz="800" b="1" dirty="0">
+              <a:rPr lang="en-US" sz="750" b="1" dirty="0">
                 <a:solidFill>
                   <a:srgbClr val="2C8394"/>
                 </a:solidFill>
@@ -43189,7 +43189,7 @@
               </a:rPr>
               <a:t>0.25h</a:t>
             </a:r>
-            <a:endParaRPr lang="en-US" sz="800" dirty="0"/>
+            <a:endParaRPr lang="en-US" sz="750" dirty="0"/>
           </a:p>
         </p:txBody>
       </p:sp>
@@ -43201,8 +43201,8 @@
         </p:nvSpPr>
         <p:spPr>
           <a:xfrm>
-            <a:off x="10972800" y="3364992"/>
-            <a:ext cx="603504" cy="152400"/>
+            <a:off x="10972800" y="3259836"/>
+            <a:ext cx="603504" cy="126492"/>
           </a:xfrm>
           <a:prstGeom prst="rect">
             <a:avLst/>
@@ -43218,7 +43218,7 @@
               <a:buNone/>
             </a:pPr>
             <a:r>
-              <a:rPr lang="en-US" sz="800" dirty="0">
+              <a:rPr lang="en-US" sz="750" dirty="0">
                 <a:solidFill>
                   <a:srgbClr val="5E7280"/>
                 </a:solidFill>
@@ -43228,7 +43228,7 @@
               </a:rPr>
               <a:t>1.2%</a:t>
             </a:r>
-            <a:endParaRPr lang="en-US" sz="800" dirty="0"/>
+            <a:endParaRPr lang="en-US" sz="750" dirty="0"/>
           </a:p>
         </p:txBody>
       </p:sp>
@@ -43240,8 +43240,8 @@
         </p:nvSpPr>
         <p:spPr>
           <a:xfrm>
-            <a:off x="7379208" y="3517392"/>
-            <a:ext cx="1371600" cy="152400"/>
+            <a:off x="7379208" y="3386328"/>
+            <a:ext cx="1371600" cy="126492"/>
           </a:xfrm>
           <a:prstGeom prst="rect">
             <a:avLst/>
@@ -43257,7 +43257,7 @@
               <a:buNone/>
             </a:pPr>
             <a:r>
-              <a:rPr lang="en-US" sz="800" dirty="0">
+              <a:rPr lang="en-US" sz="700" dirty="0">
                 <a:solidFill>
                   <a:srgbClr val="5E7280"/>
                 </a:solidFill>
@@ -43267,7 +43267,7 @@
               </a:rPr>
               <a:t>Onboarding</a:t>
             </a:r>
-            <a:endParaRPr lang="en-US" sz="800" dirty="0"/>
+            <a:endParaRPr lang="en-US" sz="700" dirty="0"/>
           </a:p>
         </p:txBody>
       </p:sp>
@@ -43279,12 +43279,12 @@
         </p:nvSpPr>
         <p:spPr>
           <a:xfrm>
-            <a:off x="8823960" y="3563874"/>
-            <a:ext cx="1371600" cy="59436"/>
+            <a:off x="8823960" y="3422142"/>
+            <a:ext cx="1371600" cy="54864"/>
           </a:xfrm>
           <a:prstGeom prst="roundRect">
             <a:avLst>
-              <a:gd name="adj" fmla="val 49231"/>
+              <a:gd name="adj" fmla="val 50000"/>
             </a:avLst>
           </a:prstGeom>
           <a:solidFill>
@@ -43301,8 +43301,8 @@
         </p:nvSpPr>
         <p:spPr>
           <a:xfrm>
-            <a:off x="10287000" y="3517392"/>
-            <a:ext cx="640080" cy="152400"/>
+            <a:off x="10287000" y="3386328"/>
+            <a:ext cx="640080" cy="126492"/>
           </a:xfrm>
           <a:prstGeom prst="rect">
             <a:avLst/>
@@ -43318,7 +43318,7 @@
               <a:buNone/>
             </a:pPr>
             <a:r>
-              <a:rPr lang="en-US" sz="800" dirty="0">
+              <a:rPr lang="en-US" sz="750" dirty="0">
                 <a:solidFill>
                   <a:srgbClr val="8FA1AC"/>
                 </a:solidFill>
@@ -43328,7 +43328,7 @@
               </a:rPr>
               <a:t>—</a:t>
             </a:r>
-            <a:endParaRPr lang="en-US" sz="800" dirty="0"/>
+            <a:endParaRPr lang="en-US" sz="750" dirty="0"/>
           </a:p>
         </p:txBody>
       </p:sp>
@@ -43340,8 +43340,8 @@
         </p:nvSpPr>
         <p:spPr>
           <a:xfrm>
-            <a:off x="10972800" y="3517392"/>
-            <a:ext cx="603504" cy="152400"/>
+            <a:off x="10972800" y="3386328"/>
+            <a:ext cx="603504" cy="126492"/>
           </a:xfrm>
           <a:prstGeom prst="rect">
             <a:avLst/>
@@ -43357,7 +43357,7 @@
               <a:buNone/>
             </a:pPr>
             <a:r>
-              <a:rPr lang="en-US" sz="650" dirty="0">
+              <a:rPr lang="en-US" sz="600" dirty="0">
                 <a:solidFill>
                   <a:srgbClr val="8FA1AC"/>
                 </a:solidFill>
@@ -43367,7 +43367,7 @@
               </a:rPr>
               <a:t>none</a:t>
             </a:r>
-            <a:endParaRPr lang="en-US" sz="650" dirty="0"/>
+            <a:endParaRPr lang="en-US" sz="600" dirty="0"/>
           </a:p>
         </p:txBody>
       </p:sp>
@@ -43379,8 +43379,8 @@
         </p:nvSpPr>
         <p:spPr>
           <a:xfrm>
-            <a:off x="7379208" y="3669792"/>
-            <a:ext cx="1371600" cy="152400"/>
+            <a:off x="7379208" y="3512820"/>
+            <a:ext cx="1371600" cy="126492"/>
           </a:xfrm>
           <a:prstGeom prst="rect">
             <a:avLst/>
@@ -43396,7 +43396,7 @@
               <a:buNone/>
             </a:pPr>
             <a:r>
-              <a:rPr lang="en-US" sz="800" dirty="0">
+              <a:rPr lang="en-US" sz="700" dirty="0">
                 <a:solidFill>
                   <a:srgbClr val="5E7280"/>
                 </a:solidFill>
@@ -43406,7 +43406,7 @@
               </a:rPr>
               <a:t>Training</a:t>
             </a:r>
-            <a:endParaRPr lang="en-US" sz="800" dirty="0"/>
+            <a:endParaRPr lang="en-US" sz="700" dirty="0"/>
           </a:p>
         </p:txBody>
       </p:sp>
@@ -43418,12 +43418,12 @@
         </p:nvSpPr>
         <p:spPr>
           <a:xfrm>
-            <a:off x="8823960" y="3716274"/>
-            <a:ext cx="1371600" cy="59436"/>
+            <a:off x="8823960" y="3548634"/>
+            <a:ext cx="1371600" cy="54864"/>
           </a:xfrm>
           <a:prstGeom prst="roundRect">
             <a:avLst>
-              <a:gd name="adj" fmla="val 49231"/>
+              <a:gd name="adj" fmla="val 50000"/>
             </a:avLst>
           </a:prstGeom>
           <a:solidFill>
@@ -43440,8 +43440,8 @@
         </p:nvSpPr>
         <p:spPr>
           <a:xfrm>
-            <a:off x="10287000" y="3669792"/>
-            <a:ext cx="640080" cy="152400"/>
+            <a:off x="10287000" y="3512820"/>
+            <a:ext cx="640080" cy="126492"/>
           </a:xfrm>
           <a:prstGeom prst="rect">
             <a:avLst/>
@@ -43457,7 +43457,7 @@
               <a:buNone/>
             </a:pPr>
             <a:r>
-              <a:rPr lang="en-US" sz="800" dirty="0">
+              <a:rPr lang="en-US" sz="750" dirty="0">
                 <a:solidFill>
                   <a:srgbClr val="8FA1AC"/>
                 </a:solidFill>
@@ -43467,20 +43467,157 @@
               </a:rPr>
               <a:t>—</a:t>
             </a:r>
+            <a:endParaRPr lang="en-US" sz="750" dirty="0"/>
+          </a:p>
+        </p:txBody>
+      </p:sp>
+      <p:sp>
+        <p:nvSpPr>
+          <p:cNvPr id="121" name="Text 119"/>
+          <p:cNvSpPr txBox="1"/>
+          <p:nvPr/>
+        </p:nvSpPr>
+        <p:spPr>
+          <a:xfrm>
+            <a:off x="10972800" y="3512820"/>
+            <a:ext cx="603504" cy="126492"/>
+          </a:xfrm>
+          <a:prstGeom prst="rect">
+            <a:avLst/>
+          </a:prstGeom>
+          <a:noFill/>
+          <a:ln/>
+        </p:spPr>
+        <p:txBody>
+          <a:bodyPr wrap="square" lIns="0" tIns="0" rIns="0" bIns="0" rtlCol="0" anchor="ctr"/>
+          <a:lstStyle/>
+          <a:p>
+            <a:pPr algn="r" indent="0" marL="0">
+              <a:buNone/>
+            </a:pPr>
+            <a:r>
+              <a:rPr lang="en-US" sz="600" dirty="0">
+                <a:solidFill>
+                  <a:srgbClr val="8FA1AC"/>
+                </a:solidFill>
+                <a:latin typeface="Poppins" pitchFamily="34" charset="0"/>
+                <a:ea typeface="Poppins" pitchFamily="34" charset="-122"/>
+                <a:cs typeface="Poppins" pitchFamily="34" charset="-120"/>
+              </a:rPr>
+              <a:t>none</a:t>
+            </a:r>
+            <a:endParaRPr lang="en-US" sz="600" dirty="0"/>
+          </a:p>
+        </p:txBody>
+      </p:sp>
+      <p:sp>
+        <p:nvSpPr>
+          <p:cNvPr id="122" name="Shape 120"/>
+          <p:cNvSpPr/>
+          <p:nvPr/>
+        </p:nvSpPr>
+        <p:spPr>
+          <a:xfrm>
+            <a:off x="7379208" y="3657600"/>
+            <a:ext cx="4197096" cy="10973"/>
+          </a:xfrm>
+          <a:prstGeom prst="rect">
+            <a:avLst/>
+          </a:prstGeom>
+          <a:solidFill>
+            <a:srgbClr val="12293A"/>
+          </a:solidFill>
+          <a:ln/>
+        </p:spPr>
+      </p:sp>
+      <p:sp>
+        <p:nvSpPr>
+          <p:cNvPr id="123" name="Text 121"/>
+          <p:cNvSpPr txBox="1"/>
+          <p:nvPr/>
+        </p:nvSpPr>
+        <p:spPr>
+          <a:xfrm>
+            <a:off x="7379208" y="3675888"/>
+            <a:ext cx="1371600" cy="182880"/>
+          </a:xfrm>
+          <a:prstGeom prst="rect">
+            <a:avLst/>
+          </a:prstGeom>
+          <a:noFill/>
+          <a:ln/>
+        </p:spPr>
+        <p:txBody>
+          <a:bodyPr wrap="square" lIns="0" tIns="0" rIns="0" bIns="0" rtlCol="0" anchor="ctr"/>
+          <a:lstStyle/>
+          <a:p>
+            <a:pPr indent="0" marL="0">
+              <a:buNone/>
+            </a:pPr>
+            <a:r>
+              <a:rPr lang="en-US" sz="800" b="1" dirty="0">
+                <a:solidFill>
+                  <a:srgbClr val="12293A"/>
+                </a:solidFill>
+                <a:latin typeface="Poppins" pitchFamily="34" charset="0"/>
+                <a:ea typeface="Poppins" pitchFamily="34" charset="-122"/>
+                <a:cs typeface="Poppins" pitchFamily="34" charset="-120"/>
+              </a:rPr>
+              <a:t>TOTAL</a:t>
+            </a:r>
             <a:endParaRPr lang="en-US" sz="800" dirty="0"/>
           </a:p>
         </p:txBody>
       </p:sp>
       <p:sp>
         <p:nvSpPr>
-          <p:cNvPr id="121" name="Text 119"/>
-          <p:cNvSpPr txBox="1"/>
-          <p:nvPr/>
-        </p:nvSpPr>
-        <p:spPr>
-          <a:xfrm>
-            <a:off x="10972800" y="3669792"/>
-            <a:ext cx="603504" cy="152400"/>
+          <p:cNvPr id="124" name="Text 122"/>
+          <p:cNvSpPr txBox="1"/>
+          <p:nvPr/>
+        </p:nvSpPr>
+        <p:spPr>
+          <a:xfrm>
+            <a:off x="8823960" y="3675888"/>
+            <a:ext cx="1371600" cy="182880"/>
+          </a:xfrm>
+          <a:prstGeom prst="rect">
+            <a:avLst/>
+          </a:prstGeom>
+          <a:noFill/>
+          <a:ln/>
+        </p:spPr>
+        <p:txBody>
+          <a:bodyPr wrap="square" lIns="0" tIns="0" rIns="0" bIns="0" rtlCol="0" anchor="ctr"/>
+          <a:lstStyle/>
+          <a:p>
+            <a:pPr indent="0" marL="0">
+              <a:buNone/>
+            </a:pPr>
+            <a:r>
+              <a:rPr lang="en-US" sz="630" dirty="0">
+                <a:solidFill>
+                  <a:srgbClr val="5E7280"/>
+                </a:solidFill>
+                <a:latin typeface="Poppins" pitchFamily="34" charset="0"/>
+                <a:ea typeface="Poppins" pitchFamily="34" charset="-122"/>
+                <a:cs typeface="Poppins" pitchFamily="34" charset="-120"/>
+              </a:rPr>
+              <a:t>11 PS items carry time</a:t>
+            </a:r>
+            <a:endParaRPr lang="en-US" sz="630" dirty="0"/>
+          </a:p>
+        </p:txBody>
+      </p:sp>
+      <p:sp>
+        <p:nvSpPr>
+          <p:cNvPr id="125" name="Text 123"/>
+          <p:cNvSpPr txBox="1"/>
+          <p:nvPr/>
+        </p:nvSpPr>
+        <p:spPr>
+          <a:xfrm>
+            <a:off x="10287000" y="3675888"/>
+            <a:ext cx="640080" cy="182880"/>
           </a:xfrm>
           <a:prstGeom prst="rect">
             <a:avLst/>
@@ -43496,74 +43633,15 @@
               <a:buNone/>
             </a:pPr>
             <a:r>
-              <a:rPr lang="en-US" sz="650" dirty="0">
-                <a:solidFill>
-                  <a:srgbClr val="8FA1AC"/>
-                </a:solidFill>
-                <a:latin typeface="Poppins" pitchFamily="34" charset="0"/>
-                <a:ea typeface="Poppins" pitchFamily="34" charset="-122"/>
-                <a:cs typeface="Poppins" pitchFamily="34" charset="-120"/>
-              </a:rPr>
-              <a:t>none</a:t>
-            </a:r>
-            <a:endParaRPr lang="en-US" sz="650" dirty="0"/>
-          </a:p>
-        </p:txBody>
-      </p:sp>
-      <p:sp>
-        <p:nvSpPr>
-          <p:cNvPr id="122" name="Shape 120"/>
-          <p:cNvSpPr/>
-          <p:nvPr/>
-        </p:nvSpPr>
-        <p:spPr>
-          <a:xfrm>
-            <a:off x="7379208" y="3849624"/>
-            <a:ext cx="4197096" cy="10973"/>
-          </a:xfrm>
-          <a:prstGeom prst="rect">
-            <a:avLst/>
-          </a:prstGeom>
-          <a:solidFill>
-            <a:srgbClr val="12293A"/>
-          </a:solidFill>
-          <a:ln/>
-        </p:spPr>
-      </p:sp>
-      <p:sp>
-        <p:nvSpPr>
-          <p:cNvPr id="123" name="Text 121"/>
-          <p:cNvSpPr txBox="1"/>
-          <p:nvPr/>
-        </p:nvSpPr>
-        <p:spPr>
-          <a:xfrm>
-            <a:off x="7379208" y="3877056"/>
-            <a:ext cx="1371600" cy="182880"/>
-          </a:xfrm>
-          <a:prstGeom prst="rect">
-            <a:avLst/>
-          </a:prstGeom>
-          <a:noFill/>
-          <a:ln/>
-        </p:spPr>
-        <p:txBody>
-          <a:bodyPr wrap="square" lIns="0" tIns="0" rIns="0" bIns="0" rtlCol="0" anchor="ctr"/>
-          <a:lstStyle/>
-          <a:p>
-            <a:pPr indent="0" marL="0">
-              <a:buNone/>
-            </a:pPr>
-            <a:r>
               <a:rPr lang="en-US" sz="850" b="1" dirty="0">
                 <a:solidFill>
-                  <a:srgbClr val="12293A"/>
-                </a:solidFill>
-                <a:latin typeface="Poppins" pitchFamily="34" charset="0"/>
-                <a:ea typeface="Poppins" pitchFamily="34" charset="-122"/>
-                <a:cs typeface="Poppins" pitchFamily="34" charset="-120"/>
-              </a:rPr>
-              <a:t>TOTAL</a:t>
+                  <a:srgbClr val="2C8394"/>
+                </a:solidFill>
+                <a:latin typeface="Poppins" pitchFamily="34" charset="0"/>
+                <a:ea typeface="Poppins" pitchFamily="34" charset="-122"/>
+                <a:cs typeface="Poppins" pitchFamily="34" charset="-120"/>
+              </a:rPr>
+              <a:t>20.75h</a:t>
             </a:r>
             <a:endParaRPr lang="en-US" sz="850" dirty="0"/>
           </a:p>
@@ -43571,30 +43649,30 @@
       </p:sp>
       <p:sp>
         <p:nvSpPr>
-          <p:cNvPr id="124" name="Text 122"/>
-          <p:cNvSpPr txBox="1"/>
-          <p:nvPr/>
-        </p:nvSpPr>
-        <p:spPr>
-          <a:xfrm>
-            <a:off x="8823960" y="3877056"/>
-            <a:ext cx="1371600" cy="182880"/>
-          </a:xfrm>
-          <a:prstGeom prst="rect">
-            <a:avLst/>
-          </a:prstGeom>
-          <a:noFill/>
-          <a:ln/>
-        </p:spPr>
-        <p:txBody>
-          <a:bodyPr wrap="square" lIns="0" tIns="0" rIns="0" bIns="0" rtlCol="0" anchor="ctr"/>
-          <a:lstStyle/>
-          <a:p>
-            <a:pPr indent="0" marL="0">
-              <a:buNone/>
-            </a:pPr>
-            <a:r>
-              <a:rPr lang="en-US" sz="650" dirty="0">
+          <p:cNvPr id="126" name="Text 124"/>
+          <p:cNvSpPr txBox="1"/>
+          <p:nvPr/>
+        </p:nvSpPr>
+        <p:spPr>
+          <a:xfrm>
+            <a:off x="10972800" y="3675888"/>
+            <a:ext cx="603504" cy="182880"/>
+          </a:xfrm>
+          <a:prstGeom prst="rect">
+            <a:avLst/>
+          </a:prstGeom>
+          <a:noFill/>
+          <a:ln/>
+        </p:spPr>
+        <p:txBody>
+          <a:bodyPr wrap="square" lIns="0" tIns="0" rIns="0" bIns="0" rtlCol="0" anchor="ctr"/>
+          <a:lstStyle/>
+          <a:p>
+            <a:pPr algn="r" indent="0" marL="0">
+              <a:buNone/>
+            </a:pPr>
+            <a:r>
+              <a:rPr lang="en-US" sz="750" b="1" dirty="0">
                 <a:solidFill>
                   <a:srgbClr val="5E7280"/>
                 </a:solidFill>
@@ -43602,87 +43680,9 @@
                 <a:ea typeface="Poppins" pitchFamily="34" charset="-122"/>
                 <a:cs typeface="Poppins" pitchFamily="34" charset="-120"/>
               </a:rPr>
-              <a:t>11 PS items carry time</a:t>
-            </a:r>
-            <a:endParaRPr lang="en-US" sz="650" dirty="0"/>
-          </a:p>
-        </p:txBody>
-      </p:sp>
-      <p:sp>
-        <p:nvSpPr>
-          <p:cNvPr id="125" name="Text 123"/>
-          <p:cNvSpPr txBox="1"/>
-          <p:nvPr/>
-        </p:nvSpPr>
-        <p:spPr>
-          <a:xfrm>
-            <a:off x="10287000" y="3877056"/>
-            <a:ext cx="640080" cy="182880"/>
-          </a:xfrm>
-          <a:prstGeom prst="rect">
-            <a:avLst/>
-          </a:prstGeom>
-          <a:noFill/>
-          <a:ln/>
-        </p:spPr>
-        <p:txBody>
-          <a:bodyPr wrap="square" lIns="0" tIns="0" rIns="0" bIns="0" rtlCol="0" anchor="ctr"/>
-          <a:lstStyle/>
-          <a:p>
-            <a:pPr algn="r" indent="0" marL="0">
-              <a:buNone/>
-            </a:pPr>
-            <a:r>
-              <a:rPr lang="en-US" sz="900" b="1" dirty="0">
-                <a:solidFill>
-                  <a:srgbClr val="2C8394"/>
-                </a:solidFill>
-                <a:latin typeface="Poppins" pitchFamily="34" charset="0"/>
-                <a:ea typeface="Poppins" pitchFamily="34" charset="-122"/>
-                <a:cs typeface="Poppins" pitchFamily="34" charset="-120"/>
-              </a:rPr>
-              <a:t>20.75h</a:t>
-            </a:r>
-            <a:endParaRPr lang="en-US" sz="900" dirty="0"/>
-          </a:p>
-        </p:txBody>
-      </p:sp>
-      <p:sp>
-        <p:nvSpPr>
-          <p:cNvPr id="126" name="Text 124"/>
-          <p:cNvSpPr txBox="1"/>
-          <p:nvPr/>
-        </p:nvSpPr>
-        <p:spPr>
-          <a:xfrm>
-            <a:off x="10972800" y="3877056"/>
-            <a:ext cx="603504" cy="182880"/>
-          </a:xfrm>
-          <a:prstGeom prst="rect">
-            <a:avLst/>
-          </a:prstGeom>
-          <a:noFill/>
-          <a:ln/>
-        </p:spPr>
-        <p:txBody>
-          <a:bodyPr wrap="square" lIns="0" tIns="0" rIns="0" bIns="0" rtlCol="0" anchor="ctr"/>
-          <a:lstStyle/>
-          <a:p>
-            <a:pPr algn="r" indent="0" marL="0">
-              <a:buNone/>
-            </a:pPr>
-            <a:r>
-              <a:rPr lang="en-US" sz="800" b="1" dirty="0">
-                <a:solidFill>
-                  <a:srgbClr val="5E7280"/>
-                </a:solidFill>
-                <a:latin typeface="Poppins" pitchFamily="34" charset="0"/>
-                <a:ea typeface="Poppins" pitchFamily="34" charset="-122"/>
-                <a:cs typeface="Poppins" pitchFamily="34" charset="-120"/>
-              </a:rPr>
               <a:t>100%</a:t>
             </a:r>
-            <a:endParaRPr lang="en-US" sz="800" dirty="0"/>
+            <a:endParaRPr lang="en-US" sz="750" dirty="0"/>
           </a:p>
         </p:txBody>
       </p:sp>
@@ -43694,12 +43694,12 @@
         </p:nvSpPr>
         <p:spPr>
           <a:xfrm>
-            <a:off x="7178040" y="4224528"/>
-            <a:ext cx="4599432" cy="1737360"/>
+            <a:off x="7178040" y="3968496"/>
+            <a:ext cx="4599432" cy="1389888"/>
           </a:xfrm>
           <a:prstGeom prst="roundRect">
             <a:avLst>
-              <a:gd name="adj" fmla="val 3684"/>
+              <a:gd name="adj" fmla="val 4605"/>
             </a:avLst>
           </a:prstGeom>
           <a:solidFill>
@@ -43723,8 +43723,8 @@
         </p:nvSpPr>
         <p:spPr>
           <a:xfrm>
-            <a:off x="7379208" y="4334256"/>
-            <a:ext cx="4233672" cy="274320"/>
+            <a:off x="7379208" y="4032504"/>
+            <a:ext cx="4197096" cy="219456"/>
           </a:xfrm>
           <a:prstGeom prst="rect">
             <a:avLst/>
@@ -43740,6 +43740,967 @@
               <a:buNone/>
             </a:pPr>
             <a:r>
+              <a:rPr lang="en-US" sz="1100" b="1" dirty="0">
+                <a:solidFill>
+                  <a:srgbClr val="2C8394"/>
+                </a:solidFill>
+                <a:latin typeface="Poppins" pitchFamily="34" charset="0"/>
+                <a:ea typeface="Poppins" pitchFamily="34" charset="-122"/>
+                <a:cs typeface="Poppins" pitchFamily="34" charset="-120"/>
+              </a:rPr>
+              <a:t>WEEK ON WEEK  </a:t>
+            </a:r>
+            <a:pPr indent="0" marL="0">
+              <a:buNone/>
+            </a:pPr>
+            <a:r>
+              <a:rPr lang="en-US" sz="650" dirty="0">
+                <a:solidFill>
+                  <a:srgbClr val="8FA1AC"/>
+                </a:solidFill>
+                <a:latin typeface="Poppins" pitchFamily="34" charset="0"/>
+                <a:ea typeface="Poppins" pitchFamily="34" charset="-122"/>
+                <a:cs typeface="Poppins" pitchFamily="34" charset="-120"/>
+              </a:rPr>
+              <a:t>as the weeks stand today</a:t>
+            </a:r>
+            <a:endParaRPr lang="en-US" sz="1100" dirty="0"/>
+          </a:p>
+        </p:txBody>
+      </p:sp>
+      <p:sp>
+        <p:nvSpPr>
+          <p:cNvPr id="129" name="Text 127"/>
+          <p:cNvSpPr txBox="1"/>
+          <p:nvPr/>
+        </p:nvSpPr>
+        <p:spPr>
+          <a:xfrm>
+            <a:off x="7379208" y="4261104"/>
+            <a:ext cx="960120" cy="164592"/>
+          </a:xfrm>
+          <a:prstGeom prst="rect">
+            <a:avLst/>
+          </a:prstGeom>
+          <a:noFill/>
+          <a:ln/>
+        </p:spPr>
+        <p:txBody>
+          <a:bodyPr wrap="square" lIns="0" tIns="0" rIns="0" bIns="0" rtlCol="0" anchor="ctr"/>
+          <a:lstStyle/>
+          <a:p>
+            <a:pPr algn="l" indent="0" marL="0">
+              <a:buNone/>
+            </a:pPr>
+            <a:r>
+              <a:rPr lang="en-US" sz="630" b="1" dirty="0">
+                <a:solidFill>
+                  <a:srgbClr val="8FA1AC"/>
+                </a:solidFill>
+                <a:latin typeface="Poppins" pitchFamily="34" charset="0"/>
+                <a:ea typeface="Poppins" pitchFamily="34" charset="-122"/>
+                <a:cs typeface="Poppins" pitchFamily="34" charset="-120"/>
+              </a:rPr>
+              <a:t>WEEK</a:t>
+            </a:r>
+            <a:endParaRPr lang="en-US" sz="630" dirty="0"/>
+          </a:p>
+        </p:txBody>
+      </p:sp>
+      <p:sp>
+        <p:nvSpPr>
+          <p:cNvPr id="130" name="Text 128"/>
+          <p:cNvSpPr txBox="1"/>
+          <p:nvPr/>
+        </p:nvSpPr>
+        <p:spPr>
+          <a:xfrm>
+            <a:off x="8385048" y="4261104"/>
+            <a:ext cx="457200" cy="164592"/>
+          </a:xfrm>
+          <a:prstGeom prst="rect">
+            <a:avLst/>
+          </a:prstGeom>
+          <a:noFill/>
+          <a:ln/>
+        </p:spPr>
+        <p:txBody>
+          <a:bodyPr wrap="square" lIns="0" tIns="0" rIns="0" bIns="0" rtlCol="0" anchor="ctr"/>
+          <a:lstStyle/>
+          <a:p>
+            <a:pPr algn="r" indent="0" marL="0">
+              <a:buNone/>
+            </a:pPr>
+            <a:r>
+              <a:rPr lang="en-US" sz="630" b="1" dirty="0">
+                <a:solidFill>
+                  <a:srgbClr val="8FA1AC"/>
+                </a:solidFill>
+                <a:latin typeface="Poppins" pitchFamily="34" charset="0"/>
+                <a:ea typeface="Poppins" pitchFamily="34" charset="-122"/>
+                <a:cs typeface="Poppins" pitchFamily="34" charset="-120"/>
+              </a:rPr>
+              <a:t>ITEMS</a:t>
+            </a:r>
+            <a:endParaRPr lang="en-US" sz="630" dirty="0"/>
+          </a:p>
+        </p:txBody>
+      </p:sp>
+      <p:sp>
+        <p:nvSpPr>
+          <p:cNvPr id="131" name="Text 129"/>
+          <p:cNvSpPr txBox="1"/>
+          <p:nvPr/>
+        </p:nvSpPr>
+        <p:spPr>
+          <a:xfrm>
+            <a:off x="8897112" y="4261104"/>
+            <a:ext cx="777240" cy="164592"/>
+          </a:xfrm>
+          <a:prstGeom prst="rect">
+            <a:avLst/>
+          </a:prstGeom>
+          <a:noFill/>
+          <a:ln/>
+        </p:spPr>
+        <p:txBody>
+          <a:bodyPr wrap="square" lIns="0" tIns="0" rIns="0" bIns="0" rtlCol="0" anchor="ctr"/>
+          <a:lstStyle/>
+          <a:p>
+            <a:pPr algn="r" indent="0" marL="0">
+              <a:buNone/>
+            </a:pPr>
+            <a:r>
+              <a:rPr lang="en-US" sz="630" b="1" dirty="0">
+                <a:solidFill>
+                  <a:srgbClr val="8FA1AC"/>
+                </a:solidFill>
+                <a:latin typeface="Poppins" pitchFamily="34" charset="0"/>
+                <a:ea typeface="Poppins" pitchFamily="34" charset="-122"/>
+                <a:cs typeface="Poppins" pitchFamily="34" charset="-120"/>
+              </a:rPr>
+              <a:t>HOURS NOW</a:t>
+            </a:r>
+            <a:endParaRPr lang="en-US" sz="630" dirty="0"/>
+          </a:p>
+        </p:txBody>
+      </p:sp>
+      <p:sp>
+        <p:nvSpPr>
+          <p:cNvPr id="132" name="Text 130"/>
+          <p:cNvSpPr txBox="1"/>
+          <p:nvPr/>
+        </p:nvSpPr>
+        <p:spPr>
+          <a:xfrm>
+            <a:off x="9729216" y="4261104"/>
+            <a:ext cx="457200" cy="164592"/>
+          </a:xfrm>
+          <a:prstGeom prst="rect">
+            <a:avLst/>
+          </a:prstGeom>
+          <a:noFill/>
+          <a:ln/>
+        </p:spPr>
+        <p:txBody>
+          <a:bodyPr wrap="square" lIns="0" tIns="0" rIns="0" bIns="0" rtlCol="0" anchor="ctr"/>
+          <a:lstStyle/>
+          <a:p>
+            <a:pPr algn="r" indent="0" marL="0">
+              <a:buNone/>
+            </a:pPr>
+            <a:r>
+              <a:rPr lang="en-US" sz="630" b="1" dirty="0">
+                <a:solidFill>
+                  <a:srgbClr val="8FA1AC"/>
+                </a:solidFill>
+                <a:latin typeface="Poppins" pitchFamily="34" charset="0"/>
+                <a:ea typeface="Poppins" pitchFamily="34" charset="-122"/>
+                <a:cs typeface="Poppins" pitchFamily="34" charset="-120"/>
+              </a:rPr>
+              <a:t>UTIL</a:t>
+            </a:r>
+            <a:endParaRPr lang="en-US" sz="630" dirty="0"/>
+          </a:p>
+        </p:txBody>
+      </p:sp>
+      <p:sp>
+        <p:nvSpPr>
+          <p:cNvPr id="133" name="Text 131"/>
+          <p:cNvSpPr txBox="1"/>
+          <p:nvPr/>
+        </p:nvSpPr>
+        <p:spPr>
+          <a:xfrm>
+            <a:off x="10241280" y="4261104"/>
+            <a:ext cx="1335024" cy="164592"/>
+          </a:xfrm>
+          <a:prstGeom prst="rect">
+            <a:avLst/>
+          </a:prstGeom>
+          <a:noFill/>
+          <a:ln/>
+        </p:spPr>
+        <p:txBody>
+          <a:bodyPr wrap="square" lIns="0" tIns="0" rIns="0" bIns="0" rtlCol="0" anchor="ctr"/>
+          <a:lstStyle/>
+          <a:p>
+            <a:pPr algn="r" indent="0" marL="0">
+              <a:buNone/>
+            </a:pPr>
+            <a:r>
+              <a:rPr lang="en-US" sz="630" b="1" dirty="0">
+                <a:solidFill>
+                  <a:srgbClr val="8FA1AC"/>
+                </a:solidFill>
+                <a:latin typeface="Poppins" pitchFamily="34" charset="0"/>
+                <a:ea typeface="Poppins" pitchFamily="34" charset="-122"/>
+                <a:cs typeface="Poppins" pitchFamily="34" charset="-120"/>
+              </a:rPr>
+              <a:t>AS FIRST REPORTED</a:t>
+            </a:r>
+            <a:endParaRPr lang="en-US" sz="630" dirty="0"/>
+          </a:p>
+        </p:txBody>
+      </p:sp>
+      <p:sp>
+        <p:nvSpPr>
+          <p:cNvPr id="134" name="Shape 132"/>
+          <p:cNvSpPr/>
+          <p:nvPr/>
+        </p:nvSpPr>
+        <p:spPr>
+          <a:xfrm>
+            <a:off x="7379208" y="4631436"/>
+            <a:ext cx="4197096" cy="5486"/>
+          </a:xfrm>
+          <a:prstGeom prst="rect">
+            <a:avLst/>
+          </a:prstGeom>
+          <a:solidFill>
+            <a:srgbClr val="E2EAEE"/>
+          </a:solidFill>
+          <a:ln/>
+        </p:spPr>
+      </p:sp>
+      <p:sp>
+        <p:nvSpPr>
+          <p:cNvPr id="135" name="Text 133"/>
+          <p:cNvSpPr txBox="1"/>
+          <p:nvPr/>
+        </p:nvSpPr>
+        <p:spPr>
+          <a:xfrm>
+            <a:off x="7379208" y="4443984"/>
+            <a:ext cx="960120" cy="196596"/>
+          </a:xfrm>
+          <a:prstGeom prst="rect">
+            <a:avLst/>
+          </a:prstGeom>
+          <a:noFill/>
+          <a:ln/>
+        </p:spPr>
+        <p:txBody>
+          <a:bodyPr wrap="square" lIns="0" tIns="0" rIns="0" bIns="0" rtlCol="0" anchor="ctr"/>
+          <a:lstStyle/>
+          <a:p>
+            <a:pPr indent="0" marL="0">
+              <a:buNone/>
+            </a:pPr>
+            <a:r>
+              <a:rPr lang="en-US" sz="750" b="1" dirty="0">
+                <a:solidFill>
+                  <a:srgbClr val="12293A"/>
+                </a:solidFill>
+                <a:latin typeface="Poppins" pitchFamily="34" charset="0"/>
+                <a:ea typeface="Poppins" pitchFamily="34" charset="-122"/>
+                <a:cs typeface="Poppins" pitchFamily="34" charset="-120"/>
+              </a:rPr>
+              <a:t>8–13 Sep</a:t>
+            </a:r>
+            <a:endParaRPr lang="en-US" sz="750" dirty="0"/>
+          </a:p>
+        </p:txBody>
+      </p:sp>
+      <p:sp>
+        <p:nvSpPr>
+          <p:cNvPr id="136" name="Text 134"/>
+          <p:cNvSpPr txBox="1"/>
+          <p:nvPr/>
+        </p:nvSpPr>
+        <p:spPr>
+          <a:xfrm>
+            <a:off x="8385048" y="4443984"/>
+            <a:ext cx="457200" cy="196596"/>
+          </a:xfrm>
+          <a:prstGeom prst="rect">
+            <a:avLst/>
+          </a:prstGeom>
+          <a:noFill/>
+          <a:ln/>
+        </p:spPr>
+        <p:txBody>
+          <a:bodyPr wrap="square" lIns="0" tIns="0" rIns="0" bIns="0" rtlCol="0" anchor="ctr"/>
+          <a:lstStyle/>
+          <a:p>
+            <a:pPr algn="r" indent="0" marL="0">
+              <a:buNone/>
+            </a:pPr>
+            <a:r>
+              <a:rPr lang="en-US" sz="750" dirty="0">
+                <a:solidFill>
+                  <a:srgbClr val="5E7280"/>
+                </a:solidFill>
+                <a:latin typeface="Poppins" pitchFamily="34" charset="0"/>
+                <a:ea typeface="Poppins" pitchFamily="34" charset="-122"/>
+                <a:cs typeface="Poppins" pitchFamily="34" charset="-120"/>
+              </a:rPr>
+              <a:t>16</a:t>
+            </a:r>
+            <a:endParaRPr lang="en-US" sz="750" dirty="0"/>
+          </a:p>
+        </p:txBody>
+      </p:sp>
+      <p:sp>
+        <p:nvSpPr>
+          <p:cNvPr id="137" name="Text 135"/>
+          <p:cNvSpPr txBox="1"/>
+          <p:nvPr/>
+        </p:nvSpPr>
+        <p:spPr>
+          <a:xfrm>
+            <a:off x="8897112" y="4443984"/>
+            <a:ext cx="777240" cy="196596"/>
+          </a:xfrm>
+          <a:prstGeom prst="rect">
+            <a:avLst/>
+          </a:prstGeom>
+          <a:noFill/>
+          <a:ln/>
+        </p:spPr>
+        <p:txBody>
+          <a:bodyPr wrap="square" lIns="0" tIns="0" rIns="0" bIns="0" rtlCol="0" anchor="ctr"/>
+          <a:lstStyle/>
+          <a:p>
+            <a:pPr algn="r" indent="0" marL="0">
+              <a:buNone/>
+            </a:pPr>
+            <a:r>
+              <a:rPr lang="en-US" sz="800" b="1" dirty="0">
+                <a:solidFill>
+                  <a:srgbClr val="2C8394"/>
+                </a:solidFill>
+                <a:latin typeface="Poppins" pitchFamily="34" charset="0"/>
+                <a:ea typeface="Poppins" pitchFamily="34" charset="-122"/>
+                <a:cs typeface="Poppins" pitchFamily="34" charset="-120"/>
+              </a:rPr>
+              <a:t>57.50h</a:t>
+            </a:r>
+            <a:endParaRPr lang="en-US" sz="800" dirty="0"/>
+          </a:p>
+        </p:txBody>
+      </p:sp>
+      <p:sp>
+        <p:nvSpPr>
+          <p:cNvPr id="138" name="Text 136"/>
+          <p:cNvSpPr txBox="1"/>
+          <p:nvPr/>
+        </p:nvSpPr>
+        <p:spPr>
+          <a:xfrm>
+            <a:off x="9729216" y="4443984"/>
+            <a:ext cx="457200" cy="196596"/>
+          </a:xfrm>
+          <a:prstGeom prst="rect">
+            <a:avLst/>
+          </a:prstGeom>
+          <a:noFill/>
+          <a:ln/>
+        </p:spPr>
+        <p:txBody>
+          <a:bodyPr wrap="square" lIns="0" tIns="0" rIns="0" bIns="0" rtlCol="0" anchor="ctr"/>
+          <a:lstStyle/>
+          <a:p>
+            <a:pPr algn="r" indent="0" marL="0">
+              <a:buNone/>
+            </a:pPr>
+            <a:r>
+              <a:rPr lang="en-US" sz="800" b="1" dirty="0">
+                <a:solidFill>
+                  <a:srgbClr val="C88A2E"/>
+                </a:solidFill>
+                <a:latin typeface="Poppins" pitchFamily="34" charset="0"/>
+                <a:ea typeface="Poppins" pitchFamily="34" charset="-122"/>
+                <a:cs typeface="Poppins" pitchFamily="34" charset="-120"/>
+              </a:rPr>
+              <a:t>16.8%</a:t>
+            </a:r>
+            <a:endParaRPr lang="en-US" sz="800" dirty="0"/>
+          </a:p>
+        </p:txBody>
+      </p:sp>
+      <p:sp>
+        <p:nvSpPr>
+          <p:cNvPr id="139" name="Text 137"/>
+          <p:cNvSpPr txBox="1"/>
+          <p:nvPr/>
+        </p:nvSpPr>
+        <p:spPr>
+          <a:xfrm>
+            <a:off x="10241280" y="4443984"/>
+            <a:ext cx="1335024" cy="196596"/>
+          </a:xfrm>
+          <a:prstGeom prst="rect">
+            <a:avLst/>
+          </a:prstGeom>
+          <a:noFill/>
+          <a:ln/>
+        </p:spPr>
+        <p:txBody>
+          <a:bodyPr wrap="square" lIns="0" tIns="0" rIns="0" bIns="0" rtlCol="0" anchor="ctr"/>
+          <a:lstStyle/>
+          <a:p>
+            <a:pPr algn="r" indent="0" marL="0">
+              <a:buNone/>
+            </a:pPr>
+            <a:r>
+              <a:rPr lang="en-US" sz="650" dirty="0">
+                <a:solidFill>
+                  <a:srgbClr val="8FA1AC"/>
+                </a:solidFill>
+                <a:latin typeface="Poppins" pitchFamily="34" charset="0"/>
+                <a:ea typeface="Poppins" pitchFamily="34" charset="-122"/>
+                <a:cs typeface="Poppins" pitchFamily="34" charset="-120"/>
+              </a:rPr>
+              <a:t>not reported</a:t>
+            </a:r>
+            <a:endParaRPr lang="en-US" sz="650" dirty="0"/>
+          </a:p>
+        </p:txBody>
+      </p:sp>
+      <p:sp>
+        <p:nvSpPr>
+          <p:cNvPr id="140" name="Shape 138"/>
+          <p:cNvSpPr/>
+          <p:nvPr/>
+        </p:nvSpPr>
+        <p:spPr>
+          <a:xfrm>
+            <a:off x="7379208" y="4828032"/>
+            <a:ext cx="4197096" cy="5486"/>
+          </a:xfrm>
+          <a:prstGeom prst="rect">
+            <a:avLst/>
+          </a:prstGeom>
+          <a:solidFill>
+            <a:srgbClr val="E2EAEE"/>
+          </a:solidFill>
+          <a:ln/>
+        </p:spPr>
+      </p:sp>
+      <p:sp>
+        <p:nvSpPr>
+          <p:cNvPr id="141" name="Text 139"/>
+          <p:cNvSpPr txBox="1"/>
+          <p:nvPr/>
+        </p:nvSpPr>
+        <p:spPr>
+          <a:xfrm>
+            <a:off x="7379208" y="4640580"/>
+            <a:ext cx="960120" cy="196596"/>
+          </a:xfrm>
+          <a:prstGeom prst="rect">
+            <a:avLst/>
+          </a:prstGeom>
+          <a:noFill/>
+          <a:ln/>
+        </p:spPr>
+        <p:txBody>
+          <a:bodyPr wrap="square" lIns="0" tIns="0" rIns="0" bIns="0" rtlCol="0" anchor="ctr"/>
+          <a:lstStyle/>
+          <a:p>
+            <a:pPr indent="0" marL="0">
+              <a:buNone/>
+            </a:pPr>
+            <a:r>
+              <a:rPr lang="en-US" sz="750" b="1" dirty="0">
+                <a:solidFill>
+                  <a:srgbClr val="12293A"/>
+                </a:solidFill>
+                <a:latin typeface="Poppins" pitchFamily="34" charset="0"/>
+                <a:ea typeface="Poppins" pitchFamily="34" charset="-122"/>
+                <a:cs typeface="Poppins" pitchFamily="34" charset="-120"/>
+              </a:rPr>
+              <a:t>14–20 Sep</a:t>
+            </a:r>
+            <a:endParaRPr lang="en-US" sz="750" dirty="0"/>
+          </a:p>
+        </p:txBody>
+      </p:sp>
+      <p:sp>
+        <p:nvSpPr>
+          <p:cNvPr id="142" name="Text 140"/>
+          <p:cNvSpPr txBox="1"/>
+          <p:nvPr/>
+        </p:nvSpPr>
+        <p:spPr>
+          <a:xfrm>
+            <a:off x="8385048" y="4640580"/>
+            <a:ext cx="457200" cy="196596"/>
+          </a:xfrm>
+          <a:prstGeom prst="rect">
+            <a:avLst/>
+          </a:prstGeom>
+          <a:noFill/>
+          <a:ln/>
+        </p:spPr>
+        <p:txBody>
+          <a:bodyPr wrap="square" lIns="0" tIns="0" rIns="0" bIns="0" rtlCol="0" anchor="ctr"/>
+          <a:lstStyle/>
+          <a:p>
+            <a:pPr algn="r" indent="0" marL="0">
+              <a:buNone/>
+            </a:pPr>
+            <a:r>
+              <a:rPr lang="en-US" sz="750" dirty="0">
+                <a:solidFill>
+                  <a:srgbClr val="5E7280"/>
+                </a:solidFill>
+                <a:latin typeface="Poppins" pitchFamily="34" charset="0"/>
+                <a:ea typeface="Poppins" pitchFamily="34" charset="-122"/>
+                <a:cs typeface="Poppins" pitchFamily="34" charset="-120"/>
+              </a:rPr>
+              <a:t>17</a:t>
+            </a:r>
+            <a:endParaRPr lang="en-US" sz="750" dirty="0"/>
+          </a:p>
+        </p:txBody>
+      </p:sp>
+      <p:sp>
+        <p:nvSpPr>
+          <p:cNvPr id="143" name="Text 141"/>
+          <p:cNvSpPr txBox="1"/>
+          <p:nvPr/>
+        </p:nvSpPr>
+        <p:spPr>
+          <a:xfrm>
+            <a:off x="8897112" y="4640580"/>
+            <a:ext cx="777240" cy="196596"/>
+          </a:xfrm>
+          <a:prstGeom prst="rect">
+            <a:avLst/>
+          </a:prstGeom>
+          <a:noFill/>
+          <a:ln/>
+        </p:spPr>
+        <p:txBody>
+          <a:bodyPr wrap="square" lIns="0" tIns="0" rIns="0" bIns="0" rtlCol="0" anchor="ctr"/>
+          <a:lstStyle/>
+          <a:p>
+            <a:pPr algn="r" indent="0" marL="0">
+              <a:buNone/>
+            </a:pPr>
+            <a:r>
+              <a:rPr lang="en-US" sz="800" b="1" dirty="0">
+                <a:solidFill>
+                  <a:srgbClr val="2C8394"/>
+                </a:solidFill>
+                <a:latin typeface="Poppins" pitchFamily="34" charset="0"/>
+                <a:ea typeface="Poppins" pitchFamily="34" charset="-122"/>
+                <a:cs typeface="Poppins" pitchFamily="34" charset="-120"/>
+              </a:rPr>
+              <a:t>24.82h</a:t>
+            </a:r>
+            <a:endParaRPr lang="en-US" sz="800" dirty="0"/>
+          </a:p>
+        </p:txBody>
+      </p:sp>
+      <p:sp>
+        <p:nvSpPr>
+          <p:cNvPr id="144" name="Text 142"/>
+          <p:cNvSpPr txBox="1"/>
+          <p:nvPr/>
+        </p:nvSpPr>
+        <p:spPr>
+          <a:xfrm>
+            <a:off x="9729216" y="4640580"/>
+            <a:ext cx="457200" cy="196596"/>
+          </a:xfrm>
+          <a:prstGeom prst="rect">
+            <a:avLst/>
+          </a:prstGeom>
+          <a:noFill/>
+          <a:ln/>
+        </p:spPr>
+        <p:txBody>
+          <a:bodyPr wrap="square" lIns="0" tIns="0" rIns="0" bIns="0" rtlCol="0" anchor="ctr"/>
+          <a:lstStyle/>
+          <a:p>
+            <a:pPr algn="r" indent="0" marL="0">
+              <a:buNone/>
+            </a:pPr>
+            <a:r>
+              <a:rPr lang="en-US" sz="800" b="1" dirty="0">
+                <a:solidFill>
+                  <a:srgbClr val="C88A2E"/>
+                </a:solidFill>
+                <a:latin typeface="Poppins" pitchFamily="34" charset="0"/>
+                <a:ea typeface="Poppins" pitchFamily="34" charset="-122"/>
+                <a:cs typeface="Poppins" pitchFamily="34" charset="-120"/>
+              </a:rPr>
+              <a:t>7.3%</a:t>
+            </a:r>
+            <a:endParaRPr lang="en-US" sz="800" dirty="0"/>
+          </a:p>
+        </p:txBody>
+      </p:sp>
+      <p:sp>
+        <p:nvSpPr>
+          <p:cNvPr id="145" name="Text 143"/>
+          <p:cNvSpPr txBox="1"/>
+          <p:nvPr/>
+        </p:nvSpPr>
+        <p:spPr>
+          <a:xfrm>
+            <a:off x="10241280" y="4640580"/>
+            <a:ext cx="1335024" cy="196596"/>
+          </a:xfrm>
+          <a:prstGeom prst="rect">
+            <a:avLst/>
+          </a:prstGeom>
+          <a:noFill/>
+          <a:ln/>
+        </p:spPr>
+        <p:txBody>
+          <a:bodyPr wrap="square" lIns="0" tIns="0" rIns="0" bIns="0" rtlCol="0" anchor="ctr"/>
+          <a:lstStyle/>
+          <a:p>
+            <a:pPr algn="r" indent="0" marL="0">
+              <a:buNone/>
+            </a:pPr>
+            <a:r>
+              <a:rPr lang="en-US" sz="630" b="1" dirty="0">
+                <a:solidFill>
+                  <a:srgbClr val="B4552D"/>
+                </a:solidFill>
+                <a:latin typeface="Poppins" pitchFamily="34" charset="0"/>
+                <a:ea typeface="Poppins" pitchFamily="34" charset="-122"/>
+                <a:cs typeface="Poppins" pitchFamily="34" charset="-120"/>
+              </a:rPr>
+              <a:t>16.07h · 4.7%   ▲ +8.75h</a:t>
+            </a:r>
+            <a:endParaRPr lang="en-US" sz="630" dirty="0"/>
+          </a:p>
+        </p:txBody>
+      </p:sp>
+      <p:sp>
+        <p:nvSpPr>
+          <p:cNvPr id="146" name="Shape 144"/>
+          <p:cNvSpPr/>
+          <p:nvPr/>
+        </p:nvSpPr>
+        <p:spPr>
+          <a:xfrm>
+            <a:off x="7379208" y="5024628"/>
+            <a:ext cx="4197096" cy="5486"/>
+          </a:xfrm>
+          <a:prstGeom prst="rect">
+            <a:avLst/>
+          </a:prstGeom>
+          <a:solidFill>
+            <a:srgbClr val="E2EAEE"/>
+          </a:solidFill>
+          <a:ln/>
+        </p:spPr>
+      </p:sp>
+      <p:sp>
+        <p:nvSpPr>
+          <p:cNvPr id="147" name="Text 145"/>
+          <p:cNvSpPr txBox="1"/>
+          <p:nvPr/>
+        </p:nvSpPr>
+        <p:spPr>
+          <a:xfrm>
+            <a:off x="7379208" y="4837176"/>
+            <a:ext cx="960120" cy="196596"/>
+          </a:xfrm>
+          <a:prstGeom prst="rect">
+            <a:avLst/>
+          </a:prstGeom>
+          <a:noFill/>
+          <a:ln/>
+        </p:spPr>
+        <p:txBody>
+          <a:bodyPr wrap="square" lIns="0" tIns="0" rIns="0" bIns="0" rtlCol="0" anchor="ctr"/>
+          <a:lstStyle/>
+          <a:p>
+            <a:pPr indent="0" marL="0">
+              <a:buNone/>
+            </a:pPr>
+            <a:r>
+              <a:rPr lang="en-US" sz="750" b="1" dirty="0">
+                <a:solidFill>
+                  <a:srgbClr val="2C8394"/>
+                </a:solidFill>
+                <a:latin typeface="Poppins" pitchFamily="34" charset="0"/>
+                <a:ea typeface="Poppins" pitchFamily="34" charset="-122"/>
+                <a:cs typeface="Poppins" pitchFamily="34" charset="-120"/>
+              </a:rPr>
+              <a:t>21–27 Sep  ●</a:t>
+            </a:r>
+            <a:endParaRPr lang="en-US" sz="750" dirty="0"/>
+          </a:p>
+        </p:txBody>
+      </p:sp>
+      <p:sp>
+        <p:nvSpPr>
+          <p:cNvPr id="148" name="Text 146"/>
+          <p:cNvSpPr txBox="1"/>
+          <p:nvPr/>
+        </p:nvSpPr>
+        <p:spPr>
+          <a:xfrm>
+            <a:off x="8385048" y="4837176"/>
+            <a:ext cx="457200" cy="196596"/>
+          </a:xfrm>
+          <a:prstGeom prst="rect">
+            <a:avLst/>
+          </a:prstGeom>
+          <a:noFill/>
+          <a:ln/>
+        </p:spPr>
+        <p:txBody>
+          <a:bodyPr wrap="square" lIns="0" tIns="0" rIns="0" bIns="0" rtlCol="0" anchor="ctr"/>
+          <a:lstStyle/>
+          <a:p>
+            <a:pPr algn="r" indent="0" marL="0">
+              <a:buNone/>
+            </a:pPr>
+            <a:r>
+              <a:rPr lang="en-US" sz="750" dirty="0">
+                <a:solidFill>
+                  <a:srgbClr val="5E7280"/>
+                </a:solidFill>
+                <a:latin typeface="Poppins" pitchFamily="34" charset="0"/>
+                <a:ea typeface="Poppins" pitchFamily="34" charset="-122"/>
+                <a:cs typeface="Poppins" pitchFamily="34" charset="-120"/>
+              </a:rPr>
+              <a:t>11</a:t>
+            </a:r>
+            <a:endParaRPr lang="en-US" sz="750" dirty="0"/>
+          </a:p>
+        </p:txBody>
+      </p:sp>
+      <p:sp>
+        <p:nvSpPr>
+          <p:cNvPr id="149" name="Text 147"/>
+          <p:cNvSpPr txBox="1"/>
+          <p:nvPr/>
+        </p:nvSpPr>
+        <p:spPr>
+          <a:xfrm>
+            <a:off x="8897112" y="4837176"/>
+            <a:ext cx="777240" cy="196596"/>
+          </a:xfrm>
+          <a:prstGeom prst="rect">
+            <a:avLst/>
+          </a:prstGeom>
+          <a:noFill/>
+          <a:ln/>
+        </p:spPr>
+        <p:txBody>
+          <a:bodyPr wrap="square" lIns="0" tIns="0" rIns="0" bIns="0" rtlCol="0" anchor="ctr"/>
+          <a:lstStyle/>
+          <a:p>
+            <a:pPr algn="r" indent="0" marL="0">
+              <a:buNone/>
+            </a:pPr>
+            <a:r>
+              <a:rPr lang="en-US" sz="800" b="1" dirty="0">
+                <a:solidFill>
+                  <a:srgbClr val="2C8394"/>
+                </a:solidFill>
+                <a:latin typeface="Poppins" pitchFamily="34" charset="0"/>
+                <a:ea typeface="Poppins" pitchFamily="34" charset="-122"/>
+                <a:cs typeface="Poppins" pitchFamily="34" charset="-120"/>
+              </a:rPr>
+              <a:t>20.75h</a:t>
+            </a:r>
+            <a:endParaRPr lang="en-US" sz="800" dirty="0"/>
+          </a:p>
+        </p:txBody>
+      </p:sp>
+      <p:sp>
+        <p:nvSpPr>
+          <p:cNvPr id="150" name="Text 148"/>
+          <p:cNvSpPr txBox="1"/>
+          <p:nvPr/>
+        </p:nvSpPr>
+        <p:spPr>
+          <a:xfrm>
+            <a:off x="9729216" y="4837176"/>
+            <a:ext cx="457200" cy="196596"/>
+          </a:xfrm>
+          <a:prstGeom prst="rect">
+            <a:avLst/>
+          </a:prstGeom>
+          <a:noFill/>
+          <a:ln/>
+        </p:spPr>
+        <p:txBody>
+          <a:bodyPr wrap="square" lIns="0" tIns="0" rIns="0" bIns="0" rtlCol="0" anchor="ctr"/>
+          <a:lstStyle/>
+          <a:p>
+            <a:pPr algn="r" indent="0" marL="0">
+              <a:buNone/>
+            </a:pPr>
+            <a:r>
+              <a:rPr lang="en-US" sz="800" b="1" dirty="0">
+                <a:solidFill>
+                  <a:srgbClr val="C88A2E"/>
+                </a:solidFill>
+                <a:latin typeface="Poppins" pitchFamily="34" charset="0"/>
+                <a:ea typeface="Poppins" pitchFamily="34" charset="-122"/>
+                <a:cs typeface="Poppins" pitchFamily="34" charset="-120"/>
+              </a:rPr>
+              <a:t>6.1%</a:t>
+            </a:r>
+            <a:endParaRPr lang="en-US" sz="800" dirty="0"/>
+          </a:p>
+        </p:txBody>
+      </p:sp>
+      <p:sp>
+        <p:nvSpPr>
+          <p:cNvPr id="151" name="Text 149"/>
+          <p:cNvSpPr txBox="1"/>
+          <p:nvPr/>
+        </p:nvSpPr>
+        <p:spPr>
+          <a:xfrm>
+            <a:off x="10241280" y="4837176"/>
+            <a:ext cx="1335024" cy="196596"/>
+          </a:xfrm>
+          <a:prstGeom prst="rect">
+            <a:avLst/>
+          </a:prstGeom>
+          <a:noFill/>
+          <a:ln/>
+        </p:spPr>
+        <p:txBody>
+          <a:bodyPr wrap="square" lIns="0" tIns="0" rIns="0" bIns="0" rtlCol="0" anchor="ctr"/>
+          <a:lstStyle/>
+          <a:p>
+            <a:pPr algn="r" indent="0" marL="0">
+              <a:buNone/>
+            </a:pPr>
+            <a:r>
+              <a:rPr lang="en-US" sz="650" dirty="0">
+                <a:solidFill>
+                  <a:srgbClr val="8FA1AC"/>
+                </a:solidFill>
+                <a:latin typeface="Poppins" pitchFamily="34" charset="0"/>
+                <a:ea typeface="Poppins" pitchFamily="34" charset="-122"/>
+                <a:cs typeface="Poppins" pitchFamily="34" charset="-120"/>
+              </a:rPr>
+              <a:t>first report</a:t>
+            </a:r>
+            <a:endParaRPr lang="en-US" sz="650" dirty="0"/>
+          </a:p>
+        </p:txBody>
+      </p:sp>
+      <p:sp>
+        <p:nvSpPr>
+          <p:cNvPr id="152" name="Text 150"/>
+          <p:cNvSpPr txBox="1"/>
+          <p:nvPr/>
+        </p:nvSpPr>
+        <p:spPr>
+          <a:xfrm>
+            <a:off x="7379208" y="5065776"/>
+            <a:ext cx="4197096" cy="237744"/>
+          </a:xfrm>
+          <a:prstGeom prst="rect">
+            <a:avLst/>
+          </a:prstGeom>
+          <a:noFill/>
+          <a:ln/>
+        </p:spPr>
+        <p:txBody>
+          <a:bodyPr wrap="square" lIns="0" tIns="0" rIns="0" bIns="0" rtlCol="0" anchor="t"/>
+          <a:lstStyle/>
+          <a:p>
+            <a:pPr indent="0" marL="0">
+              <a:buNone/>
+            </a:pPr>
+            <a:r>
+              <a:rPr lang="en-US" sz="580" dirty="0">
+                <a:solidFill>
+                  <a:srgbClr val="8FA1AC"/>
+                </a:solidFill>
+                <a:latin typeface="Poppins" pitchFamily="34" charset="0"/>
+                <a:ea typeface="Poppins" pitchFamily="34" charset="-122"/>
+                <a:cs typeface="Poppins" pitchFamily="34" charset="-120"/>
+              </a:rPr>
+              <a:t>Hours land retrospectively — treat the current week as a floor. Base held at 9 PS staff × 38h so the weeks compare.</a:t>
+            </a:r>
+            <a:endParaRPr lang="en-US" sz="580" dirty="0"/>
+          </a:p>
+        </p:txBody>
+      </p:sp>
+      <p:sp>
+        <p:nvSpPr>
+          <p:cNvPr id="153" name="Shape 151"/>
+          <p:cNvSpPr/>
+          <p:nvPr/>
+        </p:nvSpPr>
+        <p:spPr>
+          <a:xfrm>
+            <a:off x="411480" y="5431536"/>
+            <a:ext cx="11365992" cy="1024128"/>
+          </a:xfrm>
+          <a:prstGeom prst="roundRect">
+            <a:avLst>
+              <a:gd name="adj" fmla="val 6250"/>
+            </a:avLst>
+          </a:prstGeom>
+          <a:solidFill>
+            <a:srgbClr val="FFFFFF"/>
+          </a:solidFill>
+          <a:ln/>
+          <a:effectLst>
+            <a:outerShdw sx="100000" sy="100000" kx="0" ky="0" algn="bl" rotWithShape="0" blurRad="76200" dist="25400" dir="5400000">
+              <a:srgbClr val="9AAAB5">
+                <a:alpha val="35000"/>
+              </a:srgbClr>
+            </a:outerShdw>
+          </a:effectLst>
+        </p:spPr>
+      </p:sp>
+      <p:sp>
+        <p:nvSpPr>
+          <p:cNvPr id="154" name="Text 152"/>
+          <p:cNvSpPr txBox="1"/>
+          <p:nvPr/>
+        </p:nvSpPr>
+        <p:spPr>
+          <a:xfrm>
+            <a:off x="612648" y="5541264"/>
+            <a:ext cx="11000232" cy="274320"/>
+          </a:xfrm>
+          <a:prstGeom prst="rect">
+            <a:avLst/>
+          </a:prstGeom>
+          <a:noFill/>
+          <a:ln/>
+        </p:spPr>
+        <p:txBody>
+          <a:bodyPr wrap="square" lIns="0" tIns="0" rIns="0" bIns="0" rtlCol="0" anchor="ctr"/>
+          <a:lstStyle/>
+          <a:p>
+            <a:pPr indent="0" marL="0">
+              <a:buNone/>
+            </a:pPr>
+            <a:r>
               <a:rPr lang="en-US" sz="1200" b="1" dirty="0">
                 <a:solidFill>
                   <a:srgbClr val="2C8394"/>
@@ -43756,14 +44717,14 @@
       </p:sp>
       <p:sp>
         <p:nvSpPr>
-          <p:cNvPr id="129" name="Text 127"/>
-          <p:cNvSpPr txBox="1"/>
-          <p:nvPr/>
-        </p:nvSpPr>
-        <p:spPr>
-          <a:xfrm>
-            <a:off x="7379208" y="4645152"/>
-            <a:ext cx="4187952" cy="1188720"/>
+          <p:cNvPr id="155" name="Text 153"/>
+          <p:cNvSpPr txBox="1"/>
+          <p:nvPr/>
+        </p:nvSpPr>
+        <p:spPr>
+          <a:xfrm>
+            <a:off x="612648" y="5852160"/>
+            <a:ext cx="10954512" cy="475488"/>
           </a:xfrm>
           <a:prstGeom prst="rect">
             <a:avLst/>
@@ -43801,7 +44762,7 @@
                 <a:ea typeface="Poppins" pitchFamily="34" charset="-122"/>
                 <a:cs typeface="Poppins" pitchFamily="34" charset="-120"/>
               </a:rPr>
-              <a:t>6.1% billable utilisation is a logging number, not a delivery number. </a:t>
+              <a:t>Last week's utilisation has already restated upward. </a:t>
             </a:r>
             <a:pPr indent="0" marL="0">
               <a:spcAft>
@@ -43818,7 +44779,7 @@
                 <a:ea typeface="Poppins" pitchFamily="34" charset="-122"/>
                 <a:cs typeface="Poppins" pitchFamily="34" charset="-120"/>
               </a:rPr>
-              <a:t>20.75h landed against 342h of capacity, but only 17% of the week's 63 PS items carry hours.</a:t>
+              <a:t>14–20 Sep went out at 16.07h (4.7%) and now stands at 24.82h (7.3%) — Rhys +5.75h, Joshua +2.0h, Isayah +1.0h. This week's 6.1% is a floor, not a result.</a:t>
             </a:r>
             <a:endParaRPr lang="en-US" sz="900" dirty="0"/>
           </a:p>
@@ -43866,102 +44827,15 @@
                 <a:ea typeface="Poppins" pitchFamily="34" charset="-122"/>
                 <a:cs typeface="Poppins" pitchFamily="34" charset="-120"/>
               </a:rPr>
-              <a:t>Rhys Woolcock 10.50h (27.6% of a 38h week) and Joshua Casey 8.00h (21.1%); 5 PS members logged nothing at all.</a:t>
+              <a:t>Rhys Woolcock 10.50h and Joshua Casey 8.00h; 5 PS members logged nothing. 69 PS cases opened this week and Tech carries 79.5% of logged time.</a:t>
             </a:r>
             <a:endParaRPr lang="en-US" sz="900" dirty="0"/>
           </a:p>
-          <a:p>
-            <a:pPr indent="0" marL="0">
-              <a:buNone/>
-            </a:pPr>
-            <a:r>
-              <a:rPr lang="en-US" sz="900" b="1" dirty="0">
-                <a:solidFill>
-                  <a:srgbClr val="2C8394"/>
-                </a:solidFill>
-                <a:latin typeface="Poppins" pitchFamily="34" charset="0"/>
-                <a:ea typeface="Poppins" pitchFamily="34" charset="-122"/>
-                <a:cs typeface="Poppins" pitchFamily="34" charset="-120"/>
-              </a:rPr>
-              <a:t>•  </a:t>
-            </a:r>
-            <a:pPr indent="0" marL="0">
-              <a:buNone/>
-            </a:pPr>
-            <a:r>
-              <a:rPr lang="en-US" sz="900" b="1" dirty="0">
-                <a:solidFill>
-                  <a:srgbClr val="12293A"/>
-                </a:solidFill>
-                <a:latin typeface="Poppins" pitchFamily="34" charset="0"/>
-                <a:ea typeface="Poppins" pitchFamily="34" charset="-122"/>
-                <a:cs typeface="Poppins" pitchFamily="34" charset="-120"/>
-              </a:rPr>
-              <a:t>Work is landing even where hours aren't. </a:t>
-            </a:r>
-            <a:pPr indent="0" marL="0">
-              <a:spcAft>
-                <a:spcPts val="800"/>
-              </a:spcAft>
-              <a:buNone/>
-            </a:pPr>
-            <a:r>
-              <a:rPr lang="en-US" sz="900" dirty="0">
-                <a:solidFill>
-                  <a:srgbClr val="3A4B57"/>
-                </a:solidFill>
-                <a:latin typeface="Poppins" pitchFamily="34" charset="0"/>
-                <a:ea typeface="Poppins" pitchFamily="34" charset="-122"/>
-                <a:cs typeface="Poppins" pitchFamily="34" charset="-120"/>
-              </a:rPr>
-              <a:t>69 PS cases opened this week; Tech carries 79.5% of logged time. Median time to close since 8 Sep: Tech 1.0 d.</a:t>
-            </a:r>
-            <a:endParaRPr lang="en-US" sz="900" dirty="0"/>
-          </a:p>
-        </p:txBody>
-      </p:sp>
-      <p:sp>
-        <p:nvSpPr>
-          <p:cNvPr id="130" name="Text 128"/>
-          <p:cNvSpPr txBox="1"/>
-          <p:nvPr/>
-        </p:nvSpPr>
-        <p:spPr>
-          <a:xfrm>
-            <a:off x="411480" y="6144768"/>
-            <a:ext cx="7589520" cy="256032"/>
-          </a:xfrm>
-          <a:prstGeom prst="rect">
-            <a:avLst/>
-          </a:prstGeom>
-          <a:noFill/>
-          <a:ln/>
-        </p:spPr>
-        <p:txBody>
-          <a:bodyPr wrap="square" lIns="0" tIns="0" rIns="0" bIns="0" rtlCol="0" anchor="ctr"/>
-          <a:lstStyle/>
-          <a:p>
-            <a:pPr indent="0" marL="0">
-              <a:buNone/>
-            </a:pPr>
-            <a:r>
-              <a:rPr lang="en-US" sz="750" dirty="0">
-                <a:solidFill>
-                  <a:srgbClr val="8FA1AC"/>
-                </a:solidFill>
-                <a:latin typeface="Poppins" pitchFamily="34" charset="0"/>
-                <a:ea typeface="Poppins" pitchFamily="34" charset="-122"/>
-                <a:cs typeface="Poppins" pitchFamily="34" charset="-120"/>
-              </a:rPr>
-              <a:t>All logged hours are treated as billable — creatio_non_billable is still populated on only a handful of records, so billable/non-billable is not yet separable.</a:t>
-            </a:r>
-            <a:endParaRPr lang="en-US" sz="750" dirty="0"/>
-          </a:p>
-        </p:txBody>
-      </p:sp>
-      <p:sp>
-        <p:nvSpPr>
-          <p:cNvPr id="131" name="Shape 129"/>
+        </p:txBody>
+      </p:sp>
+      <p:sp>
+        <p:nvSpPr>
+          <p:cNvPr id="156" name="Shape 154"/>
           <p:cNvSpPr/>
           <p:nvPr/>
         </p:nvSpPr>
@@ -43983,7 +44857,7 @@
       </p:sp>
       <p:sp>
         <p:nvSpPr>
-          <p:cNvPr id="132" name="Text 130"/>
+          <p:cNvPr id="157" name="Text 155"/>
           <p:cNvSpPr txBox="1"/>
           <p:nvPr/>
         </p:nvSpPr>

--- a/exec-deck/output/H&L Weekly Update - WC 21 Sep 2026.pptx
+++ b/exec-deck/output/H&L Weekly Update - WC 21 Sep 2026.pptx
@@ -45724,7 +45724,7 @@
                 <a:ea typeface="Poppins" pitchFamily="34" charset="-122"/>
                 <a:cs typeface="Poppins" pitchFamily="34" charset="-120"/>
               </a:rPr>
-              <a:t>NET MRR MOVEMENT</a:t>
+              <a:t>NET MRR MOVEMENT · Q3</a:t>
             </a:r>
             <a:endParaRPr lang="en-US" sz="950" dirty="0"/>
           </a:p>
@@ -45802,7 +45802,7 @@
                 <a:ea typeface="Poppins" pitchFamily="34" charset="-122"/>
                 <a:cs typeface="Poppins" pitchFamily="34" charset="-120"/>
               </a:rPr>
-              <a:t>Q3 (Jul–Sep) · movement register, live — the base is still shrinking</a:t>
+              <a:t>Jul–Sep · finance movement register, live — HubSpot cannot produce this yet</a:t>
             </a:r>
             <a:endParaRPr lang="en-US" sz="780" dirty="0"/>
           </a:p>
@@ -48543,7 +48543,7 @@
                 <a:ea typeface="Poppins" pitchFamily="34" charset="-122"/>
                 <a:cs typeface="Poppins" pitchFamily="34" charset="-120"/>
               </a:rPr>
-              <a:t>Install-to-invoice lag runs 60–90 days — wins bill ~a quarter later; March wins still uninvoiced are past normal lag and worth chasing.</a:t>
+              <a:t>Install-to-invoice lag runs 60–90 days; March wins still uninvoiced are past normal lag and worth chasing.</a:t>
             </a:r>
             <a:endParaRPr lang="en-US" sz="850" dirty="0"/>
           </a:p>
@@ -48611,7 +48611,7 @@
                 <a:ea typeface="Poppins" pitchFamily="34" charset="-122"/>
                 <a:cs typeface="Poppins" pitchFamily="34" charset="-120"/>
               </a:rPr>
-              <a:t>Churn reads from the movement register (live): $1.17M of ARR across 262 logos since 2025, plus $235k lost to contraction on accounts that stayed. Q3 net MRR is -$6.3k — new business is not covering it.</a:t>
+              <a:t>Churn reads from the movement register: $1.17M of ARR across 262 logos since 2025, plus $235k lost to contraction. Q3 net MRR is -$6.3k — new business is not covering it.</a:t>
             </a:r>
             <a:endParaRPr lang="en-US" sz="850" dirty="0"/>
           </a:p>
@@ -48622,13 +48622,27 @@
             <a:r>
               <a:rPr lang="en-US" sz="850" b="1" dirty="0">
                 <a:solidFill>
-                  <a:srgbClr val="8FA1AC"/>
+                  <a:srgbClr val="B4552D"/>
                 </a:solidFill>
                 <a:latin typeface="Poppins" pitchFamily="34" charset="0"/>
                 <a:ea typeface="Poppins" pitchFamily="34" charset="-122"/>
                 <a:cs typeface="Poppins" pitchFamily="34" charset="-120"/>
               </a:rPr>
               <a:t>•  </a:t>
+            </a:r>
+            <a:pPr indent="0" marL="0">
+              <a:buNone/>
+            </a:pPr>
+            <a:r>
+              <a:rPr lang="en-US" sz="850" b="1" dirty="0">
+                <a:solidFill>
+                  <a:srgbClr val="12293A"/>
+                </a:solidFill>
+                <a:latin typeface="Poppins" pitchFamily="34" charset="0"/>
+                <a:ea typeface="Poppins" pitchFamily="34" charset="-122"/>
+                <a:cs typeface="Poppins" pitchFamily="34" charset="-120"/>
+              </a:rPr>
+              <a:t>Net movement should read from HubSpot and cannot yet. </a:t>
             </a:r>
             <a:pPr indent="0" marL="0">
               <a:spcAft>
@@ -48639,13 +48653,13 @@
             <a:r>
               <a:rPr lang="en-US" sz="850" dirty="0">
                 <a:solidFill>
-                  <a:srgbClr val="8FA1AC"/>
-                </a:solidFill>
-                <a:latin typeface="Poppins" pitchFamily="34" charset="0"/>
-                <a:ea typeface="Poppins" pitchFamily="34" charset="-122"/>
-                <a:cs typeface="Poppins" pitchFamily="34" charset="-120"/>
-              </a:rPr>
-              <a:t>AVC excluded — Creatio MRR field misstated (annual values in the monthly field); correction pending.</a:t>
+                  <a:srgbClr val="3A4B57"/>
+                </a:solidFill>
+                <a:latin typeface="Poppins" pitchFamily="34" charset="0"/>
+                <a:ea typeface="Poppins" pitchFamily="34" charset="-122"/>
+                <a:cs typeface="Poppins" pitchFamily="34" charset="-120"/>
+              </a:rPr>
+              <a:t>mrr is set on 13 of 114 September wins and on none of the 91 expansion deals, and $50.2k of the $52.1k it does hold is the misstated AVC migration batch (annual values in the monthly field). There is no churn source at all — Subscriptions is empty. The finance register stays the record until expansion carries mrr and a churn motion exists.</a:t>
             </a:r>
             <a:endParaRPr lang="en-US" sz="850" dirty="0"/>
           </a:p>
@@ -48654,7 +48668,21 @@
               <a:buNone/>
             </a:pPr>
             <a:r>
-              <a:rPr lang="en-US" sz="900" b="1" dirty="0">
+              <a:rPr lang="en-US" sz="850" b="1" dirty="0">
+                <a:solidFill>
+                  <a:srgbClr val="C88A2E"/>
+                </a:solidFill>
+                <a:latin typeface="Poppins" pitchFamily="34" charset="0"/>
+                <a:ea typeface="Poppins" pitchFamily="34" charset="-122"/>
+                <a:cs typeface="Poppins" pitchFamily="34" charset="-120"/>
+              </a:rPr>
+              <a:t>◆  </a:t>
+            </a:r>
+            <a:pPr indent="0" marL="0">
+              <a:buNone/>
+            </a:pPr>
+            <a:r>
+              <a:rPr lang="en-US" sz="850" b="1" dirty="0">
                 <a:solidFill>
                   <a:srgbClr val="2C8394"/>
                 </a:solidFill>
@@ -48662,43 +48690,12 @@
                 <a:ea typeface="Poppins" pitchFamily="34" charset="-122"/>
                 <a:cs typeface="Poppins" pitchFamily="34" charset="-120"/>
               </a:rPr>
-              <a:t>GO-LIVE CONTEXT</a:t>
-            </a:r>
-            <a:endParaRPr lang="en-US" sz="850" dirty="0"/>
-          </a:p>
-          <a:p>
+              <a:t>GO-LIVE CONTEXT · Oscars Group — </a:t>
+            </a:r>
             <a:pPr indent="0" marL="0">
               <a:buNone/>
             </a:pPr>
             <a:r>
-              <a:rPr lang="en-US" sz="850" b="1" dirty="0">
-                <a:solidFill>
-                  <a:srgbClr val="C88A2E"/>
-                </a:solidFill>
-                <a:latin typeface="Poppins" pitchFamily="34" charset="0"/>
-                <a:ea typeface="Poppins" pitchFamily="34" charset="-122"/>
-                <a:cs typeface="Poppins" pitchFamily="34" charset="-120"/>
-              </a:rPr>
-              <a:t>◆  </a:t>
-            </a:r>
-            <a:pPr indent="0" marL="0">
-              <a:buNone/>
-            </a:pPr>
-            <a:r>
-              <a:rPr lang="en-US" sz="850" b="1" dirty="0">
-                <a:solidFill>
-                  <a:srgbClr val="12293A"/>
-                </a:solidFill>
-                <a:latin typeface="Poppins" pitchFamily="34" charset="0"/>
-                <a:ea typeface="Poppins" pitchFamily="34" charset="-122"/>
-                <a:cs typeface="Poppins" pitchFamily="34" charset="-120"/>
-              </a:rPr>
-              <a:t>Oscars Group — </a:t>
-            </a:r>
-            <a:pPr indent="0" marL="0">
-              <a:buNone/>
-            </a:pPr>
-            <a:r>
               <a:rPr lang="en-US" sz="850" dirty="0">
                 <a:solidFill>
                   <a:srgbClr val="3A4B57"/>
@@ -48707,7 +48704,7 @@
                 <a:ea typeface="Poppins" pitchFamily="34" charset="-122"/>
                 <a:cs typeface="Poppins" pitchFamily="34" charset="-120"/>
               </a:rPr>
-              <a:t>Signed — ~1.5x rollout timeline expected. Keen to start but held by old provider's contract terms; asking H&amp;L for a discount to bridge.</a:t>
+              <a:t>Signed — ~1.5x rollout timeline expected. Held by the old provider's contract terms; asking H&amp;L for a discount to bridge.</a:t>
             </a:r>
             <a:endParaRPr lang="en-US" sz="850" dirty="0"/>
           </a:p>
@@ -48760,8 +48757,8 @@
         </p:nvSpPr>
         <p:spPr>
           <a:xfrm>
-            <a:off x="7337146" y="6510528"/>
-            <a:ext cx="4440326" cy="256032"/>
+            <a:off x="6528816" y="6510528"/>
+            <a:ext cx="5248656" cy="256032"/>
           </a:xfrm>
           <a:prstGeom prst="roundRect">
             <a:avLst>
@@ -48782,8 +48779,8 @@
         </p:nvSpPr>
         <p:spPr>
           <a:xfrm>
-            <a:off x="7337146" y="6510528"/>
-            <a:ext cx="4440326" cy="256032"/>
+            <a:off x="6528816" y="6510528"/>
+            <a:ext cx="5248656" cy="256032"/>
           </a:xfrm>
           <a:prstGeom prst="rect">
             <a:avLst/>
@@ -48807,7 +48804,7 @@
                 <a:ea typeface="Poppins" pitchFamily="34" charset="-122"/>
                 <a:cs typeface="Poppins" pitchFamily="34" charset="-120"/>
               </a:rPr>
-              <a:t>Source: Finance Weekly Invoicing &amp; Creatio · movement register live</a:t>
+              <a:t>Source: Finance movement register (live) · chart frozen on the Creatio ARR basis</a:t>
             </a:r>
             <a:endParaRPr lang="en-US" sz="700" dirty="0"/>
           </a:p>

--- a/exec-deck/output/H&L Weekly Update - WC 21 Sep 2026.pptx
+++ b/exec-deck/output/H&L Weekly Update - WC 21 Sep 2026.pptx
@@ -32118,7 +32118,7 @@
                 <a:ea typeface="Poppins" pitchFamily="34" charset="-122"/>
                 <a:cs typeface="Poppins" pitchFamily="34" charset="-120"/>
               </a:rPr>
-              <a:t>The register carries no new-MRR rows dated 21–27 Sep 2026, so Q3 stays at $12,129 — 43% of the $28k OKR2 against a 97% pace mark. The last entry was 18 Sep; the next dated ones are 28 Sep ($598, Piermount) and 30 Sep ($62) — inside Q3 but after this reporting week.</a:t>
+              <a:t>The register carries no new-MRR rows dated 21–27 Sep 2026, so Q3 stays at $12,129 — 43% of the $28k OKR2 against a 97% pace mark. HubSpot shows $3,440 of new software MRR won in the week across 34 deals — none of it invoiced yet. The register's next dated entries are 28 and 30 Sep.</a:t>
             </a:r>
             <a:endParaRPr lang="en-US" sz="900" dirty="0"/>
           </a:p>
@@ -45802,7 +45802,7 @@
                 <a:ea typeface="Poppins" pitchFamily="34" charset="-122"/>
                 <a:cs typeface="Poppins" pitchFamily="34" charset="-120"/>
               </a:rPr>
-              <a:t>Jul–Sep · finance movement register, live — HubSpot cannot produce this yet</a:t>
+              <a:t>Jul–Sep · won $12.1k (HubSpot) vs invoiced $12.1k (register) · churn has no HubSpot source</a:t>
             </a:r>
             <a:endParaRPr lang="en-US" sz="780" dirty="0"/>
           </a:p>
@@ -48642,7 +48642,7 @@
                 <a:ea typeface="Poppins" pitchFamily="34" charset="-122"/>
                 <a:cs typeface="Poppins" pitchFamily="34" charset="-120"/>
               </a:rPr>
-              <a:t>Net movement should read from HubSpot and cannot yet. </a:t>
+              <a:t>Won MRR now reads from HubSpot. </a:t>
             </a:r>
             <a:pPr indent="0" marL="0">
               <a:spcAft>
@@ -48659,7 +48659,7 @@
                 <a:ea typeface="Poppins" pitchFamily="34" charset="-122"/>
                 <a:cs typeface="Poppins" pitchFamily="34" charset="-120"/>
               </a:rPr>
-              <a:t>mrr is set on 13 of 114 September wins and on none of the 91 expansion deals, and $50.2k of the $52.1k it does hold is the misstated AVC migration batch (annual values in the monthly field). There is no churn source at all — Subscriptions is empty. The finance register stays the record until expansion carries mrr and a churn motion exists.</a:t>
+              <a:t>Your Total Software field (outright excluded, annual ÷ 12) gives $3,440 won in 21–27 Sep and $12,061 across Q3 against $12,129 invoiced on the register — a 0.6% gap, so the two tie out. That is why the register shows a nil week: the $3.4k won has not been invoiced yet. Net movement still needs the register because HubSpot has no churn or contraction motion.</a:t>
             </a:r>
             <a:endParaRPr lang="en-US" sz="850" dirty="0"/>
           </a:p>
@@ -48757,8 +48757,8 @@
         </p:nvSpPr>
         <p:spPr>
           <a:xfrm>
-            <a:off x="6528816" y="6510528"/>
-            <a:ext cx="5248656" cy="256032"/>
+            <a:off x="5925312" y="6510528"/>
+            <a:ext cx="5852160" cy="256032"/>
           </a:xfrm>
           <a:prstGeom prst="roundRect">
             <a:avLst>
@@ -48779,8 +48779,8 @@
         </p:nvSpPr>
         <p:spPr>
           <a:xfrm>
-            <a:off x="6528816" y="6510528"/>
-            <a:ext cx="5248656" cy="256032"/>
+            <a:off x="5925312" y="6510528"/>
+            <a:ext cx="5852160" cy="256032"/>
           </a:xfrm>
           <a:prstGeom prst="rect">
             <a:avLst/>
@@ -48804,7 +48804,7 @@
                 <a:ea typeface="Poppins" pitchFamily="34" charset="-122"/>
                 <a:cs typeface="Poppins" pitchFamily="34" charset="-120"/>
               </a:rPr>
-              <a:t>Source: Finance movement register (live) · chart frozen on the Creatio ARR basis</a:t>
+              <a:t>Source: HubSpot total_software_cost (won) + finance movement register (invoiced) · chart frozen at cutover</a:t>
             </a:r>
             <a:endParaRPr lang="en-US" sz="700" dirty="0"/>
           </a:p>

--- a/exec-deck/output/H&L Weekly Update - WC 21 Sep 2026.pptx
+++ b/exec-deck/output/H&L Weekly Update - WC 21 Sep 2026.pptx
@@ -730,7 +730,7 @@
               <c:strCache>
                 <c:ptCount val="1"/>
                 <c:pt idx="0">
-                  <c:v>Closed won</c:v>
+                  <c:v>Won (HubSpot)</c:v>
                 </c:pt>
               </c:strCache>
             </c:strRef>
@@ -768,9 +768,9 @@
           </c:dLbls>
           <c:cat>
             <c:multiLvlStrRef>
-              <c:f>Sheet1!$A$2:$A$8</c:f>
+              <c:f>Sheet1!$A$2:$A$10</c:f>
               <c:multiLvlStrCache>
-                <c:ptCount val="7"/>
+                <c:ptCount val="9"/>
                 <c:lvl>
                   <c:pt idx="0">
                     <c:v>Jan</c:v>
@@ -793,36 +793,48 @@
                   <c:pt idx="6">
                     <c:v>Jul</c:v>
                   </c:pt>
+                  <c:pt idx="7">
+                    <c:v>Aug</c:v>
+                  </c:pt>
+                  <c:pt idx="8">
+                    <c:v>Sep</c:v>
+                  </c:pt>
                 </c:lvl>
               </c:multiLvlStrCache>
             </c:multiLvlStrRef>
           </c:cat>
           <c:val>
             <c:numRef>
-              <c:f>Sheet1!$B$2:$B$8</c:f>
+              <c:f>Sheet1!$B$2:$B$10</c:f>
               <c:numCache>
                 <c:formatCode>General</c:formatCode>
-                <c:ptCount val="7"/>
+                <c:ptCount val="9"/>
                 <c:pt idx="0">
-                  <c:v>89148</c:v>
+                  <c:v>188</c:v>
                 </c:pt>
                 <c:pt idx="1">
-                  <c:v>53717</c:v>
+                  <c:v>472</c:v>
                 </c:pt>
                 <c:pt idx="2">
-                  <c:v>200064</c:v>
+                  <c:v>16627</c:v>
                 </c:pt>
                 <c:pt idx="3">
-                  <c:v>34236</c:v>
+                  <c:v>3799</c:v>
                 </c:pt>
                 <c:pt idx="4">
-                  <c:v>39372</c:v>
+                  <c:v>6312</c:v>
                 </c:pt>
                 <c:pt idx="5">
-                  <c:v>77748</c:v>
+                  <c:v>17288</c:v>
                 </c:pt>
                 <c:pt idx="6">
-                  <c:v>15377</c:v>
+                  <c:v>969</c:v>
+                </c:pt>
+                <c:pt idx="7">
+                  <c:v>2685</c:v>
+                </c:pt>
+                <c:pt idx="8">
+                  <c:v>8407</c:v>
                 </c:pt>
               </c:numCache>
             </c:numRef>
@@ -837,7 +849,7 @@
               <c:strCache>
                 <c:ptCount val="1"/>
                 <c:pt idx="0">
-                  <c:v>Invoiced (new + expansion)</c:v>
+                  <c:v>Invoiced (register)</c:v>
                 </c:pt>
               </c:strCache>
             </c:strRef>
@@ -875,9 +887,9 @@
           </c:dLbls>
           <c:cat>
             <c:multiLvlStrRef>
-              <c:f>Sheet1!$A$2:$A$8</c:f>
+              <c:f>Sheet1!$A$2:$A$10</c:f>
               <c:multiLvlStrCache>
-                <c:ptCount val="7"/>
+                <c:ptCount val="9"/>
                 <c:lvl>
                   <c:pt idx="0">
                     <c:v>Jan</c:v>
@@ -900,36 +912,48 @@
                   <c:pt idx="6">
                     <c:v>Jul</c:v>
                   </c:pt>
+                  <c:pt idx="7">
+                    <c:v>Aug</c:v>
+                  </c:pt>
+                  <c:pt idx="8">
+                    <c:v>Sep</c:v>
+                  </c:pt>
                 </c:lvl>
               </c:multiLvlStrCache>
             </c:multiLvlStrRef>
           </c:cat>
           <c:val>
             <c:numRef>
-              <c:f>Sheet1!$C$2:$C$8</c:f>
+              <c:f>Sheet1!$C$2:$C$10</c:f>
               <c:numCache>
                 <c:formatCode>General</c:formatCode>
-                <c:ptCount val="7"/>
+                <c:ptCount val="9"/>
                 <c:pt idx="0">
-                  <c:v>30732</c:v>
+                  <c:v>2829</c:v>
                 </c:pt>
                 <c:pt idx="1">
-                  <c:v>66948</c:v>
+                  <c:v>5205</c:v>
                 </c:pt>
                 <c:pt idx="2">
-                  <c:v>44352</c:v>
+                  <c:v>5883</c:v>
                 </c:pt>
                 <c:pt idx="3">
-                  <c:v>58572</c:v>
+                  <c:v>3463</c:v>
                 </c:pt>
                 <c:pt idx="4">
-                  <c:v>70788</c:v>
+                  <c:v>5482</c:v>
                 </c:pt>
                 <c:pt idx="5">
-                  <c:v>45408</c:v>
+                  <c:v>7087</c:v>
                 </c:pt>
                 <c:pt idx="6">
-                  <c:v>90012</c:v>
+                  <c:v>4860</c:v>
+                </c:pt>
+                <c:pt idx="7">
+                  <c:v>3700</c:v>
+                </c:pt>
+                <c:pt idx="8">
+                  <c:v>3569</c:v>
                 </c:pt>
               </c:numCache>
             </c:numRef>
@@ -45295,7 +45319,7 @@
                 <a:ea typeface="Poppins" pitchFamily="34" charset="-122"/>
                 <a:cs typeface="Poppins" pitchFamily="34" charset="-120"/>
               </a:rPr>
-              <a:t>CLOSED WON ARR VS INVOICED ARR BY MONTH · 2026   </a:t>
+              <a:t>NEW MRR — WON VS INVOICED BY MONTH · 2026   </a:t>
             </a:r>
             <a:pPr indent="0" marL="0">
               <a:buNone/>
@@ -45303,13 +45327,13 @@
             <a:r>
               <a:rPr lang="en-US" sz="680" dirty="0">
                 <a:solidFill>
-                  <a:srgbClr val="C88A2E"/>
-                </a:solidFill>
-                <a:latin typeface="Poppins" pitchFamily="34" charset="0"/>
-                <a:ea typeface="Poppins" pitchFamily="34" charset="-122"/>
-                <a:cs typeface="Poppins" pitchFamily="34" charset="-120"/>
-              </a:rPr>
-              <a:t>frozen at cutover</a:t>
+                  <a:srgbClr val="3D8F5F"/>
+                </a:solidFill>
+                <a:latin typeface="Poppins" pitchFamily="34" charset="0"/>
+                <a:ea typeface="Poppins" pitchFamily="34" charset="-122"/>
+                <a:cs typeface="Poppins" pitchFamily="34" charset="-120"/>
+              </a:rPr>
+              <a:t>both series live</a:t>
             </a:r>
             <a:endParaRPr lang="en-US" sz="1150" dirty="0"/>
           </a:p>
@@ -45364,7 +45388,7 @@
                 <a:ea typeface="Poppins" pitchFamily="34" charset="-122"/>
                 <a:cs typeface="Poppins" pitchFamily="34" charset="-120"/>
               </a:rPr>
-              <a:t>Frozen at cutover — Creatio ARR basis, as last published. Aug–Sep are not plotted: HubSpot closed-won is deal amount, not the Creatio ARR measure, so a new series starts once the post-cutover months are confirmed.</a:t>
+              <a:t>Won = HubSpot closed-won Total Software (outright excluded, annual ÷ 12) by close date. Invoiced = finance register new + expansion by date of invoice. Both live and refreshed weekly — nothing on this slide is frozen.</a:t>
             </a:r>
             <a:endParaRPr lang="en-US" sz="620" dirty="0"/>
           </a:p>
@@ -45432,7 +45456,7 @@
                 <a:ea typeface="Poppins" pitchFamily="34" charset="-122"/>
                 <a:cs typeface="Poppins" pitchFamily="34" charset="-120"/>
               </a:rPr>
-              <a:t>AWAITING GO-LIVE — ARR</a:t>
+              <a:t>AWAITING INVOICE — ARR</a:t>
             </a:r>
             <a:endParaRPr lang="en-US" sz="950" dirty="0"/>
           </a:p>
@@ -45471,7 +45495,7 @@
                 <a:ea typeface="Poppins" pitchFamily="34" charset="-122"/>
                 <a:cs typeface="Poppins" pitchFamily="34" charset="-120"/>
               </a:rPr>
-              <a:t>$250k</a:t>
+              <a:t>$481k</a:t>
             </a:r>
             <a:endParaRPr lang="en-US" sz="2000" dirty="0"/>
           </a:p>
@@ -45510,7 +45534,7 @@
                 <a:ea typeface="Poppins" pitchFamily="34" charset="-122"/>
                 <a:cs typeface="Poppins" pitchFamily="34" charset="-120"/>
               </a:rPr>
-              <a:t>497 deals won since Mar · 277 invoiced · 220 outstanding</a:t>
+              <a:t>45 of 66 deals won with software MRR in 2026 · $379k of it on 20 companies with no Debtor ID</a:t>
             </a:r>
             <a:endParaRPr lang="en-US" sz="780" dirty="0"/>
           </a:p>
@@ -45617,7 +45641,7 @@
                 <a:ea typeface="Poppins" pitchFamily="34" charset="-122"/>
                 <a:cs typeface="Poppins" pitchFamily="34" charset="-120"/>
               </a:rPr>
-              <a:t>$1.17M</a:t>
+              <a:t>$639k</a:t>
             </a:r>
             <a:endParaRPr lang="en-US" sz="2000" dirty="0"/>
           </a:p>
@@ -45656,7 +45680,7 @@
                 <a:ea typeface="Poppins" pitchFamily="34" charset="-122"/>
                 <a:cs typeface="Poppins" pitchFamily="34" charset="-120"/>
               </a:rPr>
-              <a:t>262 logos lost · register live</a:t>
+              <a:t>171 logos · HubSpot company churn register · live</a:t>
             </a:r>
             <a:endParaRPr lang="en-US" sz="780" dirty="0"/>
           </a:p>
@@ -45757,13 +45781,13 @@
             <a:r>
               <a:rPr lang="en-US" sz="2000" b="1" dirty="0">
                 <a:solidFill>
-                  <a:srgbClr val="B4552D"/>
-                </a:solidFill>
-                <a:latin typeface="Poppins" pitchFamily="34" charset="0"/>
-                <a:ea typeface="Poppins" pitchFamily="34" charset="-122"/>
-                <a:cs typeface="Poppins" pitchFamily="34" charset="-120"/>
-              </a:rPr>
-              <a:t>-$6.3k</a:t>
+                  <a:srgbClr val="C88A2E"/>
+                </a:solidFill>
+                <a:latin typeface="Poppins" pitchFamily="34" charset="0"/>
+                <a:ea typeface="Poppins" pitchFamily="34" charset="-122"/>
+                <a:cs typeface="Poppins" pitchFamily="34" charset="-120"/>
+              </a:rPr>
+              <a:t>+$12.1k</a:t>
             </a:r>
             <a:endParaRPr lang="en-US" sz="2000" dirty="0"/>
           </a:p>
@@ -45802,7 +45826,7 @@
                 <a:ea typeface="Poppins" pitchFamily="34" charset="-122"/>
                 <a:cs typeface="Poppins" pitchFamily="34" charset="-120"/>
               </a:rPr>
-              <a:t>Jul–Sep · won $12.1k (HubSpot) vs invoiced $12.1k (register) · churn has no HubSpot source</a:t>
+              <a:t>won $12.1k less churn recorded $0 — not yet a true net</a:t>
             </a:r>
             <a:endParaRPr lang="en-US" sz="780" dirty="0"/>
           </a:p>
@@ -46070,17 +46094,6 @@
             <a:pPr algn="r" indent="0" marL="0">
               <a:buNone/>
             </a:pPr>
-            <a:r>
-              <a:rPr lang="en-US" sz="700" b="1" dirty="0">
-                <a:solidFill>
-                  <a:srgbClr val="8FA1AC"/>
-                </a:solidFill>
-                <a:latin typeface="Poppins" pitchFamily="34" charset="0"/>
-                <a:ea typeface="Poppins" pitchFamily="34" charset="-122"/>
-                <a:cs typeface="Poppins" pitchFamily="34" charset="-120"/>
-              </a:rPr>
-              <a:t>DEALS</a:t>
-            </a:r>
             <a:endParaRPr lang="en-US" sz="700" dirty="0"/>
           </a:p>
         </p:txBody>
@@ -46157,7 +46170,7 @@
                 <a:ea typeface="Poppins" pitchFamily="34" charset="-122"/>
                 <a:cs typeface="Poppins" pitchFamily="34" charset="-120"/>
               </a:rPr>
-              <a:t>Oscars Group ◆</a:t>
+              <a:t>Oscars Hotels</a:t>
             </a:r>
             <a:endParaRPr lang="en-US" sz="750" dirty="0"/>
           </a:p>
@@ -46305,15 +46318,15 @@
               <a:buNone/>
             </a:pPr>
             <a:r>
-              <a:rPr lang="en-US" sz="750" dirty="0">
-                <a:solidFill>
-                  <a:srgbClr val="5E7280"/>
-                </a:solidFill>
-                <a:latin typeface="Poppins" pitchFamily="34" charset="0"/>
-                <a:ea typeface="Poppins" pitchFamily="34" charset="-122"/>
-                <a:cs typeface="Poppins" pitchFamily="34" charset="-120"/>
-              </a:rPr>
-              <a:t>1</a:t>
+              <a:rPr lang="en-US" sz="750" b="1" dirty="0">
+                <a:solidFill>
+                  <a:srgbClr val="C88A2E"/>
+                </a:solidFill>
+                <a:latin typeface="Poppins" pitchFamily="34" charset="0"/>
+                <a:ea typeface="Poppins" pitchFamily="34" charset="-122"/>
+                <a:cs typeface="Poppins" pitchFamily="34" charset="-120"/>
+              </a:rPr>
+              <a:t>◆</a:t>
             </a:r>
             <a:endParaRPr lang="en-US" sz="750" dirty="0"/>
           </a:p>
@@ -46391,7 +46404,7 @@
                 <a:ea typeface="Poppins" pitchFamily="34" charset="-122"/>
                 <a:cs typeface="Poppins" pitchFamily="34" charset="-120"/>
               </a:rPr>
-              <a:t>Wayi Restaurant</a:t>
+              <a:t>Hotel Grand Chancellor — Adelaide</a:t>
             </a:r>
             <a:endParaRPr lang="en-US" sz="750" dirty="0"/>
           </a:p>
@@ -46430,7 +46443,7 @@
                 <a:ea typeface="Poppins" pitchFamily="34" charset="-122"/>
                 <a:cs typeface="Poppins" pitchFamily="34" charset="-120"/>
               </a:rPr>
-              <a:t>$21k</a:t>
+              <a:t>$95k</a:t>
             </a:r>
             <a:endParaRPr lang="en-US" sz="750" dirty="0"/>
           </a:p>
@@ -46469,7 +46482,7 @@
                 <a:ea typeface="Poppins" pitchFamily="34" charset="-122"/>
                 <a:cs typeface="Poppins" pitchFamily="34" charset="-120"/>
               </a:rPr>
-              <a:t>$1,790</a:t>
+              <a:t>$7,900</a:t>
             </a:r>
             <a:endParaRPr lang="en-US" sz="750" dirty="0"/>
           </a:p>
@@ -46508,7 +46521,7 @@
                 <a:ea typeface="Poppins" pitchFamily="34" charset="-122"/>
                 <a:cs typeface="Poppins" pitchFamily="34" charset="-120"/>
               </a:rPr>
-              <a:t>May</a:t>
+              <a:t>Jun</a:t>
             </a:r>
             <a:endParaRPr lang="en-US" sz="750" dirty="0"/>
           </a:p>
@@ -46539,15 +46552,15 @@
               <a:buNone/>
             </a:pPr>
             <a:r>
-              <a:rPr lang="en-US" sz="750" dirty="0">
-                <a:solidFill>
-                  <a:srgbClr val="5E7280"/>
-                </a:solidFill>
-                <a:latin typeface="Poppins" pitchFamily="34" charset="0"/>
-                <a:ea typeface="Poppins" pitchFamily="34" charset="-122"/>
-                <a:cs typeface="Poppins" pitchFamily="34" charset="-120"/>
-              </a:rPr>
-              <a:t>1</a:t>
+              <a:rPr lang="en-US" sz="750" b="1" dirty="0">
+                <a:solidFill>
+                  <a:srgbClr val="C88A2E"/>
+                </a:solidFill>
+                <a:latin typeface="Poppins" pitchFamily="34" charset="0"/>
+                <a:ea typeface="Poppins" pitchFamily="34" charset="-122"/>
+                <a:cs typeface="Poppins" pitchFamily="34" charset="-120"/>
+              </a:rPr>
+              <a:t>◆</a:t>
             </a:r>
             <a:endParaRPr lang="en-US" sz="750" dirty="0"/>
           </a:p>
@@ -46625,7 +46638,7 @@
                 <a:ea typeface="Poppins" pitchFamily="34" charset="-122"/>
                 <a:cs typeface="Poppins" pitchFamily="34" charset="-120"/>
               </a:rPr>
-              <a:t>Hallmark Hospitality · 2 venues</a:t>
+              <a:t>AVC - White Cockatoo Hotel</a:t>
             </a:r>
             <a:endParaRPr lang="en-US" sz="750" dirty="0"/>
           </a:p>
@@ -46664,7 +46677,7 @@
                 <a:ea typeface="Poppins" pitchFamily="34" charset="-122"/>
                 <a:cs typeface="Poppins" pitchFamily="34" charset="-120"/>
               </a:rPr>
-              <a:t>$19k</a:t>
+              <a:t>$52k</a:t>
             </a:r>
             <a:endParaRPr lang="en-US" sz="750" dirty="0"/>
           </a:p>
@@ -46703,7 +46716,7 @@
                 <a:ea typeface="Poppins" pitchFamily="34" charset="-122"/>
                 <a:cs typeface="Poppins" pitchFamily="34" charset="-120"/>
               </a:rPr>
-              <a:t>$1,557</a:t>
+              <a:t>$4,345</a:t>
             </a:r>
             <a:endParaRPr lang="en-US" sz="750" dirty="0"/>
           </a:p>
@@ -46742,7 +46755,7 @@
                 <a:ea typeface="Poppins" pitchFamily="34" charset="-122"/>
                 <a:cs typeface="Poppins" pitchFamily="34" charset="-120"/>
               </a:rPr>
-              <a:t>Jun</a:t>
+              <a:t>May</a:t>
             </a:r>
             <a:endParaRPr lang="en-US" sz="750" dirty="0"/>
           </a:p>
@@ -46773,15 +46786,15 @@
               <a:buNone/>
             </a:pPr>
             <a:r>
-              <a:rPr lang="en-US" sz="750" dirty="0">
-                <a:solidFill>
-                  <a:srgbClr val="5E7280"/>
-                </a:solidFill>
-                <a:latin typeface="Poppins" pitchFamily="34" charset="0"/>
-                <a:ea typeface="Poppins" pitchFamily="34" charset="-122"/>
-                <a:cs typeface="Poppins" pitchFamily="34" charset="-120"/>
-              </a:rPr>
-              <a:t>3</a:t>
+              <a:rPr lang="en-US" sz="750" b="1" dirty="0">
+                <a:solidFill>
+                  <a:srgbClr val="C88A2E"/>
+                </a:solidFill>
+                <a:latin typeface="Poppins" pitchFamily="34" charset="0"/>
+                <a:ea typeface="Poppins" pitchFamily="34" charset="-122"/>
+                <a:cs typeface="Poppins" pitchFamily="34" charset="-120"/>
+              </a:rPr>
+              <a:t>◆</a:t>
             </a:r>
             <a:endParaRPr lang="en-US" sz="750" dirty="0"/>
           </a:p>
@@ -46859,7 +46872,7 @@
                 <a:ea typeface="Poppins" pitchFamily="34" charset="-122"/>
                 <a:cs typeface="Poppins" pitchFamily="34" charset="-120"/>
               </a:rPr>
-              <a:t>BRG · 2 venues</a:t>
+              <a:t>Terminus Hotel - Strathalbyn</a:t>
             </a:r>
             <a:endParaRPr lang="en-US" sz="750" dirty="0"/>
           </a:p>
@@ -46898,7 +46911,7 @@
                 <a:ea typeface="Poppins" pitchFamily="34" charset="-122"/>
                 <a:cs typeface="Poppins" pitchFamily="34" charset="-120"/>
               </a:rPr>
-              <a:t>$6k</a:t>
+              <a:t>$10k</a:t>
             </a:r>
             <a:endParaRPr lang="en-US" sz="750" dirty="0"/>
           </a:p>
@@ -46937,7 +46950,7 @@
                 <a:ea typeface="Poppins" pitchFamily="34" charset="-122"/>
                 <a:cs typeface="Poppins" pitchFamily="34" charset="-120"/>
               </a:rPr>
-              <a:t>$492</a:t>
+              <a:t>$850</a:t>
             </a:r>
             <a:endParaRPr lang="en-US" sz="750" dirty="0"/>
           </a:p>
@@ -46976,7 +46989,7 @@
                 <a:ea typeface="Poppins" pitchFamily="34" charset="-122"/>
                 <a:cs typeface="Poppins" pitchFamily="34" charset="-120"/>
               </a:rPr>
-              <a:t>Jul</a:t>
+              <a:t>Apr</a:t>
             </a:r>
             <a:endParaRPr lang="en-US" sz="750" dirty="0"/>
           </a:p>
@@ -47007,15 +47020,15 @@
               <a:buNone/>
             </a:pPr>
             <a:r>
-              <a:rPr lang="en-US" sz="750" dirty="0">
-                <a:solidFill>
-                  <a:srgbClr val="5E7280"/>
-                </a:solidFill>
-                <a:latin typeface="Poppins" pitchFamily="34" charset="0"/>
-                <a:ea typeface="Poppins" pitchFamily="34" charset="-122"/>
-                <a:cs typeface="Poppins" pitchFamily="34" charset="-120"/>
-              </a:rPr>
-              <a:t>2</a:t>
+              <a:rPr lang="en-US" sz="750" b="1" dirty="0">
+                <a:solidFill>
+                  <a:srgbClr val="C88A2E"/>
+                </a:solidFill>
+                <a:latin typeface="Poppins" pitchFamily="34" charset="0"/>
+                <a:ea typeface="Poppins" pitchFamily="34" charset="-122"/>
+                <a:cs typeface="Poppins" pitchFamily="34" charset="-120"/>
+              </a:rPr>
+              <a:t>◆</a:t>
             </a:r>
             <a:endParaRPr lang="en-US" sz="750" dirty="0"/>
           </a:p>
@@ -47093,7 +47106,7 @@
                 <a:ea typeface="Poppins" pitchFamily="34" charset="-122"/>
                 <a:cs typeface="Poppins" pitchFamily="34" charset="-120"/>
               </a:rPr>
-              <a:t>Grand Cru - Claremont</a:t>
+              <a:t>BRG - Grand Hotel Millicent</a:t>
             </a:r>
             <a:endParaRPr lang="en-US" sz="750" dirty="0"/>
           </a:p>
@@ -47132,7 +47145,7 @@
                 <a:ea typeface="Poppins" pitchFamily="34" charset="-122"/>
                 <a:cs typeface="Poppins" pitchFamily="34" charset="-120"/>
               </a:rPr>
-              <a:t>$6k</a:t>
+              <a:t>$10k</a:t>
             </a:r>
             <a:endParaRPr lang="en-US" sz="750" dirty="0"/>
           </a:p>
@@ -47171,7 +47184,7 @@
                 <a:ea typeface="Poppins" pitchFamily="34" charset="-122"/>
                 <a:cs typeface="Poppins" pitchFamily="34" charset="-120"/>
               </a:rPr>
-              <a:t>$480</a:t>
+              <a:t>$795</a:t>
             </a:r>
             <a:endParaRPr lang="en-US" sz="750" dirty="0"/>
           </a:p>
@@ -47241,15 +47254,15 @@
               <a:buNone/>
             </a:pPr>
             <a:r>
-              <a:rPr lang="en-US" sz="750" dirty="0">
-                <a:solidFill>
-                  <a:srgbClr val="5E7280"/>
-                </a:solidFill>
-                <a:latin typeface="Poppins" pitchFamily="34" charset="0"/>
-                <a:ea typeface="Poppins" pitchFamily="34" charset="-122"/>
-                <a:cs typeface="Poppins" pitchFamily="34" charset="-120"/>
-              </a:rPr>
-              <a:t>1</a:t>
+              <a:rPr lang="en-US" sz="750" b="1" dirty="0">
+                <a:solidFill>
+                  <a:srgbClr val="C88A2E"/>
+                </a:solidFill>
+                <a:latin typeface="Poppins" pitchFamily="34" charset="0"/>
+                <a:ea typeface="Poppins" pitchFamily="34" charset="-122"/>
+                <a:cs typeface="Poppins" pitchFamily="34" charset="-120"/>
+              </a:rPr>
+              <a:t>◆</a:t>
             </a:r>
             <a:endParaRPr lang="en-US" sz="750" dirty="0"/>
           </a:p>
@@ -47327,7 +47340,7 @@
                 <a:ea typeface="Poppins" pitchFamily="34" charset="-122"/>
                 <a:cs typeface="Poppins" pitchFamily="34" charset="-120"/>
               </a:rPr>
-              <a:t>Downs Club Toowoomba</a:t>
+              <a:t>Coyote's Roadhouse (Hallmark)</a:t>
             </a:r>
             <a:endParaRPr lang="en-US" sz="750" dirty="0"/>
           </a:p>
@@ -47366,7 +47379,7 @@
                 <a:ea typeface="Poppins" pitchFamily="34" charset="-122"/>
                 <a:cs typeface="Poppins" pitchFamily="34" charset="-120"/>
               </a:rPr>
-              <a:t>$5k</a:t>
+              <a:t>$9k</a:t>
             </a:r>
             <a:endParaRPr lang="en-US" sz="750" dirty="0"/>
           </a:p>
@@ -47405,7 +47418,7 @@
                 <a:ea typeface="Poppins" pitchFamily="34" charset="-122"/>
                 <a:cs typeface="Poppins" pitchFamily="34" charset="-120"/>
               </a:rPr>
-              <a:t>$455</a:t>
+              <a:t>$789</a:t>
             </a:r>
             <a:endParaRPr lang="en-US" sz="750" dirty="0"/>
           </a:p>
@@ -47444,7 +47457,7 @@
                 <a:ea typeface="Poppins" pitchFamily="34" charset="-122"/>
                 <a:cs typeface="Poppins" pitchFamily="34" charset="-120"/>
               </a:rPr>
-              <a:t>May</a:t>
+              <a:t>Sep</a:t>
             </a:r>
             <a:endParaRPr lang="en-US" sz="750" dirty="0"/>
           </a:p>
@@ -47474,17 +47487,6 @@
             <a:pPr algn="r" indent="0" marL="0">
               <a:buNone/>
             </a:pPr>
-            <a:r>
-              <a:rPr lang="en-US" sz="750" dirty="0">
-                <a:solidFill>
-                  <a:srgbClr val="5E7280"/>
-                </a:solidFill>
-                <a:latin typeface="Poppins" pitchFamily="34" charset="0"/>
-                <a:ea typeface="Poppins" pitchFamily="34" charset="-122"/>
-                <a:cs typeface="Poppins" pitchFamily="34" charset="-120"/>
-              </a:rPr>
-              <a:t>1</a:t>
-            </a:r>
             <a:endParaRPr lang="en-US" sz="750" dirty="0"/>
           </a:p>
         </p:txBody>
@@ -47561,7 +47563,7 @@
                 <a:ea typeface="Poppins" pitchFamily="34" charset="-122"/>
                 <a:cs typeface="Poppins" pitchFamily="34" charset="-120"/>
               </a:rPr>
-              <a:t>Crazy Horse Revue</a:t>
+              <a:t>Caves House Hotel</a:t>
             </a:r>
             <a:endParaRPr lang="en-US" sz="750" dirty="0"/>
           </a:p>
@@ -47600,7 +47602,7 @@
                 <a:ea typeface="Poppins" pitchFamily="34" charset="-122"/>
                 <a:cs typeface="Poppins" pitchFamily="34" charset="-120"/>
               </a:rPr>
-              <a:t>$5k</a:t>
+              <a:t>$8k</a:t>
             </a:r>
             <a:endParaRPr lang="en-US" sz="750" dirty="0"/>
           </a:p>
@@ -47639,7 +47641,7 @@
                 <a:ea typeface="Poppins" pitchFamily="34" charset="-122"/>
                 <a:cs typeface="Poppins" pitchFamily="34" charset="-120"/>
               </a:rPr>
-              <a:t>$437</a:t>
+              <a:t>$669</a:t>
             </a:r>
             <a:endParaRPr lang="en-US" sz="750" dirty="0"/>
           </a:p>
@@ -47678,7 +47680,7 @@
                 <a:ea typeface="Poppins" pitchFamily="34" charset="-122"/>
                 <a:cs typeface="Poppins" pitchFamily="34" charset="-120"/>
               </a:rPr>
-              <a:t>Apr</a:t>
+              <a:t>Aug</a:t>
             </a:r>
             <a:endParaRPr lang="en-US" sz="750" dirty="0"/>
           </a:p>
@@ -47708,17 +47710,6 @@
             <a:pPr algn="r" indent="0" marL="0">
               <a:buNone/>
             </a:pPr>
-            <a:r>
-              <a:rPr lang="en-US" sz="750" dirty="0">
-                <a:solidFill>
-                  <a:srgbClr val="5E7280"/>
-                </a:solidFill>
-                <a:latin typeface="Poppins" pitchFamily="34" charset="0"/>
-                <a:ea typeface="Poppins" pitchFamily="34" charset="-122"/>
-                <a:cs typeface="Poppins" pitchFamily="34" charset="-120"/>
-              </a:rPr>
-              <a:t>1</a:t>
-            </a:r>
             <a:endParaRPr lang="en-US" sz="750" dirty="0"/>
           </a:p>
         </p:txBody>
@@ -47795,7 +47786,7 @@
                 <a:ea typeface="Poppins" pitchFamily="34" charset="-122"/>
                 <a:cs typeface="Poppins" pitchFamily="34" charset="-120"/>
               </a:rPr>
-              <a:t>Citi Group - Harp</a:t>
+              <a:t>TH - Cote Basque</a:t>
             </a:r>
             <a:endParaRPr lang="en-US" sz="750" dirty="0"/>
           </a:p>
@@ -47834,7 +47825,7 @@
                 <a:ea typeface="Poppins" pitchFamily="34" charset="-122"/>
                 <a:cs typeface="Poppins" pitchFamily="34" charset="-120"/>
               </a:rPr>
-              <a:t>$5k</a:t>
+              <a:t>$8k</a:t>
             </a:r>
             <a:endParaRPr lang="en-US" sz="750" dirty="0"/>
           </a:p>
@@ -47873,7 +47864,7 @@
                 <a:ea typeface="Poppins" pitchFamily="34" charset="-122"/>
                 <a:cs typeface="Poppins" pitchFamily="34" charset="-120"/>
               </a:rPr>
-              <a:t>$410</a:t>
+              <a:t>$641</a:t>
             </a:r>
             <a:endParaRPr lang="en-US" sz="750" dirty="0"/>
           </a:p>
@@ -47912,7 +47903,7 @@
                 <a:ea typeface="Poppins" pitchFamily="34" charset="-122"/>
                 <a:cs typeface="Poppins" pitchFamily="34" charset="-120"/>
               </a:rPr>
-              <a:t>Mar</a:t>
+              <a:t>Sep</a:t>
             </a:r>
             <a:endParaRPr lang="en-US" sz="750" dirty="0"/>
           </a:p>
@@ -47943,15 +47934,15 @@
               <a:buNone/>
             </a:pPr>
             <a:r>
-              <a:rPr lang="en-US" sz="750" dirty="0">
-                <a:solidFill>
-                  <a:srgbClr val="5E7280"/>
-                </a:solidFill>
-                <a:latin typeface="Poppins" pitchFamily="34" charset="0"/>
-                <a:ea typeface="Poppins" pitchFamily="34" charset="-122"/>
-                <a:cs typeface="Poppins" pitchFamily="34" charset="-120"/>
-              </a:rPr>
-              <a:t>1</a:t>
+              <a:rPr lang="en-US" sz="750" b="1" dirty="0">
+                <a:solidFill>
+                  <a:srgbClr val="C88A2E"/>
+                </a:solidFill>
+                <a:latin typeface="Poppins" pitchFamily="34" charset="0"/>
+                <a:ea typeface="Poppins" pitchFamily="34" charset="-122"/>
+                <a:cs typeface="Poppins" pitchFamily="34" charset="-120"/>
+              </a:rPr>
+              <a:t>◆</a:t>
             </a:r>
             <a:endParaRPr lang="en-US" sz="750" dirty="0"/>
           </a:p>
@@ -48029,7 +48020,7 @@
                 <a:ea typeface="Poppins" pitchFamily="34" charset="-122"/>
                 <a:cs typeface="Poppins" pitchFamily="34" charset="-120"/>
               </a:rPr>
-              <a:t>Woodside Beach Hotel</a:t>
+              <a:t>New Whyalla Hotel</a:t>
             </a:r>
             <a:endParaRPr lang="en-US" sz="750" dirty="0"/>
           </a:p>
@@ -48068,7 +48059,7 @@
                 <a:ea typeface="Poppins" pitchFamily="34" charset="-122"/>
                 <a:cs typeface="Poppins" pitchFamily="34" charset="-120"/>
               </a:rPr>
-              <a:t>$5k</a:t>
+              <a:t>$7k</a:t>
             </a:r>
             <a:endParaRPr lang="en-US" sz="750" dirty="0"/>
           </a:p>
@@ -48107,7 +48098,7 @@
                 <a:ea typeface="Poppins" pitchFamily="34" charset="-122"/>
                 <a:cs typeface="Poppins" pitchFamily="34" charset="-120"/>
               </a:rPr>
-              <a:t>$394</a:t>
+              <a:t>$606</a:t>
             </a:r>
             <a:endParaRPr lang="en-US" sz="750" dirty="0"/>
           </a:p>
@@ -48146,7 +48137,7 @@
                 <a:ea typeface="Poppins" pitchFamily="34" charset="-122"/>
                 <a:cs typeface="Poppins" pitchFamily="34" charset="-120"/>
               </a:rPr>
-              <a:t>Sep</a:t>
+              <a:t>Apr</a:t>
             </a:r>
             <a:endParaRPr lang="en-US" sz="750" dirty="0"/>
           </a:p>
@@ -48176,17 +48167,6 @@
             <a:pPr algn="r" indent="0" marL="0">
               <a:buNone/>
             </a:pPr>
-            <a:r>
-              <a:rPr lang="en-US" sz="750" dirty="0">
-                <a:solidFill>
-                  <a:srgbClr val="5E7280"/>
-                </a:solidFill>
-                <a:latin typeface="Poppins" pitchFamily="34" charset="0"/>
-                <a:ea typeface="Poppins" pitchFamily="34" charset="-122"/>
-                <a:cs typeface="Poppins" pitchFamily="34" charset="-120"/>
-              </a:rPr>
-              <a:t>1</a:t>
-            </a:r>
             <a:endParaRPr lang="en-US" sz="750" dirty="0"/>
           </a:p>
         </p:txBody>
@@ -48263,7 +48243,7 @@
                 <a:ea typeface="Poppins" pitchFamily="34" charset="-122"/>
                 <a:cs typeface="Poppins" pitchFamily="34" charset="-120"/>
               </a:rPr>
-              <a:t>Bistro Margaux</a:t>
+              <a:t>Royal Family Hotel</a:t>
             </a:r>
             <a:endParaRPr lang="en-US" sz="750" dirty="0"/>
           </a:p>
@@ -48302,7 +48282,7 @@
                 <a:ea typeface="Poppins" pitchFamily="34" charset="-122"/>
                 <a:cs typeface="Poppins" pitchFamily="34" charset="-120"/>
               </a:rPr>
-              <a:t>$4k</a:t>
+              <a:t>$7k</a:t>
             </a:r>
             <a:endParaRPr lang="en-US" sz="750" dirty="0"/>
           </a:p>
@@ -48341,7 +48321,7 @@
                 <a:ea typeface="Poppins" pitchFamily="34" charset="-122"/>
                 <a:cs typeface="Poppins" pitchFamily="34" charset="-120"/>
               </a:rPr>
-              <a:t>$333</a:t>
+              <a:t>$597</a:t>
             </a:r>
             <a:endParaRPr lang="en-US" sz="750" dirty="0"/>
           </a:p>
@@ -48380,7 +48360,7 @@
                 <a:ea typeface="Poppins" pitchFamily="34" charset="-122"/>
                 <a:cs typeface="Poppins" pitchFamily="34" charset="-120"/>
               </a:rPr>
-              <a:t>Aug</a:t>
+              <a:t>Sep</a:t>
             </a:r>
             <a:endParaRPr lang="en-US" sz="750" dirty="0"/>
           </a:p>
@@ -48410,17 +48390,6 @@
             <a:pPr algn="r" indent="0" marL="0">
               <a:buNone/>
             </a:pPr>
-            <a:r>
-              <a:rPr lang="en-US" sz="750" dirty="0">
-                <a:solidFill>
-                  <a:srgbClr val="5E7280"/>
-                </a:solidFill>
-                <a:latin typeface="Poppins" pitchFamily="34" charset="0"/>
-                <a:ea typeface="Poppins" pitchFamily="34" charset="-122"/>
-                <a:cs typeface="Poppins" pitchFamily="34" charset="-120"/>
-              </a:rPr>
-              <a:t>1</a:t>
-            </a:r>
             <a:endParaRPr lang="en-US" sz="750" dirty="0"/>
           </a:p>
         </p:txBody>
@@ -48529,38 +48498,18 @@
               <a:t>•  </a:t>
             </a:r>
             <a:pPr indent="0" marL="0">
-              <a:spcAft>
-                <a:spcPts val="600"/>
-              </a:spcAft>
-              <a:buNone/>
-            </a:pPr>
-            <a:r>
-              <a:rPr lang="en-US" sz="850" dirty="0">
-                <a:solidFill>
-                  <a:srgbClr val="3A4B57"/>
-                </a:solidFill>
-                <a:latin typeface="Poppins" pitchFamily="34" charset="0"/>
-                <a:ea typeface="Poppins" pitchFamily="34" charset="-122"/>
-                <a:cs typeface="Poppins" pitchFamily="34" charset="-120"/>
-              </a:rPr>
-              <a:t>Install-to-invoice lag runs 60–90 days; March wins still uninvoiced are past normal lag and worth chasing.</a:t>
-            </a:r>
-            <a:endParaRPr lang="en-US" sz="850" dirty="0"/>
-          </a:p>
-          <a:p>
-            <a:pPr indent="0" marL="0">
               <a:buNone/>
             </a:pPr>
             <a:r>
               <a:rPr lang="en-US" sz="850" b="1" dirty="0">
                 <a:solidFill>
-                  <a:srgbClr val="C88A2E"/>
-                </a:solidFill>
-                <a:latin typeface="Poppins" pitchFamily="34" charset="0"/>
-                <a:ea typeface="Poppins" pitchFamily="34" charset="-122"/>
-                <a:cs typeface="Poppins" pitchFamily="34" charset="-120"/>
-              </a:rPr>
-              <a:t>•  </a:t>
+                  <a:srgbClr val="12293A"/>
+                </a:solidFill>
+                <a:latin typeface="Poppins" pitchFamily="34" charset="0"/>
+                <a:ea typeface="Poppins" pitchFamily="34" charset="-122"/>
+                <a:cs typeface="Poppins" pitchFamily="34" charset="-120"/>
+              </a:rPr>
+              <a:t>Won and invoiced now both read live. </a:t>
             </a:r>
             <a:pPr indent="0" marL="0">
               <a:spcAft>
@@ -48577,7 +48526,7 @@
                 <a:ea typeface="Poppins" pitchFamily="34" charset="-122"/>
                 <a:cs typeface="Poppins" pitchFamily="34" charset="-120"/>
               </a:rPr>
-              <a:t>Uninvoiced is top-loaded: Oscars Group is 62% of the $250k awaiting go-live; the top 3 clients are ~78%.</a:t>
+              <a:t>Won is HubSpot Total Software by close date, invoiced is the finance register by invoice date. Q3 ties out: $12,061 won against $12,129 invoiced, a 0.6% gap. March and June are the two months where wins ran far ahead of billing.</a:t>
             </a:r>
             <a:endParaRPr lang="en-US" sz="850" dirty="0"/>
           </a:p>
@@ -48588,13 +48537,27 @@
             <a:r>
               <a:rPr lang="en-US" sz="850" b="1" dirty="0">
                 <a:solidFill>
-                  <a:srgbClr val="2C8394"/>
+                  <a:srgbClr val="C88A2E"/>
                 </a:solidFill>
                 <a:latin typeface="Poppins" pitchFamily="34" charset="0"/>
                 <a:ea typeface="Poppins" pitchFamily="34" charset="-122"/>
                 <a:cs typeface="Poppins" pitchFamily="34" charset="-120"/>
               </a:rPr>
               <a:t>•  </a:t>
+            </a:r>
+            <a:pPr indent="0" marL="0">
+              <a:buNone/>
+            </a:pPr>
+            <a:r>
+              <a:rPr lang="en-US" sz="850" b="1" dirty="0">
+                <a:solidFill>
+                  <a:srgbClr val="12293A"/>
+                </a:solidFill>
+                <a:latin typeface="Poppins" pitchFamily="34" charset="0"/>
+                <a:ea typeface="Poppins" pitchFamily="34" charset="-122"/>
+                <a:cs typeface="Poppins" pitchFamily="34" charset="-120"/>
+              </a:rPr>
+              <a:t>$481k of ARR is won and not yet invoiced. </a:t>
             </a:r>
             <a:pPr indent="0" marL="0">
               <a:spcAft>
@@ -48611,7 +48574,7 @@
                 <a:ea typeface="Poppins" pitchFamily="34" charset="-122"/>
                 <a:cs typeface="Poppins" pitchFamily="34" charset="-120"/>
               </a:rPr>
-              <a:t>Churn reads from the movement register: $1.17M of ARR across 262 logos since 2025, plus $235k lost to contraction. Q3 net MRR is -$6.3k — new business is not covering it.</a:t>
+              <a:t>45 of the 66 deals that carried software MRR in 2026. Oscars Group alone is $155k — 32% of it — and the top three are 63%.</a:t>
             </a:r>
             <a:endParaRPr lang="en-US" sz="850" dirty="0"/>
           </a:p>
@@ -48622,7 +48585,7 @@
             <a:r>
               <a:rPr lang="en-US" sz="850" b="1" dirty="0">
                 <a:solidFill>
-                  <a:srgbClr val="B4552D"/>
+                  <a:srgbClr val="2C8394"/>
                 </a:solidFill>
                 <a:latin typeface="Poppins" pitchFamily="34" charset="0"/>
                 <a:ea typeface="Poppins" pitchFamily="34" charset="-122"/>
@@ -48642,11 +48605,11 @@
                 <a:ea typeface="Poppins" pitchFamily="34" charset="-122"/>
                 <a:cs typeface="Poppins" pitchFamily="34" charset="-120"/>
               </a:rPr>
-              <a:t>Won MRR now reads from HubSpot. </a:t>
+              <a:t>Debtor mapping is the blocker on $379k of that. </a:t>
             </a:r>
             <a:pPr indent="0" marL="0">
               <a:spcAft>
-                <a:spcPts val="800"/>
+                <a:spcPts val="600"/>
               </a:spcAft>
               <a:buNone/>
             </a:pPr>
@@ -48659,7 +48622,7 @@
                 <a:ea typeface="Poppins" pitchFamily="34" charset="-122"/>
                 <a:cs typeface="Poppins" pitchFamily="34" charset="-120"/>
               </a:rPr>
-              <a:t>Your Total Software field (outright excluded, annual ÷ 12) gives $3,440 won in 21–27 Sep and $12,061 across Q3 against $12,129 invoiced on the register — a 0.6% gap, so the two tie out. That is why the register shows a nil week: the $3.4k won has not been invoiced yet. Net movement still needs the register because HubSpot has no churn or contraction motion.</a:t>
+              <a:t>20 of the 45 companies carry no Debtor ID, so the match cannot be confirmed either way; only $102k is confirmed unbilled. Mapping those 20 is the single highest-value data fix on this slide.</a:t>
             </a:r>
             <a:endParaRPr lang="en-US" sz="850" dirty="0"/>
           </a:p>
@@ -48670,13 +48633,13 @@
             <a:r>
               <a:rPr lang="en-US" sz="850" b="1" dirty="0">
                 <a:solidFill>
-                  <a:srgbClr val="C88A2E"/>
-                </a:solidFill>
-                <a:latin typeface="Poppins" pitchFamily="34" charset="0"/>
-                <a:ea typeface="Poppins" pitchFamily="34" charset="-122"/>
-                <a:cs typeface="Poppins" pitchFamily="34" charset="-120"/>
-              </a:rPr>
-              <a:t>◆  </a:t>
+                  <a:srgbClr val="B4552D"/>
+                </a:solidFill>
+                <a:latin typeface="Poppins" pitchFamily="34" charset="0"/>
+                <a:ea typeface="Poppins" pitchFamily="34" charset="-122"/>
+                <a:cs typeface="Poppins" pitchFamily="34" charset="-120"/>
+              </a:rPr>
+              <a:t>•  </a:t>
             </a:r>
             <a:pPr indent="0" marL="0">
               <a:buNone/>
@@ -48684,15 +48647,18 @@
             <a:r>
               <a:rPr lang="en-US" sz="850" b="1" dirty="0">
                 <a:solidFill>
-                  <a:srgbClr val="2C8394"/>
-                </a:solidFill>
-                <a:latin typeface="Poppins" pitchFamily="34" charset="0"/>
-                <a:ea typeface="Poppins" pitchFamily="34" charset="-122"/>
-                <a:cs typeface="Poppins" pitchFamily="34" charset="-120"/>
-              </a:rPr>
-              <a:t>GO-LIVE CONTEXT · Oscars Group — </a:t>
+                  <a:srgbClr val="12293A"/>
+                </a:solidFill>
+                <a:latin typeface="Poppins" pitchFamily="34" charset="0"/>
+                <a:ea typeface="Poppins" pitchFamily="34" charset="-122"/>
+                <a:cs typeface="Poppins" pitchFamily="34" charset="-120"/>
+              </a:rPr>
+              <a:t>Churn recording stopped in February. </a:t>
             </a:r>
             <a:pPr indent="0" marL="0">
+              <a:spcAft>
+                <a:spcPts val="600"/>
+              </a:spcAft>
               <a:buNone/>
             </a:pPr>
             <a:r>
@@ -48704,7 +48670,24 @@
                 <a:ea typeface="Poppins" pitchFamily="34" charset="-122"/>
                 <a:cs typeface="Poppins" pitchFamily="34" charset="-120"/>
               </a:rPr>
-              <a:t>Signed — ~1.5x rollout timeline expected. Held by the old provider's contract terms; asking H&amp;L for a discount to bridge.</a:t>
+              <a:t>The HubSpot churn register is real through 2025 — 171 logos and $53.2k of MRR since Jan 2025, $639k ARR — but 2026 holds 15 logos and nothing since Feb carries a churned MRR value. Until that resumes, net movement is not a true net.</a:t>
+            </a:r>
+            <a:endParaRPr lang="en-US" sz="850" dirty="0"/>
+          </a:p>
+          <a:p>
+            <a:pPr indent="0" marL="0">
+              <a:buNone/>
+            </a:pPr>
+            <a:r>
+              <a:rPr lang="en-US" sz="700" dirty="0">
+                <a:solidFill>
+                  <a:srgbClr val="8FA1AC"/>
+                </a:solidFill>
+                <a:latin typeface="Poppins" pitchFamily="34" charset="0"/>
+                <a:ea typeface="Poppins" pitchFamily="34" charset="-122"/>
+                <a:cs typeface="Poppins" pitchFamily="34" charset="-120"/>
+              </a:rPr>
+              <a:t>◆ = company has no Debtor ID, so the invoice match cannot be confirmed either way</a:t>
             </a:r>
             <a:endParaRPr lang="en-US" sz="850" dirty="0"/>
           </a:p>
@@ -48743,7 +48726,7 @@
                 <a:ea typeface="Poppins" pitchFamily="34" charset="-122"/>
                 <a:cs typeface="Poppins" pitchFamily="34" charset="-120"/>
               </a:rPr>
-              <a:t>Invoiced = new + expansion MRR movements annualised</a:t>
+              <a:t>ARR = monthly software MRR × 12 · matched on Debtor ID from the HubSpot company record</a:t>
             </a:r>
             <a:endParaRPr lang="en-US" sz="750" dirty="0"/>
           </a:p>
@@ -48757,8 +48740,8 @@
         </p:nvSpPr>
         <p:spPr>
           <a:xfrm>
-            <a:off x="5925312" y="6510528"/>
-            <a:ext cx="5852160" cy="256032"/>
+            <a:off x="6777533" y="6510528"/>
+            <a:ext cx="4999939" cy="256032"/>
           </a:xfrm>
           <a:prstGeom prst="roundRect">
             <a:avLst>
@@ -48779,8 +48762,8 @@
         </p:nvSpPr>
         <p:spPr>
           <a:xfrm>
-            <a:off x="5925312" y="6510528"/>
-            <a:ext cx="5852160" cy="256032"/>
+            <a:off x="6777533" y="6510528"/>
+            <a:ext cx="4999939" cy="256032"/>
           </a:xfrm>
           <a:prstGeom prst="rect">
             <a:avLst/>
@@ -48804,7 +48787,7 @@
                 <a:ea typeface="Poppins" pitchFamily="34" charset="-122"/>
                 <a:cs typeface="Poppins" pitchFamily="34" charset="-120"/>
               </a:rPr>
-              <a:t>Source: HubSpot total_software_cost (won) + finance movement register (invoiced) · chart frozen at cutover</a:t>
+              <a:t>Source: HubSpot deals + company churn register + finance register — all live</a:t>
             </a:r>
             <a:endParaRPr lang="en-US" sz="700" dirty="0"/>
           </a:p>

--- a/exec-deck/output/H&L Weekly Update - WC 21 Sep 2026.pptx
+++ b/exec-deck/output/H&L Weekly Update - WC 21 Sep 2026.pptx
@@ -953,7 +953,7 @@
                   <c:v>3700</c:v>
                 </c:pt>
                 <c:pt idx="8">
-                  <c:v>3569</c:v>
+                  <c:v>6567</c:v>
                 </c:pt>
               </c:numCache>
             </c:numRef>
@@ -26259,7 +26259,7 @@
                 <a:ea typeface="Poppins" pitchFamily="34" charset="-122"/>
                 <a:cs typeface="Poppins" pitchFamily="34" charset="-120"/>
               </a:rPr>
-              <a:t>closed-won this week 34 deals · $131k (HubSpot); no new MRR invoiced in the week — Q3 holds at $12.1k = 43% of OKR2</a:t>
+              <a:t>closed-won this week 34 deals · $131k (HubSpot); new MRR +$1.7k in the week · Q3 $15.1k = 54% of OKR2</a:t>
             </a:r>
             <a:endParaRPr lang="en-US" sz="900" dirty="0"/>
           </a:p>
@@ -27565,7 +27565,7 @@
                 <a:ea typeface="Poppins" pitchFamily="34" charset="-122"/>
                 <a:cs typeface="Poppins" pitchFamily="34" charset="-120"/>
               </a:rPr>
-              <a:t>$12k</a:t>
+              <a:t>$15k</a:t>
             </a:r>
             <a:pPr indent="0" marL="0">
               <a:buNone/>
@@ -27612,13 +27612,13 @@
             <a:r>
               <a:rPr lang="en-US" sz="950" b="1" dirty="0">
                 <a:solidFill>
-                  <a:srgbClr val="C88A2E"/>
-                </a:solidFill>
-                <a:latin typeface="Poppins" pitchFamily="34" charset="0"/>
-                <a:ea typeface="Poppins" pitchFamily="34" charset="-122"/>
-                <a:cs typeface="Poppins" pitchFamily="34" charset="-120"/>
-              </a:rPr>
-              <a:t>nil this wk</a:t>
+                  <a:srgbClr val="3D8F5F"/>
+                </a:solidFill>
+                <a:latin typeface="Poppins" pitchFamily="34" charset="0"/>
+                <a:ea typeface="Poppins" pitchFamily="34" charset="-122"/>
+                <a:cs typeface="Poppins" pitchFamily="34" charset="-120"/>
+              </a:rPr>
+              <a:t>▲ +$1,659 this wk</a:t>
             </a:r>
             <a:endParaRPr lang="en-US" sz="950" dirty="0"/>
           </a:p>
@@ -27655,7 +27655,7 @@
         <p:spPr>
           <a:xfrm>
             <a:off x="594360" y="1901952"/>
-            <a:ext cx="1808683" cy="100584"/>
+            <a:ext cx="2271370" cy="100584"/>
           </a:xfrm>
           <a:prstGeom prst="roundRect">
             <a:avLst>
@@ -27721,7 +27721,7 @@
                 <a:ea typeface="Poppins" pitchFamily="34" charset="-122"/>
                 <a:cs typeface="Poppins" pitchFamily="34" charset="-120"/>
               </a:rPr>
-              <a:t>43%</a:t>
+              <a:t>54%</a:t>
             </a:r>
             <a:pPr algn="r" indent="0" marL="0">
               <a:buNone/>
@@ -29081,7 +29081,7 @@
                 <a:ea typeface="Poppins" pitchFamily="34" charset="-122"/>
                 <a:cs typeface="Poppins" pitchFamily="34" charset="-120"/>
               </a:rPr>
-              <a:t>$3k</a:t>
+              <a:t>$4k</a:t>
             </a:r>
             <a:endParaRPr lang="en-US" sz="850" dirty="0"/>
           </a:p>
@@ -29118,7 +29118,7 @@
         <p:spPr>
           <a:xfrm>
             <a:off x="3465576" y="3609594"/>
-            <a:ext cx="490118" cy="100584"/>
+            <a:ext cx="592531" cy="100584"/>
           </a:xfrm>
           <a:prstGeom prst="roundRect">
             <a:avLst>
@@ -29184,7 +29184,7 @@
                 <a:ea typeface="Poppins" pitchFamily="34" charset="-122"/>
                 <a:cs typeface="Poppins" pitchFamily="34" charset="-120"/>
               </a:rPr>
-              <a:t>67%</a:t>
+              <a:t>81%</a:t>
             </a:r>
             <a:endParaRPr lang="en-US" sz="800" dirty="0"/>
           </a:p>
@@ -29541,7 +29541,7 @@
                 <a:ea typeface="Poppins" pitchFamily="34" charset="-122"/>
                 <a:cs typeface="Poppins" pitchFamily="34" charset="-120"/>
               </a:rPr>
-              <a:t>$3k</a:t>
+              <a:t>$2k</a:t>
             </a:r>
             <a:endParaRPr lang="en-US" sz="850" dirty="0"/>
           </a:p>
@@ -29578,7 +29578,7 @@
         <p:spPr>
           <a:xfrm>
             <a:off x="3465576" y="3925062"/>
-            <a:ext cx="365760" cy="100584"/>
+            <a:ext cx="358445" cy="100584"/>
           </a:xfrm>
           <a:prstGeom prst="roundRect">
             <a:avLst>
@@ -29644,7 +29644,7 @@
                 <a:ea typeface="Poppins" pitchFamily="34" charset="-122"/>
                 <a:cs typeface="Poppins" pitchFamily="34" charset="-120"/>
               </a:rPr>
-              <a:t>50%</a:t>
+              <a:t>49%</a:t>
             </a:r>
             <a:endParaRPr lang="en-US" sz="800" dirty="0"/>
           </a:p>
@@ -30001,7 +30001,7 @@
                 <a:ea typeface="Poppins" pitchFamily="34" charset="-122"/>
                 <a:cs typeface="Poppins" pitchFamily="34" charset="-120"/>
               </a:rPr>
-              <a:t>$2k</a:t>
+              <a:t>$4k</a:t>
             </a:r>
             <a:endParaRPr lang="en-US" sz="850" dirty="0"/>
           </a:p>
@@ -30038,7 +30038,7 @@
         <p:spPr>
           <a:xfrm>
             <a:off x="3465576" y="4240530"/>
-            <a:ext cx="197510" cy="100584"/>
+            <a:ext cx="475488" cy="100584"/>
           </a:xfrm>
           <a:prstGeom prst="roundRect">
             <a:avLst>
@@ -30104,7 +30104,7 @@
                 <a:ea typeface="Poppins" pitchFamily="34" charset="-122"/>
                 <a:cs typeface="Poppins" pitchFamily="34" charset="-120"/>
               </a:rPr>
-              <a:t>27%</a:t>
+              <a:t>65%</a:t>
             </a:r>
             <a:endParaRPr lang="en-US" sz="800" dirty="0"/>
           </a:p>
@@ -30461,7 +30461,7 @@
                 <a:ea typeface="Poppins" pitchFamily="34" charset="-122"/>
                 <a:cs typeface="Poppins" pitchFamily="34" charset="-120"/>
               </a:rPr>
-              <a:t>$205</a:t>
+              <a:t>$264</a:t>
             </a:r>
             <a:endParaRPr lang="en-US" sz="850" dirty="0"/>
           </a:p>
@@ -30498,11 +30498,11 @@
         <p:spPr>
           <a:xfrm>
             <a:off x="3465576" y="4555998"/>
-            <a:ext cx="73152" cy="100584"/>
+            <a:ext cx="95098" cy="100584"/>
           </a:xfrm>
           <a:prstGeom prst="roundRect">
             <a:avLst>
-              <a:gd name="adj" fmla="val 62500"/>
+              <a:gd name="adj" fmla="val 48077"/>
             </a:avLst>
           </a:prstGeom>
           <a:solidFill>
@@ -30564,7 +30564,7 @@
                 <a:ea typeface="Poppins" pitchFamily="34" charset="-122"/>
                 <a:cs typeface="Poppins" pitchFamily="34" charset="-120"/>
               </a:rPr>
-              <a:t>10%</a:t>
+              <a:t>13%</a:t>
             </a:r>
             <a:endParaRPr lang="en-US" sz="800" dirty="0"/>
           </a:p>
@@ -31713,7 +31713,7 @@
                 <a:ea typeface="Poppins" pitchFamily="34" charset="-122"/>
                 <a:cs typeface="Poppins" pitchFamily="34" charset="-120"/>
               </a:rPr>
-              <a:t>$12k</a:t>
+              <a:t>$15k</a:t>
             </a:r>
             <a:endParaRPr lang="en-US" sz="850" dirty="0"/>
           </a:p>
@@ -32105,7 +32105,7 @@
             <a:r>
               <a:rPr lang="en-US" sz="900" b="1" dirty="0">
                 <a:solidFill>
-                  <a:srgbClr val="B4552D"/>
+                  <a:srgbClr val="2C8394"/>
                 </a:solidFill>
                 <a:latin typeface="Poppins" pitchFamily="34" charset="0"/>
                 <a:ea typeface="Poppins" pitchFamily="34" charset="-122"/>
@@ -32125,7 +32125,7 @@
                 <a:ea typeface="Poppins" pitchFamily="34" charset="-122"/>
                 <a:cs typeface="Poppins" pitchFamily="34" charset="-120"/>
               </a:rPr>
-              <a:t>New MRR did not move at all this week. </a:t>
+              <a:t>New MRR added $1,659 in the week. </a:t>
             </a:r>
             <a:pPr indent="0" marL="0">
               <a:spcAft>
@@ -32142,7 +32142,7 @@
                 <a:ea typeface="Poppins" pitchFamily="34" charset="-122"/>
                 <a:cs typeface="Poppins" pitchFamily="34" charset="-120"/>
               </a:rPr>
-              <a:t>The register carries no new-MRR rows dated 21–27 Sep 2026, so Q3 stays at $12,129 — 43% of the $28k OKR2 against a 97% pace mark. HubSpot shows $3,440 of new software MRR won in the week across 34 deals — none of it invoiced yet. The register's next dated entries are 28 and 30 Sep.</a:t>
+              <a:t>Q3 stands at $15,126 — 54% of the $28k OKR2 against a 97% pace mark. BRG Granville Tavern $899, Hallmark Coyote's Roadhouse $701, CSHG Walker Baker Evans $59.</a:t>
             </a:r>
             <a:endParaRPr lang="en-US" sz="900" dirty="0"/>
           </a:p>
@@ -32190,8 +32190,8 @@
         </p:nvSpPr>
         <p:spPr>
           <a:xfrm>
-            <a:off x="7585862" y="6510528"/>
-            <a:ext cx="4191610" cy="256032"/>
+            <a:off x="7088429" y="6510528"/>
+            <a:ext cx="4689043" cy="256032"/>
           </a:xfrm>
           <a:prstGeom prst="roundRect">
             <a:avLst>
@@ -32212,8 +32212,8 @@
         </p:nvSpPr>
         <p:spPr>
           <a:xfrm>
-            <a:off x="7585862" y="6510528"/>
-            <a:ext cx="4191610" cy="256032"/>
+            <a:off x="7088429" y="6510528"/>
+            <a:ext cx="4689043" cy="256032"/>
           </a:xfrm>
           <a:prstGeom prst="rect">
             <a:avLst/>
@@ -32237,7 +32237,7 @@
                 <a:ea typeface="Poppins" pitchFamily="34" charset="-122"/>
                 <a:cs typeface="Poppins" pitchFamily="34" charset="-120"/>
               </a:rPr>
-              <a:t>Source: Sysnet extract 21–27 Sep + MRR movement register (live)</a:t>
+              <a:t>Source: Sysnet extract 21–27 Sep + MRR movement register (live, 28 Sep)</a:t>
             </a:r>
             <a:endParaRPr lang="en-US" sz="700" dirty="0"/>
           </a:p>
@@ -45388,7 +45388,7 @@
                 <a:ea typeface="Poppins" pitchFamily="34" charset="-122"/>
                 <a:cs typeface="Poppins" pitchFamily="34" charset="-120"/>
               </a:rPr>
-              <a:t>Won = HubSpot closed-won Total Software (outright excluded, annual ÷ 12) by close date. Invoiced = finance register new + expansion by date of invoice. Both live and refreshed weekly — nothing on this slide is frozen.</a:t>
+              <a:t>Won = HubSpot closed-won Total Software (outright excluded, annual ÷ 12) by close date. Invoiced = movement register new + expansion by date of invoice. Both live and refreshed weekly — nothing on this slide is frozen.</a:t>
             </a:r>
             <a:endParaRPr lang="en-US" sz="620" dirty="0"/>
           </a:p>
@@ -45495,7 +45495,7 @@
                 <a:ea typeface="Poppins" pitchFamily="34" charset="-122"/>
                 <a:cs typeface="Poppins" pitchFamily="34" charset="-120"/>
               </a:rPr>
-              <a:t>$481k</a:t>
+              <a:t>$471k</a:t>
             </a:r>
             <a:endParaRPr lang="en-US" sz="2000" dirty="0"/>
           </a:p>
@@ -45534,7 +45534,7 @@
                 <a:ea typeface="Poppins" pitchFamily="34" charset="-122"/>
                 <a:cs typeface="Poppins" pitchFamily="34" charset="-120"/>
               </a:rPr>
-              <a:t>45 of 66 deals won with software MRR in 2026 · $379k of it on 20 companies with no Debtor ID</a:t>
+              <a:t>44 of 66 deals won with software MRR in 2026 · $379k of it on 20 companies with no Debtor ID</a:t>
             </a:r>
             <a:endParaRPr lang="en-US" sz="780" dirty="0"/>
           </a:p>
@@ -45641,7 +45641,7 @@
                 <a:ea typeface="Poppins" pitchFamily="34" charset="-122"/>
                 <a:cs typeface="Poppins" pitchFamily="34" charset="-120"/>
               </a:rPr>
-              <a:t>$639k</a:t>
+              <a:t>$1.19M</a:t>
             </a:r>
             <a:endParaRPr lang="en-US" sz="2000" dirty="0"/>
           </a:p>
@@ -45680,7 +45680,7 @@
                 <a:ea typeface="Poppins" pitchFamily="34" charset="-122"/>
                 <a:cs typeface="Poppins" pitchFamily="34" charset="-120"/>
               </a:rPr>
-              <a:t>171 logos · HubSpot company churn register · live</a:t>
+              <a:t>258 logos · MRR movement register, live · HubSpot churn object still ramping</a:t>
             </a:r>
             <a:endParaRPr lang="en-US" sz="780" dirty="0"/>
           </a:p>
@@ -45781,13 +45781,13 @@
             <a:r>
               <a:rPr lang="en-US" sz="2000" b="1" dirty="0">
                 <a:solidFill>
-                  <a:srgbClr val="C88A2E"/>
-                </a:solidFill>
-                <a:latin typeface="Poppins" pitchFamily="34" charset="0"/>
-                <a:ea typeface="Poppins" pitchFamily="34" charset="-122"/>
-                <a:cs typeface="Poppins" pitchFamily="34" charset="-120"/>
-              </a:rPr>
-              <a:t>+$12.1k</a:t>
+                  <a:srgbClr val="B4552D"/>
+                </a:solidFill>
+                <a:latin typeface="Poppins" pitchFamily="34" charset="0"/>
+                <a:ea typeface="Poppins" pitchFamily="34" charset="-122"/>
+                <a:cs typeface="Poppins" pitchFamily="34" charset="-120"/>
+              </a:rPr>
+              <a:t>-$4.2k</a:t>
             </a:r>
             <a:endParaRPr lang="en-US" sz="2000" dirty="0"/>
           </a:p>
@@ -45826,7 +45826,7 @@
                 <a:ea typeface="Poppins" pitchFamily="34" charset="-122"/>
                 <a:cs typeface="Poppins" pitchFamily="34" charset="-120"/>
               </a:rPr>
-              <a:t>won $12.1k less churn recorded $0 — not yet a true net</a:t>
+              <a:t>new $15.1k − churn $12.7k − contraction $3.7k − credits $2.9k</a:t>
             </a:r>
             <a:endParaRPr lang="en-US" sz="780" dirty="0"/>
           </a:p>
@@ -47340,7 +47340,7 @@
                 <a:ea typeface="Poppins" pitchFamily="34" charset="-122"/>
                 <a:cs typeface="Poppins" pitchFamily="34" charset="-120"/>
               </a:rPr>
-              <a:t>Coyote's Roadhouse (Hallmark)</a:t>
+              <a:t>Caves House Hotel</a:t>
             </a:r>
             <a:endParaRPr lang="en-US" sz="750" dirty="0"/>
           </a:p>
@@ -47379,7 +47379,7 @@
                 <a:ea typeface="Poppins" pitchFamily="34" charset="-122"/>
                 <a:cs typeface="Poppins" pitchFamily="34" charset="-120"/>
               </a:rPr>
-              <a:t>$9k</a:t>
+              <a:t>$8k</a:t>
             </a:r>
             <a:endParaRPr lang="en-US" sz="750" dirty="0"/>
           </a:p>
@@ -47418,7 +47418,7 @@
                 <a:ea typeface="Poppins" pitchFamily="34" charset="-122"/>
                 <a:cs typeface="Poppins" pitchFamily="34" charset="-120"/>
               </a:rPr>
-              <a:t>$789</a:t>
+              <a:t>$669</a:t>
             </a:r>
             <a:endParaRPr lang="en-US" sz="750" dirty="0"/>
           </a:p>
@@ -47457,7 +47457,7 @@
                 <a:ea typeface="Poppins" pitchFamily="34" charset="-122"/>
                 <a:cs typeface="Poppins" pitchFamily="34" charset="-120"/>
               </a:rPr>
-              <a:t>Sep</a:t>
+              <a:t>Aug</a:t>
             </a:r>
             <a:endParaRPr lang="en-US" sz="750" dirty="0"/>
           </a:p>
@@ -47563,7 +47563,7 @@
                 <a:ea typeface="Poppins" pitchFamily="34" charset="-122"/>
                 <a:cs typeface="Poppins" pitchFamily="34" charset="-120"/>
               </a:rPr>
-              <a:t>Caves House Hotel</a:t>
+              <a:t>TH - Cote Basque</a:t>
             </a:r>
             <a:endParaRPr lang="en-US" sz="750" dirty="0"/>
           </a:p>
@@ -47641,7 +47641,7 @@
                 <a:ea typeface="Poppins" pitchFamily="34" charset="-122"/>
                 <a:cs typeface="Poppins" pitchFamily="34" charset="-120"/>
               </a:rPr>
-              <a:t>$669</a:t>
+              <a:t>$641</a:t>
             </a:r>
             <a:endParaRPr lang="en-US" sz="750" dirty="0"/>
           </a:p>
@@ -47680,7 +47680,7 @@
                 <a:ea typeface="Poppins" pitchFamily="34" charset="-122"/>
                 <a:cs typeface="Poppins" pitchFamily="34" charset="-120"/>
               </a:rPr>
-              <a:t>Aug</a:t>
+              <a:t>Sep</a:t>
             </a:r>
             <a:endParaRPr lang="en-US" sz="750" dirty="0"/>
           </a:p>
@@ -47710,6 +47710,17 @@
             <a:pPr algn="r" indent="0" marL="0">
               <a:buNone/>
             </a:pPr>
+            <a:r>
+              <a:rPr lang="en-US" sz="750" b="1" dirty="0">
+                <a:solidFill>
+                  <a:srgbClr val="C88A2E"/>
+                </a:solidFill>
+                <a:latin typeface="Poppins" pitchFamily="34" charset="0"/>
+                <a:ea typeface="Poppins" pitchFamily="34" charset="-122"/>
+                <a:cs typeface="Poppins" pitchFamily="34" charset="-120"/>
+              </a:rPr>
+              <a:t>◆</a:t>
+            </a:r>
             <a:endParaRPr lang="en-US" sz="750" dirty="0"/>
           </a:p>
         </p:txBody>
@@ -47786,7 +47797,7 @@
                 <a:ea typeface="Poppins" pitchFamily="34" charset="-122"/>
                 <a:cs typeface="Poppins" pitchFamily="34" charset="-120"/>
               </a:rPr>
-              <a:t>TH - Cote Basque</a:t>
+              <a:t>New Whyalla Hotel</a:t>
             </a:r>
             <a:endParaRPr lang="en-US" sz="750" dirty="0"/>
           </a:p>
@@ -47825,7 +47836,7 @@
                 <a:ea typeface="Poppins" pitchFamily="34" charset="-122"/>
                 <a:cs typeface="Poppins" pitchFamily="34" charset="-120"/>
               </a:rPr>
-              <a:t>$8k</a:t>
+              <a:t>$7k</a:t>
             </a:r>
             <a:endParaRPr lang="en-US" sz="750" dirty="0"/>
           </a:p>
@@ -47864,7 +47875,7 @@
                 <a:ea typeface="Poppins" pitchFamily="34" charset="-122"/>
                 <a:cs typeface="Poppins" pitchFamily="34" charset="-120"/>
               </a:rPr>
-              <a:t>$641</a:t>
+              <a:t>$606</a:t>
             </a:r>
             <a:endParaRPr lang="en-US" sz="750" dirty="0"/>
           </a:p>
@@ -47903,7 +47914,7 @@
                 <a:ea typeface="Poppins" pitchFamily="34" charset="-122"/>
                 <a:cs typeface="Poppins" pitchFamily="34" charset="-120"/>
               </a:rPr>
-              <a:t>Sep</a:t>
+              <a:t>Apr</a:t>
             </a:r>
             <a:endParaRPr lang="en-US" sz="750" dirty="0"/>
           </a:p>
@@ -47933,17 +47944,6 @@
             <a:pPr algn="r" indent="0" marL="0">
               <a:buNone/>
             </a:pPr>
-            <a:r>
-              <a:rPr lang="en-US" sz="750" b="1" dirty="0">
-                <a:solidFill>
-                  <a:srgbClr val="C88A2E"/>
-                </a:solidFill>
-                <a:latin typeface="Poppins" pitchFamily="34" charset="0"/>
-                <a:ea typeface="Poppins" pitchFamily="34" charset="-122"/>
-                <a:cs typeface="Poppins" pitchFamily="34" charset="-120"/>
-              </a:rPr>
-              <a:t>◆</a:t>
-            </a:r>
             <a:endParaRPr lang="en-US" sz="750" dirty="0"/>
           </a:p>
         </p:txBody>
@@ -48020,7 +48020,7 @@
                 <a:ea typeface="Poppins" pitchFamily="34" charset="-122"/>
                 <a:cs typeface="Poppins" pitchFamily="34" charset="-120"/>
               </a:rPr>
-              <a:t>New Whyalla Hotel</a:t>
+              <a:t>Royal Family Hotel</a:t>
             </a:r>
             <a:endParaRPr lang="en-US" sz="750" dirty="0"/>
           </a:p>
@@ -48098,7 +48098,7 @@
                 <a:ea typeface="Poppins" pitchFamily="34" charset="-122"/>
                 <a:cs typeface="Poppins" pitchFamily="34" charset="-120"/>
               </a:rPr>
-              <a:t>$606</a:t>
+              <a:t>$597</a:t>
             </a:r>
             <a:endParaRPr lang="en-US" sz="750" dirty="0"/>
           </a:p>
@@ -48137,7 +48137,7 @@
                 <a:ea typeface="Poppins" pitchFamily="34" charset="-122"/>
                 <a:cs typeface="Poppins" pitchFamily="34" charset="-120"/>
               </a:rPr>
-              <a:t>Apr</a:t>
+              <a:t>Sep</a:t>
             </a:r>
             <a:endParaRPr lang="en-US" sz="750" dirty="0"/>
           </a:p>
@@ -48243,7 +48243,7 @@
                 <a:ea typeface="Poppins" pitchFamily="34" charset="-122"/>
                 <a:cs typeface="Poppins" pitchFamily="34" charset="-120"/>
               </a:rPr>
-              <a:t>Royal Family Hotel</a:t>
+              <a:t>Solotel - Kings Cross Hotel</a:t>
             </a:r>
             <a:endParaRPr lang="en-US" sz="750" dirty="0"/>
           </a:p>
@@ -48321,7 +48321,7 @@
                 <a:ea typeface="Poppins" pitchFamily="34" charset="-122"/>
                 <a:cs typeface="Poppins" pitchFamily="34" charset="-120"/>
               </a:rPr>
-              <a:t>$597</a:t>
+              <a:t>$564</a:t>
             </a:r>
             <a:endParaRPr lang="en-US" sz="750" dirty="0"/>
           </a:p>
@@ -48360,7 +48360,7 @@
                 <a:ea typeface="Poppins" pitchFamily="34" charset="-122"/>
                 <a:cs typeface="Poppins" pitchFamily="34" charset="-120"/>
               </a:rPr>
-              <a:t>Sep</a:t>
+              <a:t>Jun</a:t>
             </a:r>
             <a:endParaRPr lang="en-US" sz="750" dirty="0"/>
           </a:p>
@@ -48509,7 +48509,7 @@
                 <a:ea typeface="Poppins" pitchFamily="34" charset="-122"/>
                 <a:cs typeface="Poppins" pitchFamily="34" charset="-120"/>
               </a:rPr>
-              <a:t>Won and invoiced now both read live. </a:t>
+              <a:t>Invoicing has overtaken wins this quarter. </a:t>
             </a:r>
             <a:pPr indent="0" marL="0">
               <a:spcAft>
@@ -48526,7 +48526,7 @@
                 <a:ea typeface="Poppins" pitchFamily="34" charset="-122"/>
                 <a:cs typeface="Poppins" pitchFamily="34" charset="-120"/>
               </a:rPr>
-              <a:t>Won is HubSpot Total Software by close date, invoiced is the finance register by invoice date. Q3 ties out: $12,061 won against $12,129 invoiced, a 0.6% gap. March and June are the two months where wins ran far ahead of billing.</a:t>
+              <a:t>Q3 invoiced $15,126 against $12,061 won — the register caught up on earlier wins, and September alone billed $6,567. Nine months of both series now read live.</a:t>
             </a:r>
             <a:endParaRPr lang="en-US" sz="850" dirty="0"/>
           </a:p>
@@ -48557,7 +48557,7 @@
                 <a:ea typeface="Poppins" pitchFamily="34" charset="-122"/>
                 <a:cs typeface="Poppins" pitchFamily="34" charset="-120"/>
               </a:rPr>
-              <a:t>$481k of ARR is won and not yet invoiced. </a:t>
+              <a:t>Churn is the whole story: $1.19M of ARR across 258 logos since Jan 2025. </a:t>
             </a:r>
             <a:pPr indent="0" marL="0">
               <a:spcAft>
@@ -48574,7 +48574,7 @@
                 <a:ea typeface="Poppins" pitchFamily="34" charset="-122"/>
                 <a:cs typeface="Poppins" pitchFamily="34" charset="-120"/>
               </a:rPr>
-              <a:t>45 of the 66 deals that carried software MRR in 2026. Oscars Group alone is $155k — 32% of it — and the top three are 63%.</a:t>
+              <a:t>Q3 took $12.7k of MRR out against $15.1k in, plus $3.7k of contraction on accounts that stayed and $2.9k of credits. Net Q3 movement is −$4.2k.</a:t>
             </a:r>
             <a:endParaRPr lang="en-US" sz="850" dirty="0"/>
           </a:p>
@@ -48605,7 +48605,7 @@
                 <a:ea typeface="Poppins" pitchFamily="34" charset="-122"/>
                 <a:cs typeface="Poppins" pitchFamily="34" charset="-120"/>
               </a:rPr>
-              <a:t>Debtor mapping is the blocker on $379k of that. </a:t>
+              <a:t>$471k of ARR is won and not yet invoiced. </a:t>
             </a:r>
             <a:pPr indent="0" marL="0">
               <a:spcAft>
@@ -48622,7 +48622,7 @@
                 <a:ea typeface="Poppins" pitchFamily="34" charset="-122"/>
                 <a:cs typeface="Poppins" pitchFamily="34" charset="-120"/>
               </a:rPr>
-              <a:t>20 of the 45 companies carry no Debtor ID, so the match cannot be confirmed either way; only $102k is confirmed unbilled. Mapping those 20 is the single highest-value data fix on this slide.</a:t>
+              <a:t>44 of the 66 deals carrying software MRR in 2026. Oscars Group is $155k of it and the top three are 64%.</a:t>
             </a:r>
             <a:endParaRPr lang="en-US" sz="850" dirty="0"/>
           </a:p>
@@ -48653,7 +48653,7 @@
                 <a:ea typeface="Poppins" pitchFamily="34" charset="-122"/>
                 <a:cs typeface="Poppins" pitchFamily="34" charset="-120"/>
               </a:rPr>
-              <a:t>Churn recording stopped in February. </a:t>
+              <a:t>Debtor mapping blocks $379k of that. </a:t>
             </a:r>
             <a:pPr indent="0" marL="0">
               <a:spcAft>
@@ -48670,7 +48670,7 @@
                 <a:ea typeface="Poppins" pitchFamily="34" charset="-122"/>
                 <a:cs typeface="Poppins" pitchFamily="34" charset="-120"/>
               </a:rPr>
-              <a:t>The HubSpot churn register is real through 2025 — 171 logos and $53.2k of MRR since Jan 2025, $639k ARR — but 2026 holds 15 logos and nothing since Feb carries a churned MRR value. Until that resumes, net movement is not a true net.</a:t>
+              <a:t>20 of the 44 companies carry no Debtor ID, so the invoice match cannot be confirmed either way; $92k is confirmed unbilled. Mapping those 20 is the highest-value data fix on this slide.</a:t>
             </a:r>
             <a:endParaRPr lang="en-US" sz="850" dirty="0"/>
           </a:p>
@@ -48740,8 +48740,8 @@
         </p:nvSpPr>
         <p:spPr>
           <a:xfrm>
-            <a:off x="6777533" y="6510528"/>
-            <a:ext cx="4999939" cy="256032"/>
+            <a:off x="6653174" y="6510528"/>
+            <a:ext cx="5124298" cy="256032"/>
           </a:xfrm>
           <a:prstGeom prst="roundRect">
             <a:avLst>
@@ -48762,8 +48762,8 @@
         </p:nvSpPr>
         <p:spPr>
           <a:xfrm>
-            <a:off x="6777533" y="6510528"/>
-            <a:ext cx="4999939" cy="256032"/>
+            <a:off x="6653174" y="6510528"/>
+            <a:ext cx="5124298" cy="256032"/>
           </a:xfrm>
           <a:prstGeom prst="rect">
             <a:avLst/>
@@ -48787,7 +48787,7 @@
                 <a:ea typeface="Poppins" pitchFamily="34" charset="-122"/>
                 <a:cs typeface="Poppins" pitchFamily="34" charset="-120"/>
               </a:rPr>
-              <a:t>Source: HubSpot deals + company churn register + finance register — all live</a:t>
+              <a:t>Source: HubSpot deals + MRR movement register (live, 28 Sep) — all series live</a:t>
             </a:r>
             <a:endParaRPr lang="en-US" sz="700" dirty="0"/>
           </a:p>

--- a/exec-deck/output/H&L Weekly Update - WC 21 Sep 2026.pptx
+++ b/exec-deck/output/H&L Weekly Update - WC 21 Sep 2026.pptx
@@ -45495,7 +45495,7 @@
                 <a:ea typeface="Poppins" pitchFamily="34" charset="-122"/>
                 <a:cs typeface="Poppins" pitchFamily="34" charset="-120"/>
               </a:rPr>
-              <a:t>$471k</a:t>
+              <a:t>$236k</a:t>
             </a:r>
             <a:endParaRPr lang="en-US" sz="2000" dirty="0"/>
           </a:p>
@@ -45534,7 +45534,7 @@
                 <a:ea typeface="Poppins" pitchFamily="34" charset="-122"/>
                 <a:cs typeface="Poppins" pitchFamily="34" charset="-120"/>
               </a:rPr>
-              <a:t>44 of 66 deals won with software MRR in 2026 · $379k of it on 20 companies with no Debtor ID</a:t>
+              <a:t>21 of the 66 deals won with software MRR in 2026 have no row on the register · Oscars Group is $155k of it</a:t>
             </a:r>
             <a:endParaRPr lang="en-US" sz="780" dirty="0"/>
           </a:p>
@@ -46404,7 +46404,7 @@
                 <a:ea typeface="Poppins" pitchFamily="34" charset="-122"/>
                 <a:cs typeface="Poppins" pitchFamily="34" charset="-120"/>
               </a:rPr>
-              <a:t>Hotel Grand Chancellor — Adelaide</a:t>
+              <a:t>New Whyalla Hotel</a:t>
             </a:r>
             <a:endParaRPr lang="en-US" sz="750" dirty="0"/>
           </a:p>
@@ -46443,7 +46443,7 @@
                 <a:ea typeface="Poppins" pitchFamily="34" charset="-122"/>
                 <a:cs typeface="Poppins" pitchFamily="34" charset="-120"/>
               </a:rPr>
-              <a:t>$95k</a:t>
+              <a:t>$7k</a:t>
             </a:r>
             <a:endParaRPr lang="en-US" sz="750" dirty="0"/>
           </a:p>
@@ -46482,7 +46482,7 @@
                 <a:ea typeface="Poppins" pitchFamily="34" charset="-122"/>
                 <a:cs typeface="Poppins" pitchFamily="34" charset="-120"/>
               </a:rPr>
-              <a:t>$7,900</a:t>
+              <a:t>$606</a:t>
             </a:r>
             <a:endParaRPr lang="en-US" sz="750" dirty="0"/>
           </a:p>
@@ -46521,7 +46521,7 @@
                 <a:ea typeface="Poppins" pitchFamily="34" charset="-122"/>
                 <a:cs typeface="Poppins" pitchFamily="34" charset="-120"/>
               </a:rPr>
-              <a:t>Jun</a:t>
+              <a:t>Apr</a:t>
             </a:r>
             <a:endParaRPr lang="en-US" sz="750" dirty="0"/>
           </a:p>
@@ -46551,17 +46551,6 @@
             <a:pPr algn="r" indent="0" marL="0">
               <a:buNone/>
             </a:pPr>
-            <a:r>
-              <a:rPr lang="en-US" sz="750" b="1" dirty="0">
-                <a:solidFill>
-                  <a:srgbClr val="C88A2E"/>
-                </a:solidFill>
-                <a:latin typeface="Poppins" pitchFamily="34" charset="0"/>
-                <a:ea typeface="Poppins" pitchFamily="34" charset="-122"/>
-                <a:cs typeface="Poppins" pitchFamily="34" charset="-120"/>
-              </a:rPr>
-              <a:t>◆</a:t>
-            </a:r>
             <a:endParaRPr lang="en-US" sz="750" dirty="0"/>
           </a:p>
         </p:txBody>
@@ -46638,7 +46627,7 @@
                 <a:ea typeface="Poppins" pitchFamily="34" charset="-122"/>
                 <a:cs typeface="Poppins" pitchFamily="34" charset="-120"/>
               </a:rPr>
-              <a:t>AVC - White Cockatoo Hotel</a:t>
+              <a:t>Royal Family Hotel</a:t>
             </a:r>
             <a:endParaRPr lang="en-US" sz="750" dirty="0"/>
           </a:p>
@@ -46677,7 +46666,7 @@
                 <a:ea typeface="Poppins" pitchFamily="34" charset="-122"/>
                 <a:cs typeface="Poppins" pitchFamily="34" charset="-120"/>
               </a:rPr>
-              <a:t>$52k</a:t>
+              <a:t>$7k</a:t>
             </a:r>
             <a:endParaRPr lang="en-US" sz="750" dirty="0"/>
           </a:p>
@@ -46716,7 +46705,7 @@
                 <a:ea typeface="Poppins" pitchFamily="34" charset="-122"/>
                 <a:cs typeface="Poppins" pitchFamily="34" charset="-120"/>
               </a:rPr>
-              <a:t>$4,345</a:t>
+              <a:t>$597</a:t>
             </a:r>
             <a:endParaRPr lang="en-US" sz="750" dirty="0"/>
           </a:p>
@@ -46755,7 +46744,7 @@
                 <a:ea typeface="Poppins" pitchFamily="34" charset="-122"/>
                 <a:cs typeface="Poppins" pitchFamily="34" charset="-120"/>
               </a:rPr>
-              <a:t>May</a:t>
+              <a:t>Sep</a:t>
             </a:r>
             <a:endParaRPr lang="en-US" sz="750" dirty="0"/>
           </a:p>
@@ -46785,17 +46774,6 @@
             <a:pPr algn="r" indent="0" marL="0">
               <a:buNone/>
             </a:pPr>
-            <a:r>
-              <a:rPr lang="en-US" sz="750" b="1" dirty="0">
-                <a:solidFill>
-                  <a:srgbClr val="C88A2E"/>
-                </a:solidFill>
-                <a:latin typeface="Poppins" pitchFamily="34" charset="0"/>
-                <a:ea typeface="Poppins" pitchFamily="34" charset="-122"/>
-                <a:cs typeface="Poppins" pitchFamily="34" charset="-120"/>
-              </a:rPr>
-              <a:t>◆</a:t>
-            </a:r>
             <a:endParaRPr lang="en-US" sz="750" dirty="0"/>
           </a:p>
         </p:txBody>
@@ -46872,7 +46850,7 @@
                 <a:ea typeface="Poppins" pitchFamily="34" charset="-122"/>
                 <a:cs typeface="Poppins" pitchFamily="34" charset="-120"/>
               </a:rPr>
-              <a:t>Terminus Hotel - Strathalbyn</a:t>
+              <a:t>Gastevski - Australind Liquor Store</a:t>
             </a:r>
             <a:endParaRPr lang="en-US" sz="750" dirty="0"/>
           </a:p>
@@ -46911,7 +46889,7 @@
                 <a:ea typeface="Poppins" pitchFamily="34" charset="-122"/>
                 <a:cs typeface="Poppins" pitchFamily="34" charset="-120"/>
               </a:rPr>
-              <a:t>$10k</a:t>
+              <a:t>$6k</a:t>
             </a:r>
             <a:endParaRPr lang="en-US" sz="750" dirty="0"/>
           </a:p>
@@ -46950,7 +46928,7 @@
                 <a:ea typeface="Poppins" pitchFamily="34" charset="-122"/>
                 <a:cs typeface="Poppins" pitchFamily="34" charset="-120"/>
               </a:rPr>
-              <a:t>$850</a:t>
+              <a:t>$524</a:t>
             </a:r>
             <a:endParaRPr lang="en-US" sz="750" dirty="0"/>
           </a:p>
@@ -46989,7 +46967,7 @@
                 <a:ea typeface="Poppins" pitchFamily="34" charset="-122"/>
                 <a:cs typeface="Poppins" pitchFamily="34" charset="-120"/>
               </a:rPr>
-              <a:t>Apr</a:t>
+              <a:t>Sep</a:t>
             </a:r>
             <a:endParaRPr lang="en-US" sz="750" dirty="0"/>
           </a:p>
@@ -47019,17 +46997,6 @@
             <a:pPr algn="r" indent="0" marL="0">
               <a:buNone/>
             </a:pPr>
-            <a:r>
-              <a:rPr lang="en-US" sz="750" b="1" dirty="0">
-                <a:solidFill>
-                  <a:srgbClr val="C88A2E"/>
-                </a:solidFill>
-                <a:latin typeface="Poppins" pitchFamily="34" charset="0"/>
-                <a:ea typeface="Poppins" pitchFamily="34" charset="-122"/>
-                <a:cs typeface="Poppins" pitchFamily="34" charset="-120"/>
-              </a:rPr>
-              <a:t>◆</a:t>
-            </a:r>
             <a:endParaRPr lang="en-US" sz="750" dirty="0"/>
           </a:p>
         </p:txBody>
@@ -47106,7 +47073,7 @@
                 <a:ea typeface="Poppins" pitchFamily="34" charset="-122"/>
                 <a:cs typeface="Poppins" pitchFamily="34" charset="-120"/>
               </a:rPr>
-              <a:t>BRG - Grand Hotel Millicent</a:t>
+              <a:t>The Berrigan</a:t>
             </a:r>
             <a:endParaRPr lang="en-US" sz="750" dirty="0"/>
           </a:p>
@@ -47145,7 +47112,7 @@
                 <a:ea typeface="Poppins" pitchFamily="34" charset="-122"/>
                 <a:cs typeface="Poppins" pitchFamily="34" charset="-120"/>
               </a:rPr>
-              <a:t>$10k</a:t>
+              <a:t>$6k</a:t>
             </a:r>
             <a:endParaRPr lang="en-US" sz="750" dirty="0"/>
           </a:p>
@@ -47184,7 +47151,7 @@
                 <a:ea typeface="Poppins" pitchFamily="34" charset="-122"/>
                 <a:cs typeface="Poppins" pitchFamily="34" charset="-120"/>
               </a:rPr>
-              <a:t>$795</a:t>
+              <a:t>$475</a:t>
             </a:r>
             <a:endParaRPr lang="en-US" sz="750" dirty="0"/>
           </a:p>
@@ -47223,7 +47190,7 @@
                 <a:ea typeface="Poppins" pitchFamily="34" charset="-122"/>
                 <a:cs typeface="Poppins" pitchFamily="34" charset="-120"/>
               </a:rPr>
-              <a:t>Aug</a:t>
+              <a:t>Mar</a:t>
             </a:r>
             <a:endParaRPr lang="en-US" sz="750" dirty="0"/>
           </a:p>
@@ -47253,17 +47220,6 @@
             <a:pPr algn="r" indent="0" marL="0">
               <a:buNone/>
             </a:pPr>
-            <a:r>
-              <a:rPr lang="en-US" sz="750" b="1" dirty="0">
-                <a:solidFill>
-                  <a:srgbClr val="C88A2E"/>
-                </a:solidFill>
-                <a:latin typeface="Poppins" pitchFamily="34" charset="0"/>
-                <a:ea typeface="Poppins" pitchFamily="34" charset="-122"/>
-                <a:cs typeface="Poppins" pitchFamily="34" charset="-120"/>
-              </a:rPr>
-              <a:t>◆</a:t>
-            </a:r>
             <a:endParaRPr lang="en-US" sz="750" dirty="0"/>
           </a:p>
         </p:txBody>
@@ -47340,7 +47296,7 @@
                 <a:ea typeface="Poppins" pitchFamily="34" charset="-122"/>
                 <a:cs typeface="Poppins" pitchFamily="34" charset="-120"/>
               </a:rPr>
-              <a:t>Caves House Hotel</a:t>
+              <a:t>Champion Lakes Tavern WA</a:t>
             </a:r>
             <a:endParaRPr lang="en-US" sz="750" dirty="0"/>
           </a:p>
@@ -47379,7 +47335,7 @@
                 <a:ea typeface="Poppins" pitchFamily="34" charset="-122"/>
                 <a:cs typeface="Poppins" pitchFamily="34" charset="-120"/>
               </a:rPr>
-              <a:t>$8k</a:t>
+              <a:t>$5k</a:t>
             </a:r>
             <a:endParaRPr lang="en-US" sz="750" dirty="0"/>
           </a:p>
@@ -47418,7 +47374,7 @@
                 <a:ea typeface="Poppins" pitchFamily="34" charset="-122"/>
                 <a:cs typeface="Poppins" pitchFamily="34" charset="-120"/>
               </a:rPr>
-              <a:t>$669</a:t>
+              <a:t>$435</a:t>
             </a:r>
             <a:endParaRPr lang="en-US" sz="750" dirty="0"/>
           </a:p>
@@ -47457,7 +47413,7 @@
                 <a:ea typeface="Poppins" pitchFamily="34" charset="-122"/>
                 <a:cs typeface="Poppins" pitchFamily="34" charset="-120"/>
               </a:rPr>
-              <a:t>Aug</a:t>
+              <a:t>Jun</a:t>
             </a:r>
             <a:endParaRPr lang="en-US" sz="750" dirty="0"/>
           </a:p>
@@ -47563,7 +47519,7 @@
                 <a:ea typeface="Poppins" pitchFamily="34" charset="-122"/>
                 <a:cs typeface="Poppins" pitchFamily="34" charset="-120"/>
               </a:rPr>
-              <a:t>TH - Cote Basque</a:t>
+              <a:t>Commercial Hotel - Morgan</a:t>
             </a:r>
             <a:endParaRPr lang="en-US" sz="750" dirty="0"/>
           </a:p>
@@ -47602,7 +47558,7 @@
                 <a:ea typeface="Poppins" pitchFamily="34" charset="-122"/>
                 <a:cs typeface="Poppins" pitchFamily="34" charset="-120"/>
               </a:rPr>
-              <a:t>$8k</a:t>
+              <a:t>$5k</a:t>
             </a:r>
             <a:endParaRPr lang="en-US" sz="750" dirty="0"/>
           </a:p>
@@ -47641,7 +47597,7 @@
                 <a:ea typeface="Poppins" pitchFamily="34" charset="-122"/>
                 <a:cs typeface="Poppins" pitchFamily="34" charset="-120"/>
               </a:rPr>
-              <a:t>$641</a:t>
+              <a:t>$432</a:t>
             </a:r>
             <a:endParaRPr lang="en-US" sz="750" dirty="0"/>
           </a:p>
@@ -47680,7 +47636,7 @@
                 <a:ea typeface="Poppins" pitchFamily="34" charset="-122"/>
                 <a:cs typeface="Poppins" pitchFamily="34" charset="-120"/>
               </a:rPr>
-              <a:t>Sep</a:t>
+              <a:t>Feb</a:t>
             </a:r>
             <a:endParaRPr lang="en-US" sz="750" dirty="0"/>
           </a:p>
@@ -47710,17 +47666,6 @@
             <a:pPr algn="r" indent="0" marL="0">
               <a:buNone/>
             </a:pPr>
-            <a:r>
-              <a:rPr lang="en-US" sz="750" b="1" dirty="0">
-                <a:solidFill>
-                  <a:srgbClr val="C88A2E"/>
-                </a:solidFill>
-                <a:latin typeface="Poppins" pitchFamily="34" charset="0"/>
-                <a:ea typeface="Poppins" pitchFamily="34" charset="-122"/>
-                <a:cs typeface="Poppins" pitchFamily="34" charset="-120"/>
-              </a:rPr>
-              <a:t>◆</a:t>
-            </a:r>
             <a:endParaRPr lang="en-US" sz="750" dirty="0"/>
           </a:p>
         </p:txBody>
@@ -47797,7 +47742,7 @@
                 <a:ea typeface="Poppins" pitchFamily="34" charset="-122"/>
                 <a:cs typeface="Poppins" pitchFamily="34" charset="-120"/>
               </a:rPr>
-              <a:t>New Whyalla Hotel</a:t>
+              <a:t>Hotel Augusta</a:t>
             </a:r>
             <a:endParaRPr lang="en-US" sz="750" dirty="0"/>
           </a:p>
@@ -47836,7 +47781,7 @@
                 <a:ea typeface="Poppins" pitchFamily="34" charset="-122"/>
                 <a:cs typeface="Poppins" pitchFamily="34" charset="-120"/>
               </a:rPr>
-              <a:t>$7k</a:t>
+              <a:t>$5k</a:t>
             </a:r>
             <a:endParaRPr lang="en-US" sz="750" dirty="0"/>
           </a:p>
@@ -47875,7 +47820,7 @@
                 <a:ea typeface="Poppins" pitchFamily="34" charset="-122"/>
                 <a:cs typeface="Poppins" pitchFamily="34" charset="-120"/>
               </a:rPr>
-              <a:t>$606</a:t>
+              <a:t>$410</a:t>
             </a:r>
             <a:endParaRPr lang="en-US" sz="750" dirty="0"/>
           </a:p>
@@ -47914,7 +47859,7 @@
                 <a:ea typeface="Poppins" pitchFamily="34" charset="-122"/>
                 <a:cs typeface="Poppins" pitchFamily="34" charset="-120"/>
               </a:rPr>
-              <a:t>Apr</a:t>
+              <a:t>Jun</a:t>
             </a:r>
             <a:endParaRPr lang="en-US" sz="750" dirty="0"/>
           </a:p>
@@ -48020,7 +47965,7 @@
                 <a:ea typeface="Poppins" pitchFamily="34" charset="-122"/>
                 <a:cs typeface="Poppins" pitchFamily="34" charset="-120"/>
               </a:rPr>
-              <a:t>Royal Family Hotel</a:t>
+              <a:t>Argyle Hotel Maclean</a:t>
             </a:r>
             <a:endParaRPr lang="en-US" sz="750" dirty="0"/>
           </a:p>
@@ -48059,7 +48004,7 @@
                 <a:ea typeface="Poppins" pitchFamily="34" charset="-122"/>
                 <a:cs typeface="Poppins" pitchFamily="34" charset="-120"/>
               </a:rPr>
-              <a:t>$7k</a:t>
+              <a:t>$5k</a:t>
             </a:r>
             <a:endParaRPr lang="en-US" sz="750" dirty="0"/>
           </a:p>
@@ -48098,7 +48043,7 @@
                 <a:ea typeface="Poppins" pitchFamily="34" charset="-122"/>
                 <a:cs typeface="Poppins" pitchFamily="34" charset="-120"/>
               </a:rPr>
-              <a:t>$597</a:t>
+              <a:t>$402</a:t>
             </a:r>
             <a:endParaRPr lang="en-US" sz="750" dirty="0"/>
           </a:p>
@@ -48137,7 +48082,7 @@
                 <a:ea typeface="Poppins" pitchFamily="34" charset="-122"/>
                 <a:cs typeface="Poppins" pitchFamily="34" charset="-120"/>
               </a:rPr>
-              <a:t>Sep</a:t>
+              <a:t>Jun</a:t>
             </a:r>
             <a:endParaRPr lang="en-US" sz="750" dirty="0"/>
           </a:p>
@@ -48243,7 +48188,7 @@
                 <a:ea typeface="Poppins" pitchFamily="34" charset="-122"/>
                 <a:cs typeface="Poppins" pitchFamily="34" charset="-120"/>
               </a:rPr>
-              <a:t>Solotel - Kings Cross Hotel</a:t>
+              <a:t>Litchfield Outback Resort</a:t>
             </a:r>
             <a:endParaRPr lang="en-US" sz="750" dirty="0"/>
           </a:p>
@@ -48282,7 +48227,7 @@
                 <a:ea typeface="Poppins" pitchFamily="34" charset="-122"/>
                 <a:cs typeface="Poppins" pitchFamily="34" charset="-120"/>
               </a:rPr>
-              <a:t>$7k</a:t>
+              <a:t>$5k</a:t>
             </a:r>
             <a:endParaRPr lang="en-US" sz="750" dirty="0"/>
           </a:p>
@@ -48321,7 +48266,7 @@
                 <a:ea typeface="Poppins" pitchFamily="34" charset="-122"/>
                 <a:cs typeface="Poppins" pitchFamily="34" charset="-120"/>
               </a:rPr>
-              <a:t>$564</a:t>
+              <a:t>$387</a:t>
             </a:r>
             <a:endParaRPr lang="en-US" sz="750" dirty="0"/>
           </a:p>
@@ -48360,7 +48305,7 @@
                 <a:ea typeface="Poppins" pitchFamily="34" charset="-122"/>
                 <a:cs typeface="Poppins" pitchFamily="34" charset="-120"/>
               </a:rPr>
-              <a:t>Jun</a:t>
+              <a:t>Mar</a:t>
             </a:r>
             <a:endParaRPr lang="en-US" sz="750" dirty="0"/>
           </a:p>
@@ -48526,7 +48471,7 @@
                 <a:ea typeface="Poppins" pitchFamily="34" charset="-122"/>
                 <a:cs typeface="Poppins" pitchFamily="34" charset="-120"/>
               </a:rPr>
-              <a:t>Q3 invoiced $15,126 against $12,061 won — the register caught up on earlier wins, and September alone billed $6,567. Nine months of both series now read live.</a:t>
+              <a:t>Q3 invoiced $15,126 against $12,061 won — the register caught up on earlier wins, and September alone billed $6,567. Nine months of both series read live.</a:t>
             </a:r>
             <a:endParaRPr lang="en-US" sz="850" dirty="0"/>
           </a:p>
@@ -48574,7 +48519,7 @@
                 <a:ea typeface="Poppins" pitchFamily="34" charset="-122"/>
                 <a:cs typeface="Poppins" pitchFamily="34" charset="-120"/>
               </a:rPr>
-              <a:t>Q3 took $12.7k of MRR out against $15.1k in, plus $3.7k of contraction on accounts that stayed and $2.9k of credits. Net Q3 movement is −$4.2k.</a:t>
+              <a:t>Q3 took $12.7k of MRR out against $15.1k in, plus $3.7k of contraction and $2.9k of credits. Net Q3 movement is −$4.2k.</a:t>
             </a:r>
             <a:endParaRPr lang="en-US" sz="850" dirty="0"/>
           </a:p>
@@ -48605,7 +48550,7 @@
                 <a:ea typeface="Poppins" pitchFamily="34" charset="-122"/>
                 <a:cs typeface="Poppins" pitchFamily="34" charset="-120"/>
               </a:rPr>
-              <a:t>$471k of ARR is won and not yet invoiced. </a:t>
+              <a:t>$236k of ARR is won with no row on the register. </a:t>
             </a:r>
             <a:pPr indent="0" marL="0">
               <a:spcAft>
@@ -48622,7 +48567,7 @@
                 <a:ea typeface="Poppins" pitchFamily="34" charset="-122"/>
                 <a:cs typeface="Poppins" pitchFamily="34" charset="-120"/>
               </a:rPr>
-              <a:t>44 of the 66 deals carrying software MRR in 2026. Oscars Group is $155k of it and the top three are 64%.</a:t>
+              <a:t>21 of the 66 deals that carried software MRR in 2026. Oscars Group is $155k of it — 66%. Matched on debtor ID and venue name, not debtor ID alone.</a:t>
             </a:r>
             <a:endParaRPr lang="en-US" sz="850" dirty="0"/>
           </a:p>
@@ -48653,7 +48598,7 @@
                 <a:ea typeface="Poppins" pitchFamily="34" charset="-122"/>
                 <a:cs typeface="Poppins" pitchFamily="34" charset="-120"/>
               </a:rPr>
-              <a:t>Debtor mapping blocks $379k of that. </a:t>
+              <a:t>HubSpot's Total Software does not yet agree with the register deal by deal. </a:t>
             </a:r>
             <a:pPr indent="0" marL="0">
               <a:spcAft>
@@ -48670,7 +48615,7 @@
                 <a:ea typeface="Poppins" pitchFamily="34" charset="-122"/>
                 <a:cs typeface="Poppins" pitchFamily="34" charset="-120"/>
               </a:rPr>
-              <a:t>20 of the 44 companies carry no Debtor ID, so the invoice match cannot be confirmed either way; $92k is confirmed unbilled. Mapping those 20 is the highest-value data fix on this slide.</a:t>
+              <a:t>Across the 39 won deals the register has invoiced it reads $22.9k/mo against $11.9k — 1.9x, and over 1.5x on 14 of them. The register stays the MRR source of record.</a:t>
             </a:r>
             <a:endParaRPr lang="en-US" sz="850" dirty="0"/>
           </a:p>
@@ -48687,7 +48632,7 @@
                 <a:ea typeface="Poppins" pitchFamily="34" charset="-122"/>
                 <a:cs typeface="Poppins" pitchFamily="34" charset="-120"/>
               </a:rPr>
-              <a:t>◆ = company has no Debtor ID, so the invoice match cannot be confirmed either way</a:t>
+              <a:t>◆ Oscars Group — signed, ~1.5x rollout, held by the old provider's contract terms. AVC new sites excluded (parked licences, not counted in MRR); Grand Chancellor Adelaide is on the register awaiting an invoice date.</a:t>
             </a:r>
             <a:endParaRPr lang="en-US" sz="850" dirty="0"/>
           </a:p>
@@ -48726,7 +48671,7 @@
                 <a:ea typeface="Poppins" pitchFamily="34" charset="-122"/>
                 <a:cs typeface="Poppins" pitchFamily="34" charset="-120"/>
               </a:rPr>
-              <a:t>ARR = monthly software MRR × 12 · matched on Debtor ID from the HubSpot company record</a:t>
+              <a:t>ARR = monthly MRR × 12 · matched on debtor ID and venue name</a:t>
             </a:r>
             <a:endParaRPr lang="en-US" sz="750" dirty="0"/>
           </a:p>

--- a/exec-deck/output/H&L Weekly Update - WC 21 Sep 2026.pptx
+++ b/exec-deck/output/H&L Weekly Update - WC 21 Sep 2026.pptx
@@ -26259,7 +26259,7 @@
                 <a:ea typeface="Poppins" pitchFamily="34" charset="-122"/>
                 <a:cs typeface="Poppins" pitchFamily="34" charset="-120"/>
               </a:rPr>
-              <a:t>closed-won this week 34 deals · $131k (HubSpot); new MRR +$1.7k in the week · Q3 $15.1k = 54% of OKR2</a:t>
+              <a:t>closed-won this week 34 deals · $131k (HubSpot); net new MRR +$1.2k in the week (+$1.7k new, −$0.5k churn) · Q3 $15.1k = 54% of OKR2</a:t>
             </a:r>
             <a:endParaRPr lang="en-US" sz="900" dirty="0"/>
           </a:p>
@@ -27593,8 +27593,8 @@
         </p:nvSpPr>
         <p:spPr>
           <a:xfrm>
-            <a:off x="3794760" y="1371600"/>
-            <a:ext cx="2057400" cy="310896"/>
+            <a:off x="3611880" y="1371600"/>
+            <a:ext cx="2240280" cy="310896"/>
           </a:xfrm>
           <a:prstGeom prst="rect">
             <a:avLst/>
@@ -27618,7 +27618,7 @@
                 <a:ea typeface="Poppins" pitchFamily="34" charset="-122"/>
                 <a:cs typeface="Poppins" pitchFamily="34" charset="-120"/>
               </a:rPr>
-              <a:t>▲ +$1,659 this wk</a:t>
+              <a:t>▲ +$1,204 net this wk</a:t>
             </a:r>
             <a:endParaRPr lang="en-US" sz="950" dirty="0"/>
           </a:p>
@@ -28108,8 +28108,8 @@
         </p:nvSpPr>
         <p:spPr>
           <a:xfrm>
-            <a:off x="2221992" y="2724912"/>
-            <a:ext cx="2194560" cy="201168"/>
+            <a:off x="2002536" y="2724912"/>
+            <a:ext cx="2542032" cy="201168"/>
           </a:xfrm>
           <a:prstGeom prst="rect">
             <a:avLst/>
@@ -28147,8 +28147,8 @@
         </p:nvSpPr>
         <p:spPr>
           <a:xfrm>
-            <a:off x="4617720" y="2724912"/>
-            <a:ext cx="3383280" cy="201168"/>
+            <a:off x="4599432" y="2724912"/>
+            <a:ext cx="3200400" cy="201168"/>
           </a:xfrm>
           <a:prstGeom prst="rect">
             <a:avLst/>
@@ -28172,7 +28172,7 @@
                 <a:ea typeface="Poppins" pitchFamily="34" charset="-122"/>
                 <a:cs typeface="Poppins" pitchFamily="34" charset="-120"/>
               </a:rPr>
-              <a:t>HARDWARE ($/qtr) · extracts to 27 Sep · Δ wk = 21–27 Sep</a:t>
+              <a:t>HARDWARE ($/qtr) · extracts to 27 Sep</a:t>
             </a:r>
             <a:endParaRPr lang="en-US" sz="800" dirty="0"/>
           </a:p>
@@ -28187,7 +28187,7 @@
         <p:spPr>
           <a:xfrm>
             <a:off x="612648" y="2944368"/>
-            <a:ext cx="1554480" cy="182880"/>
+            <a:ext cx="1371600" cy="182880"/>
           </a:xfrm>
           <a:prstGeom prst="rect">
             <a:avLst/>
@@ -28225,8 +28225,8 @@
         </p:nvSpPr>
         <p:spPr>
           <a:xfrm>
-            <a:off x="2221992" y="2944368"/>
-            <a:ext cx="566928" cy="182880"/>
+            <a:off x="2002536" y="2944368"/>
+            <a:ext cx="475488" cy="182880"/>
           </a:xfrm>
           <a:prstGeom prst="rect">
             <a:avLst/>
@@ -28264,8 +28264,8 @@
         </p:nvSpPr>
         <p:spPr>
           <a:xfrm>
-            <a:off x="2807208" y="2944368"/>
-            <a:ext cx="566928" cy="182880"/>
+            <a:off x="2514600" y="2944368"/>
+            <a:ext cx="475488" cy="182880"/>
           </a:xfrm>
           <a:prstGeom prst="rect">
             <a:avLst/>
@@ -28303,8 +28303,8 @@
         </p:nvSpPr>
         <p:spPr>
           <a:xfrm>
-            <a:off x="3429000" y="2944368"/>
-            <a:ext cx="969264" cy="182880"/>
+            <a:off x="3044952" y="2944368"/>
+            <a:ext cx="914400" cy="182880"/>
           </a:xfrm>
           <a:prstGeom prst="rect">
             <a:avLst/>
@@ -28342,7 +28342,7 @@
         </p:nvSpPr>
         <p:spPr>
           <a:xfrm>
-            <a:off x="4617720" y="2944368"/>
+            <a:off x="3904488" y="2944368"/>
             <a:ext cx="640080" cy="182880"/>
           </a:xfrm>
           <a:prstGeom prst="rect">
@@ -28367,6 +28367,45 @@
                 <a:ea typeface="Poppins" pitchFamily="34" charset="-122"/>
                 <a:cs typeface="Poppins" pitchFamily="34" charset="-120"/>
               </a:rPr>
+              <a:t>NET Δ WK</a:t>
+            </a:r>
+            <a:endParaRPr lang="en-US" sz="750" dirty="0"/>
+          </a:p>
+        </p:txBody>
+      </p:sp>
+      <p:sp>
+        <p:nvSpPr>
+          <p:cNvPr id="38" name="Text 36"/>
+          <p:cNvSpPr txBox="1"/>
+          <p:nvPr/>
+        </p:nvSpPr>
+        <p:spPr>
+          <a:xfrm>
+            <a:off x="4599432" y="2944368"/>
+            <a:ext cx="548640" cy="182880"/>
+          </a:xfrm>
+          <a:prstGeom prst="rect">
+            <a:avLst/>
+          </a:prstGeom>
+          <a:noFill/>
+          <a:ln/>
+        </p:spPr>
+        <p:txBody>
+          <a:bodyPr wrap="square" lIns="0" tIns="0" rIns="0" bIns="0" rtlCol="0" anchor="ctr"/>
+          <a:lstStyle/>
+          <a:p>
+            <a:pPr algn="r" indent="0" marL="0">
+              <a:buNone/>
+            </a:pPr>
+            <a:r>
+              <a:rPr lang="en-US" sz="750" b="1" dirty="0">
+                <a:solidFill>
+                  <a:srgbClr val="8FA1AC"/>
+                </a:solidFill>
+                <a:latin typeface="Poppins" pitchFamily="34" charset="0"/>
+                <a:ea typeface="Poppins" pitchFamily="34" charset="-122"/>
+                <a:cs typeface="Poppins" pitchFamily="34" charset="-120"/>
+              </a:rPr>
               <a:t>TGT</a:t>
             </a:r>
             <a:endParaRPr lang="en-US" sz="750" dirty="0"/>
@@ -28375,14 +28414,14 @@
       </p:sp>
       <p:sp>
         <p:nvSpPr>
-          <p:cNvPr id="38" name="Text 36"/>
-          <p:cNvSpPr txBox="1"/>
-          <p:nvPr/>
-        </p:nvSpPr>
-        <p:spPr>
-          <a:xfrm>
-            <a:off x="5294376" y="2944368"/>
-            <a:ext cx="658368" cy="182880"/>
+          <p:cNvPr id="39" name="Text 37"/>
+          <p:cNvSpPr txBox="1"/>
+          <p:nvPr/>
+        </p:nvSpPr>
+        <p:spPr>
+          <a:xfrm>
+            <a:off x="5184648" y="2944368"/>
+            <a:ext cx="603504" cy="182880"/>
           </a:xfrm>
           <a:prstGeom prst="rect">
             <a:avLst/>
@@ -28414,14 +28453,14 @@
       </p:sp>
       <p:sp>
         <p:nvSpPr>
-          <p:cNvPr id="39" name="Text 37"/>
-          <p:cNvSpPr txBox="1"/>
-          <p:nvPr/>
-        </p:nvSpPr>
-        <p:spPr>
-          <a:xfrm>
-            <a:off x="6007608" y="2944368"/>
-            <a:ext cx="969264" cy="182880"/>
+          <p:cNvPr id="40" name="Text 38"/>
+          <p:cNvSpPr txBox="1"/>
+          <p:nvPr/>
+        </p:nvSpPr>
+        <p:spPr>
+          <a:xfrm>
+            <a:off x="5843016" y="2944368"/>
+            <a:ext cx="932688" cy="182880"/>
           </a:xfrm>
           <a:prstGeom prst="rect">
             <a:avLst/>
@@ -28453,14 +28492,14 @@
       </p:sp>
       <p:sp>
         <p:nvSpPr>
-          <p:cNvPr id="40" name="Text 38"/>
-          <p:cNvSpPr txBox="1"/>
-          <p:nvPr/>
-        </p:nvSpPr>
-        <p:spPr>
-          <a:xfrm>
-            <a:off x="7013448" y="2944368"/>
-            <a:ext cx="822960" cy="182880"/>
+          <p:cNvPr id="41" name="Text 39"/>
+          <p:cNvSpPr txBox="1"/>
+          <p:nvPr/>
+        </p:nvSpPr>
+        <p:spPr>
+          <a:xfrm>
+            <a:off x="6830568" y="2944368"/>
+            <a:ext cx="987552" cy="182880"/>
           </a:xfrm>
           <a:prstGeom prst="rect">
             <a:avLst/>
@@ -28492,7 +28531,7 @@
       </p:sp>
       <p:sp>
         <p:nvSpPr>
-          <p:cNvPr id="41" name="Shape 39"/>
+          <p:cNvPr id="42" name="Shape 40"/>
           <p:cNvSpPr/>
           <p:nvPr/>
         </p:nvSpPr>
@@ -28512,14 +28551,14 @@
       </p:sp>
       <p:sp>
         <p:nvSpPr>
-          <p:cNvPr id="42" name="Text 40"/>
+          <p:cNvPr id="43" name="Text 41"/>
           <p:cNvSpPr txBox="1"/>
           <p:nvPr/>
         </p:nvSpPr>
         <p:spPr>
           <a:xfrm>
             <a:off x="612648" y="3182112"/>
-            <a:ext cx="1591056" cy="315468"/>
+            <a:ext cx="1371600" cy="315468"/>
           </a:xfrm>
           <a:prstGeom prst="rect">
             <a:avLst/>
@@ -28551,14 +28590,14 @@
       </p:sp>
       <p:sp>
         <p:nvSpPr>
-          <p:cNvPr id="43" name="Text 41"/>
-          <p:cNvSpPr txBox="1"/>
-          <p:nvPr/>
-        </p:nvSpPr>
-        <p:spPr>
-          <a:xfrm>
-            <a:off x="2221992" y="3182112"/>
-            <a:ext cx="566928" cy="315468"/>
+          <p:cNvPr id="44" name="Text 42"/>
+          <p:cNvSpPr txBox="1"/>
+          <p:nvPr/>
+        </p:nvSpPr>
+        <p:spPr>
+          <a:xfrm>
+            <a:off x="2002536" y="3182112"/>
+            <a:ext cx="475488" cy="315468"/>
           </a:xfrm>
           <a:prstGeom prst="rect">
             <a:avLst/>
@@ -28590,14 +28629,14 @@
       </p:sp>
       <p:sp>
         <p:nvSpPr>
-          <p:cNvPr id="44" name="Text 42"/>
-          <p:cNvSpPr txBox="1"/>
-          <p:nvPr/>
-        </p:nvSpPr>
-        <p:spPr>
-          <a:xfrm>
-            <a:off x="2807208" y="3182112"/>
-            <a:ext cx="566928" cy="315468"/>
+          <p:cNvPr id="45" name="Text 43"/>
+          <p:cNvSpPr txBox="1"/>
+          <p:nvPr/>
+        </p:nvSpPr>
+        <p:spPr>
+          <a:xfrm>
+            <a:off x="2514600" y="3182112"/>
+            <a:ext cx="475488" cy="315468"/>
           </a:xfrm>
           <a:prstGeom prst="rect">
             <a:avLst/>
@@ -28629,14 +28668,14 @@
       </p:sp>
       <p:sp>
         <p:nvSpPr>
-          <p:cNvPr id="45" name="Shape 43"/>
-          <p:cNvSpPr/>
-          <p:nvPr/>
-        </p:nvSpPr>
-        <p:spPr>
-          <a:xfrm>
-            <a:off x="3465576" y="3294126"/>
-            <a:ext cx="731520" cy="100584"/>
+          <p:cNvPr id="46" name="Shape 44"/>
+          <p:cNvSpPr/>
+          <p:nvPr/>
+        </p:nvSpPr>
+        <p:spPr>
+          <a:xfrm>
+            <a:off x="3081528" y="3294126"/>
+            <a:ext cx="548640" cy="100584"/>
           </a:xfrm>
           <a:prstGeom prst="roundRect">
             <a:avLst>
@@ -28651,14 +28690,14 @@
       </p:sp>
       <p:sp>
         <p:nvSpPr>
-          <p:cNvPr id="46" name="Shape 44"/>
-          <p:cNvSpPr/>
-          <p:nvPr/>
-        </p:nvSpPr>
-        <p:spPr>
-          <a:xfrm>
-            <a:off x="3465576" y="3294126"/>
-            <a:ext cx="651053" cy="100584"/>
+          <p:cNvPr id="47" name="Shape 45"/>
+          <p:cNvSpPr/>
+          <p:nvPr/>
+        </p:nvSpPr>
+        <p:spPr>
+          <a:xfrm>
+            <a:off x="3081528" y="3294126"/>
+            <a:ext cx="488290" cy="100584"/>
           </a:xfrm>
           <a:prstGeom prst="roundRect">
             <a:avLst>
@@ -28673,13 +28712,13 @@
       </p:sp>
       <p:sp>
         <p:nvSpPr>
-          <p:cNvPr id="47" name="Shape 45"/>
-          <p:cNvSpPr/>
-          <p:nvPr/>
-        </p:nvSpPr>
-        <p:spPr>
-          <a:xfrm>
-            <a:off x="4165092" y="3248406"/>
+          <p:cNvPr id="48" name="Shape 46"/>
+          <p:cNvSpPr/>
+          <p:nvPr/>
+        </p:nvSpPr>
+        <p:spPr>
+          <a:xfrm>
+            <a:off x="3603650" y="3248406"/>
             <a:ext cx="20117" cy="192024"/>
           </a:xfrm>
           <a:prstGeom prst="rect">
@@ -28693,14 +28732,14 @@
       </p:sp>
       <p:sp>
         <p:nvSpPr>
-          <p:cNvPr id="48" name="Text 46"/>
-          <p:cNvSpPr txBox="1"/>
-          <p:nvPr/>
-        </p:nvSpPr>
-        <p:spPr>
-          <a:xfrm>
-            <a:off x="4233672" y="3182112"/>
-            <a:ext cx="384048" cy="315468"/>
+          <p:cNvPr id="49" name="Text 47"/>
+          <p:cNvSpPr txBox="1"/>
+          <p:nvPr/>
+        </p:nvSpPr>
+        <p:spPr>
+          <a:xfrm>
+            <a:off x="3630168" y="3182112"/>
+            <a:ext cx="329184" cy="315468"/>
           </a:xfrm>
           <a:prstGeom prst="rect">
             <a:avLst/>
@@ -28732,13 +28771,13 @@
       </p:sp>
       <p:sp>
         <p:nvSpPr>
-          <p:cNvPr id="49" name="Text 47"/>
-          <p:cNvSpPr txBox="1"/>
-          <p:nvPr/>
-        </p:nvSpPr>
-        <p:spPr>
-          <a:xfrm>
-            <a:off x="4617720" y="3182112"/>
+          <p:cNvPr id="50" name="Text 48"/>
+          <p:cNvSpPr txBox="1"/>
+          <p:nvPr/>
+        </p:nvSpPr>
+        <p:spPr>
+          <a:xfrm>
+            <a:off x="3904488" y="3182112"/>
             <a:ext cx="640080" cy="315468"/>
           </a:xfrm>
           <a:prstGeom prst="rect">
@@ -28757,6 +28796,45 @@
             <a:r>
               <a:rPr lang="en-US" sz="850" dirty="0">
                 <a:solidFill>
+                  <a:srgbClr val="8FA1AC"/>
+                </a:solidFill>
+                <a:latin typeface="Poppins" pitchFamily="34" charset="0"/>
+                <a:ea typeface="Poppins" pitchFamily="34" charset="-122"/>
+                <a:cs typeface="Poppins" pitchFamily="34" charset="-120"/>
+              </a:rPr>
+              <a:t>—</a:t>
+            </a:r>
+            <a:endParaRPr lang="en-US" sz="850" dirty="0"/>
+          </a:p>
+        </p:txBody>
+      </p:sp>
+      <p:sp>
+        <p:nvSpPr>
+          <p:cNvPr id="51" name="Text 49"/>
+          <p:cNvSpPr txBox="1"/>
+          <p:nvPr/>
+        </p:nvSpPr>
+        <p:spPr>
+          <a:xfrm>
+            <a:off x="4599432" y="3182112"/>
+            <a:ext cx="548640" cy="315468"/>
+          </a:xfrm>
+          <a:prstGeom prst="rect">
+            <a:avLst/>
+          </a:prstGeom>
+          <a:noFill/>
+          <a:ln/>
+        </p:spPr>
+        <p:txBody>
+          <a:bodyPr wrap="square" lIns="0" tIns="0" rIns="0" bIns="0" rtlCol="0" anchor="ctr"/>
+          <a:lstStyle/>
+          <a:p>
+            <a:pPr algn="r" indent="0" marL="0">
+              <a:buNone/>
+            </a:pPr>
+            <a:r>
+              <a:rPr lang="en-US" sz="850" dirty="0">
+                <a:solidFill>
                   <a:srgbClr val="5E7280"/>
                 </a:solidFill>
                 <a:latin typeface="Poppins" pitchFamily="34" charset="0"/>
@@ -28771,14 +28849,14 @@
       </p:sp>
       <p:sp>
         <p:nvSpPr>
-          <p:cNvPr id="50" name="Text 48"/>
-          <p:cNvSpPr txBox="1"/>
-          <p:nvPr/>
-        </p:nvSpPr>
-        <p:spPr>
-          <a:xfrm>
-            <a:off x="5294376" y="3182112"/>
-            <a:ext cx="658368" cy="315468"/>
+          <p:cNvPr id="52" name="Text 50"/>
+          <p:cNvSpPr txBox="1"/>
+          <p:nvPr/>
+        </p:nvSpPr>
+        <p:spPr>
+          <a:xfrm>
+            <a:off x="5184648" y="3182112"/>
+            <a:ext cx="603504" cy="315468"/>
           </a:xfrm>
           <a:prstGeom prst="rect">
             <a:avLst/>
@@ -28810,14 +28888,14 @@
       </p:sp>
       <p:sp>
         <p:nvSpPr>
-          <p:cNvPr id="51" name="Shape 49"/>
-          <p:cNvSpPr/>
-          <p:nvPr/>
-        </p:nvSpPr>
-        <p:spPr>
-          <a:xfrm>
-            <a:off x="6044184" y="3294126"/>
-            <a:ext cx="731520" cy="100584"/>
+          <p:cNvPr id="53" name="Shape 51"/>
+          <p:cNvSpPr/>
+          <p:nvPr/>
+        </p:nvSpPr>
+        <p:spPr>
+          <a:xfrm>
+            <a:off x="5879592" y="3294126"/>
+            <a:ext cx="566928" cy="100584"/>
           </a:xfrm>
           <a:prstGeom prst="roundRect">
             <a:avLst>
@@ -28832,14 +28910,14 @@
       </p:sp>
       <p:sp>
         <p:nvSpPr>
-          <p:cNvPr id="52" name="Shape 50"/>
-          <p:cNvSpPr/>
-          <p:nvPr/>
-        </p:nvSpPr>
-        <p:spPr>
-          <a:xfrm>
-            <a:off x="6044184" y="3294126"/>
-            <a:ext cx="270662" cy="100584"/>
+          <p:cNvPr id="54" name="Shape 52"/>
+          <p:cNvSpPr/>
+          <p:nvPr/>
+        </p:nvSpPr>
+        <p:spPr>
+          <a:xfrm>
+            <a:off x="5879592" y="3294126"/>
+            <a:ext cx="209763" cy="100584"/>
           </a:xfrm>
           <a:prstGeom prst="roundRect">
             <a:avLst>
@@ -28854,13 +28932,13 @@
       </p:sp>
       <p:sp>
         <p:nvSpPr>
-          <p:cNvPr id="53" name="Shape 51"/>
-          <p:cNvSpPr/>
-          <p:nvPr/>
-        </p:nvSpPr>
-        <p:spPr>
-          <a:xfrm>
-            <a:off x="6743700" y="3248406"/>
+          <p:cNvPr id="55" name="Shape 53"/>
+          <p:cNvSpPr/>
+          <p:nvPr/>
+        </p:nvSpPr>
+        <p:spPr>
+          <a:xfrm>
+            <a:off x="6419454" y="3248406"/>
             <a:ext cx="20117" cy="192024"/>
           </a:xfrm>
           <a:prstGeom prst="rect">
@@ -28874,14 +28952,14 @@
       </p:sp>
       <p:sp>
         <p:nvSpPr>
-          <p:cNvPr id="54" name="Text 52"/>
-          <p:cNvSpPr txBox="1"/>
-          <p:nvPr/>
-        </p:nvSpPr>
-        <p:spPr>
-          <a:xfrm>
-            <a:off x="6812280" y="3182112"/>
-            <a:ext cx="384048" cy="315468"/>
+          <p:cNvPr id="56" name="Text 54"/>
+          <p:cNvSpPr txBox="1"/>
+          <p:nvPr/>
+        </p:nvSpPr>
+        <p:spPr>
+          <a:xfrm>
+            <a:off x="6464808" y="3182112"/>
+            <a:ext cx="329184" cy="315468"/>
           </a:xfrm>
           <a:prstGeom prst="rect">
             <a:avLst/>
@@ -28913,14 +28991,14 @@
       </p:sp>
       <p:sp>
         <p:nvSpPr>
-          <p:cNvPr id="55" name="Text 53"/>
-          <p:cNvSpPr txBox="1"/>
-          <p:nvPr/>
-        </p:nvSpPr>
-        <p:spPr>
-          <a:xfrm>
-            <a:off x="7013448" y="3182112"/>
-            <a:ext cx="822960" cy="315468"/>
+          <p:cNvPr id="57" name="Text 55"/>
+          <p:cNvSpPr txBox="1"/>
+          <p:nvPr/>
+        </p:nvSpPr>
+        <p:spPr>
+          <a:xfrm>
+            <a:off x="6830568" y="3182112"/>
+            <a:ext cx="987552" cy="315468"/>
           </a:xfrm>
           <a:prstGeom prst="rect">
             <a:avLst/>
@@ -28952,7 +29030,7 @@
       </p:sp>
       <p:sp>
         <p:nvSpPr>
-          <p:cNvPr id="56" name="Shape 54"/>
+          <p:cNvPr id="58" name="Shape 56"/>
           <p:cNvSpPr/>
           <p:nvPr/>
         </p:nvSpPr>
@@ -28972,14 +29050,14 @@
       </p:sp>
       <p:sp>
         <p:nvSpPr>
-          <p:cNvPr id="57" name="Text 55"/>
+          <p:cNvPr id="59" name="Text 57"/>
           <p:cNvSpPr txBox="1"/>
           <p:nvPr/>
         </p:nvSpPr>
         <p:spPr>
           <a:xfrm>
             <a:off x="612648" y="3497580"/>
-            <a:ext cx="1591056" cy="315468"/>
+            <a:ext cx="1371600" cy="315468"/>
           </a:xfrm>
           <a:prstGeom prst="rect">
             <a:avLst/>
@@ -29011,14 +29089,14 @@
       </p:sp>
       <p:sp>
         <p:nvSpPr>
-          <p:cNvPr id="58" name="Text 56"/>
-          <p:cNvSpPr txBox="1"/>
-          <p:nvPr/>
-        </p:nvSpPr>
-        <p:spPr>
-          <a:xfrm>
-            <a:off x="2221992" y="3497580"/>
-            <a:ext cx="566928" cy="315468"/>
+          <p:cNvPr id="60" name="Text 58"/>
+          <p:cNvSpPr txBox="1"/>
+          <p:nvPr/>
+        </p:nvSpPr>
+        <p:spPr>
+          <a:xfrm>
+            <a:off x="2002536" y="3497580"/>
+            <a:ext cx="475488" cy="315468"/>
           </a:xfrm>
           <a:prstGeom prst="rect">
             <a:avLst/>
@@ -29050,14 +29128,14 @@
       </p:sp>
       <p:sp>
         <p:nvSpPr>
-          <p:cNvPr id="59" name="Text 57"/>
-          <p:cNvSpPr txBox="1"/>
-          <p:nvPr/>
-        </p:nvSpPr>
-        <p:spPr>
-          <a:xfrm>
-            <a:off x="2807208" y="3497580"/>
-            <a:ext cx="566928" cy="315468"/>
+          <p:cNvPr id="61" name="Text 59"/>
+          <p:cNvSpPr txBox="1"/>
+          <p:nvPr/>
+        </p:nvSpPr>
+        <p:spPr>
+          <a:xfrm>
+            <a:off x="2514600" y="3497580"/>
+            <a:ext cx="475488" cy="315468"/>
           </a:xfrm>
           <a:prstGeom prst="rect">
             <a:avLst/>
@@ -29089,14 +29167,14 @@
       </p:sp>
       <p:sp>
         <p:nvSpPr>
-          <p:cNvPr id="60" name="Shape 58"/>
-          <p:cNvSpPr/>
-          <p:nvPr/>
-        </p:nvSpPr>
-        <p:spPr>
-          <a:xfrm>
-            <a:off x="3465576" y="3609594"/>
-            <a:ext cx="731520" cy="100584"/>
+          <p:cNvPr id="62" name="Shape 60"/>
+          <p:cNvSpPr/>
+          <p:nvPr/>
+        </p:nvSpPr>
+        <p:spPr>
+          <a:xfrm>
+            <a:off x="3081528" y="3609594"/>
+            <a:ext cx="548640" cy="100584"/>
           </a:xfrm>
           <a:prstGeom prst="roundRect">
             <a:avLst>
@@ -29111,14 +29189,14 @@
       </p:sp>
       <p:sp>
         <p:nvSpPr>
-          <p:cNvPr id="61" name="Shape 59"/>
-          <p:cNvSpPr/>
-          <p:nvPr/>
-        </p:nvSpPr>
-        <p:spPr>
-          <a:xfrm>
-            <a:off x="3465576" y="3609594"/>
-            <a:ext cx="592531" cy="100584"/>
+          <p:cNvPr id="63" name="Shape 61"/>
+          <p:cNvSpPr/>
+          <p:nvPr/>
+        </p:nvSpPr>
+        <p:spPr>
+          <a:xfrm>
+            <a:off x="3081528" y="3609594"/>
+            <a:ext cx="444398" cy="100584"/>
           </a:xfrm>
           <a:prstGeom prst="roundRect">
             <a:avLst>
@@ -29133,13 +29211,13 @@
       </p:sp>
       <p:sp>
         <p:nvSpPr>
-          <p:cNvPr id="62" name="Shape 60"/>
-          <p:cNvSpPr/>
-          <p:nvPr/>
-        </p:nvSpPr>
-        <p:spPr>
-          <a:xfrm>
-            <a:off x="4165092" y="3563874"/>
+          <p:cNvPr id="64" name="Shape 62"/>
+          <p:cNvSpPr/>
+          <p:nvPr/>
+        </p:nvSpPr>
+        <p:spPr>
+          <a:xfrm>
+            <a:off x="3603650" y="3563874"/>
             <a:ext cx="20117" cy="192024"/>
           </a:xfrm>
           <a:prstGeom prst="rect">
@@ -29153,14 +29231,14 @@
       </p:sp>
       <p:sp>
         <p:nvSpPr>
-          <p:cNvPr id="63" name="Text 61"/>
-          <p:cNvSpPr txBox="1"/>
-          <p:nvPr/>
-        </p:nvSpPr>
-        <p:spPr>
-          <a:xfrm>
-            <a:off x="4233672" y="3497580"/>
-            <a:ext cx="384048" cy="315468"/>
+          <p:cNvPr id="65" name="Text 63"/>
+          <p:cNvSpPr txBox="1"/>
+          <p:nvPr/>
+        </p:nvSpPr>
+        <p:spPr>
+          <a:xfrm>
+            <a:off x="3630168" y="3497580"/>
+            <a:ext cx="329184" cy="315468"/>
           </a:xfrm>
           <a:prstGeom prst="rect">
             <a:avLst/>
@@ -29192,13 +29270,13 @@
       </p:sp>
       <p:sp>
         <p:nvSpPr>
-          <p:cNvPr id="64" name="Text 62"/>
-          <p:cNvSpPr txBox="1"/>
-          <p:nvPr/>
-        </p:nvSpPr>
-        <p:spPr>
-          <a:xfrm>
-            <a:off x="4617720" y="3497580"/>
+          <p:cNvPr id="66" name="Text 64"/>
+          <p:cNvSpPr txBox="1"/>
+          <p:nvPr/>
+        </p:nvSpPr>
+        <p:spPr>
+          <a:xfrm>
+            <a:off x="3904488" y="3497580"/>
             <a:ext cx="640080" cy="315468"/>
           </a:xfrm>
           <a:prstGeom prst="rect">
@@ -29215,6 +29293,45 @@
               <a:buNone/>
             </a:pPr>
             <a:r>
+              <a:rPr lang="en-US" sz="850" b="1" dirty="0">
+                <a:solidFill>
+                  <a:srgbClr val="3D8F5F"/>
+                </a:solidFill>
+                <a:latin typeface="Poppins" pitchFamily="34" charset="0"/>
+                <a:ea typeface="Poppins" pitchFamily="34" charset="-122"/>
+                <a:cs typeface="Poppins" pitchFamily="34" charset="-120"/>
+              </a:rPr>
+              <a:t>+246</a:t>
+            </a:r>
+            <a:endParaRPr lang="en-US" sz="850" dirty="0"/>
+          </a:p>
+        </p:txBody>
+      </p:sp>
+      <p:sp>
+        <p:nvSpPr>
+          <p:cNvPr id="67" name="Text 65"/>
+          <p:cNvSpPr txBox="1"/>
+          <p:nvPr/>
+        </p:nvSpPr>
+        <p:spPr>
+          <a:xfrm>
+            <a:off x="4599432" y="3497580"/>
+            <a:ext cx="548640" cy="315468"/>
+          </a:xfrm>
+          <a:prstGeom prst="rect">
+            <a:avLst/>
+          </a:prstGeom>
+          <a:noFill/>
+          <a:ln/>
+        </p:spPr>
+        <p:txBody>
+          <a:bodyPr wrap="square" lIns="0" tIns="0" rIns="0" bIns="0" rtlCol="0" anchor="ctr"/>
+          <a:lstStyle/>
+          <a:p>
+            <a:pPr algn="r" indent="0" marL="0">
+              <a:buNone/>
+            </a:pPr>
+            <a:r>
               <a:rPr lang="en-US" sz="850" dirty="0">
                 <a:solidFill>
                   <a:srgbClr val="5E7280"/>
@@ -29231,14 +29348,14 @@
       </p:sp>
       <p:sp>
         <p:nvSpPr>
-          <p:cNvPr id="65" name="Text 63"/>
-          <p:cNvSpPr txBox="1"/>
-          <p:nvPr/>
-        </p:nvSpPr>
-        <p:spPr>
-          <a:xfrm>
-            <a:off x="5294376" y="3497580"/>
-            <a:ext cx="658368" cy="315468"/>
+          <p:cNvPr id="68" name="Text 66"/>
+          <p:cNvSpPr txBox="1"/>
+          <p:nvPr/>
+        </p:nvSpPr>
+        <p:spPr>
+          <a:xfrm>
+            <a:off x="5184648" y="3497580"/>
+            <a:ext cx="603504" cy="315468"/>
           </a:xfrm>
           <a:prstGeom prst="rect">
             <a:avLst/>
@@ -29270,14 +29387,14 @@
       </p:sp>
       <p:sp>
         <p:nvSpPr>
-          <p:cNvPr id="66" name="Shape 64"/>
-          <p:cNvSpPr/>
-          <p:nvPr/>
-        </p:nvSpPr>
-        <p:spPr>
-          <a:xfrm>
-            <a:off x="6044184" y="3609594"/>
-            <a:ext cx="731520" cy="100584"/>
+          <p:cNvPr id="69" name="Shape 67"/>
+          <p:cNvSpPr/>
+          <p:nvPr/>
+        </p:nvSpPr>
+        <p:spPr>
+          <a:xfrm>
+            <a:off x="5879592" y="3609594"/>
+            <a:ext cx="566928" cy="100584"/>
           </a:xfrm>
           <a:prstGeom prst="roundRect">
             <a:avLst>
@@ -29292,14 +29409,14 @@
       </p:sp>
       <p:sp>
         <p:nvSpPr>
-          <p:cNvPr id="67" name="Shape 65"/>
-          <p:cNvSpPr/>
-          <p:nvPr/>
-        </p:nvSpPr>
-        <p:spPr>
-          <a:xfrm>
-            <a:off x="6044184" y="3609594"/>
-            <a:ext cx="446227" cy="100584"/>
+          <p:cNvPr id="70" name="Shape 68"/>
+          <p:cNvSpPr/>
+          <p:nvPr/>
+        </p:nvSpPr>
+        <p:spPr>
+          <a:xfrm>
+            <a:off x="5879592" y="3609594"/>
+            <a:ext cx="345826" cy="100584"/>
           </a:xfrm>
           <a:prstGeom prst="roundRect">
             <a:avLst>
@@ -29314,13 +29431,13 @@
       </p:sp>
       <p:sp>
         <p:nvSpPr>
-          <p:cNvPr id="68" name="Shape 66"/>
-          <p:cNvSpPr/>
-          <p:nvPr/>
-        </p:nvSpPr>
-        <p:spPr>
-          <a:xfrm>
-            <a:off x="6743700" y="3563874"/>
+          <p:cNvPr id="71" name="Shape 69"/>
+          <p:cNvSpPr/>
+          <p:nvPr/>
+        </p:nvSpPr>
+        <p:spPr>
+          <a:xfrm>
+            <a:off x="6419454" y="3563874"/>
             <a:ext cx="20117" cy="192024"/>
           </a:xfrm>
           <a:prstGeom prst="rect">
@@ -29334,14 +29451,14 @@
       </p:sp>
       <p:sp>
         <p:nvSpPr>
-          <p:cNvPr id="69" name="Text 67"/>
-          <p:cNvSpPr txBox="1"/>
-          <p:nvPr/>
-        </p:nvSpPr>
-        <p:spPr>
-          <a:xfrm>
-            <a:off x="6812280" y="3497580"/>
-            <a:ext cx="384048" cy="315468"/>
+          <p:cNvPr id="72" name="Text 70"/>
+          <p:cNvSpPr txBox="1"/>
+          <p:nvPr/>
+        </p:nvSpPr>
+        <p:spPr>
+          <a:xfrm>
+            <a:off x="6464808" y="3497580"/>
+            <a:ext cx="329184" cy="315468"/>
           </a:xfrm>
           <a:prstGeom prst="rect">
             <a:avLst/>
@@ -29373,14 +29490,14 @@
       </p:sp>
       <p:sp>
         <p:nvSpPr>
-          <p:cNvPr id="70" name="Text 68"/>
-          <p:cNvSpPr txBox="1"/>
-          <p:nvPr/>
-        </p:nvSpPr>
-        <p:spPr>
-          <a:xfrm>
-            <a:off x="7013448" y="3497580"/>
-            <a:ext cx="822960" cy="315468"/>
+          <p:cNvPr id="73" name="Text 71"/>
+          <p:cNvSpPr txBox="1"/>
+          <p:nvPr/>
+        </p:nvSpPr>
+        <p:spPr>
+          <a:xfrm>
+            <a:off x="6830568" y="3497580"/>
+            <a:ext cx="987552" cy="315468"/>
           </a:xfrm>
           <a:prstGeom prst="rect">
             <a:avLst/>
@@ -29412,7 +29529,7 @@
       </p:sp>
       <p:sp>
         <p:nvSpPr>
-          <p:cNvPr id="71" name="Shape 69"/>
+          <p:cNvPr id="74" name="Shape 72"/>
           <p:cNvSpPr/>
           <p:nvPr/>
         </p:nvSpPr>
@@ -29432,14 +29549,14 @@
       </p:sp>
       <p:sp>
         <p:nvSpPr>
-          <p:cNvPr id="72" name="Text 70"/>
+          <p:cNvPr id="75" name="Text 73"/>
           <p:cNvSpPr txBox="1"/>
           <p:nvPr/>
         </p:nvSpPr>
         <p:spPr>
           <a:xfrm>
             <a:off x="612648" y="3813048"/>
-            <a:ext cx="1591056" cy="315468"/>
+            <a:ext cx="1371600" cy="315468"/>
           </a:xfrm>
           <a:prstGeom prst="rect">
             <a:avLst/>
@@ -29471,14 +29588,14 @@
       </p:sp>
       <p:sp>
         <p:nvSpPr>
-          <p:cNvPr id="73" name="Text 71"/>
-          <p:cNvSpPr txBox="1"/>
-          <p:nvPr/>
-        </p:nvSpPr>
-        <p:spPr>
-          <a:xfrm>
-            <a:off x="2221992" y="3813048"/>
-            <a:ext cx="566928" cy="315468"/>
+          <p:cNvPr id="76" name="Text 74"/>
+          <p:cNvSpPr txBox="1"/>
+          <p:nvPr/>
+        </p:nvSpPr>
+        <p:spPr>
+          <a:xfrm>
+            <a:off x="2002536" y="3813048"/>
+            <a:ext cx="475488" cy="315468"/>
           </a:xfrm>
           <a:prstGeom prst="rect">
             <a:avLst/>
@@ -29510,14 +29627,14 @@
       </p:sp>
       <p:sp>
         <p:nvSpPr>
-          <p:cNvPr id="74" name="Text 72"/>
-          <p:cNvSpPr txBox="1"/>
-          <p:nvPr/>
-        </p:nvSpPr>
-        <p:spPr>
-          <a:xfrm>
-            <a:off x="2807208" y="3813048"/>
-            <a:ext cx="566928" cy="315468"/>
+          <p:cNvPr id="77" name="Text 75"/>
+          <p:cNvSpPr txBox="1"/>
+          <p:nvPr/>
+        </p:nvSpPr>
+        <p:spPr>
+          <a:xfrm>
+            <a:off x="2514600" y="3813048"/>
+            <a:ext cx="475488" cy="315468"/>
           </a:xfrm>
           <a:prstGeom prst="rect">
             <a:avLst/>
@@ -29549,14 +29666,14 @@
       </p:sp>
       <p:sp>
         <p:nvSpPr>
-          <p:cNvPr id="75" name="Shape 73"/>
-          <p:cNvSpPr/>
-          <p:nvPr/>
-        </p:nvSpPr>
-        <p:spPr>
-          <a:xfrm>
-            <a:off x="3465576" y="3925062"/>
-            <a:ext cx="731520" cy="100584"/>
+          <p:cNvPr id="78" name="Shape 76"/>
+          <p:cNvSpPr/>
+          <p:nvPr/>
+        </p:nvSpPr>
+        <p:spPr>
+          <a:xfrm>
+            <a:off x="3081528" y="3925062"/>
+            <a:ext cx="548640" cy="100584"/>
           </a:xfrm>
           <a:prstGeom prst="roundRect">
             <a:avLst>
@@ -29571,14 +29688,14 @@
       </p:sp>
       <p:sp>
         <p:nvSpPr>
-          <p:cNvPr id="76" name="Shape 74"/>
-          <p:cNvSpPr/>
-          <p:nvPr/>
-        </p:nvSpPr>
-        <p:spPr>
-          <a:xfrm>
-            <a:off x="3465576" y="3925062"/>
-            <a:ext cx="358445" cy="100584"/>
+          <p:cNvPr id="79" name="Shape 77"/>
+          <p:cNvSpPr/>
+          <p:nvPr/>
+        </p:nvSpPr>
+        <p:spPr>
+          <a:xfrm>
+            <a:off x="3081528" y="3925062"/>
+            <a:ext cx="268834" cy="100584"/>
           </a:xfrm>
           <a:prstGeom prst="roundRect">
             <a:avLst>
@@ -29593,13 +29710,13 @@
       </p:sp>
       <p:sp>
         <p:nvSpPr>
-          <p:cNvPr id="77" name="Shape 75"/>
-          <p:cNvSpPr/>
-          <p:nvPr/>
-        </p:nvSpPr>
-        <p:spPr>
-          <a:xfrm>
-            <a:off x="4165092" y="3879342"/>
+          <p:cNvPr id="80" name="Shape 78"/>
+          <p:cNvSpPr/>
+          <p:nvPr/>
+        </p:nvSpPr>
+        <p:spPr>
+          <a:xfrm>
+            <a:off x="3603650" y="3879342"/>
             <a:ext cx="20117" cy="192024"/>
           </a:xfrm>
           <a:prstGeom prst="rect">
@@ -29613,14 +29730,14 @@
       </p:sp>
       <p:sp>
         <p:nvSpPr>
-          <p:cNvPr id="78" name="Text 76"/>
-          <p:cNvSpPr txBox="1"/>
-          <p:nvPr/>
-        </p:nvSpPr>
-        <p:spPr>
-          <a:xfrm>
-            <a:off x="4233672" y="3813048"/>
-            <a:ext cx="384048" cy="315468"/>
+          <p:cNvPr id="81" name="Text 79"/>
+          <p:cNvSpPr txBox="1"/>
+          <p:nvPr/>
+        </p:nvSpPr>
+        <p:spPr>
+          <a:xfrm>
+            <a:off x="3630168" y="3813048"/>
+            <a:ext cx="329184" cy="315468"/>
           </a:xfrm>
           <a:prstGeom prst="rect">
             <a:avLst/>
@@ -29652,13 +29769,13 @@
       </p:sp>
       <p:sp>
         <p:nvSpPr>
-          <p:cNvPr id="79" name="Text 77"/>
-          <p:cNvSpPr txBox="1"/>
-          <p:nvPr/>
-        </p:nvSpPr>
-        <p:spPr>
-          <a:xfrm>
-            <a:off x="4617720" y="3813048"/>
+          <p:cNvPr id="82" name="Text 80"/>
+          <p:cNvSpPr txBox="1"/>
+          <p:nvPr/>
+        </p:nvSpPr>
+        <p:spPr>
+          <a:xfrm>
+            <a:off x="3904488" y="3813048"/>
             <a:ext cx="640080" cy="315468"/>
           </a:xfrm>
           <a:prstGeom prst="rect">
@@ -29677,6 +29794,45 @@
             <a:r>
               <a:rPr lang="en-US" sz="850" dirty="0">
                 <a:solidFill>
+                  <a:srgbClr val="8FA1AC"/>
+                </a:solidFill>
+                <a:latin typeface="Poppins" pitchFamily="34" charset="0"/>
+                <a:ea typeface="Poppins" pitchFamily="34" charset="-122"/>
+                <a:cs typeface="Poppins" pitchFamily="34" charset="-120"/>
+              </a:rPr>
+              <a:t>—</a:t>
+            </a:r>
+            <a:endParaRPr lang="en-US" sz="850" dirty="0"/>
+          </a:p>
+        </p:txBody>
+      </p:sp>
+      <p:sp>
+        <p:nvSpPr>
+          <p:cNvPr id="83" name="Text 81"/>
+          <p:cNvSpPr txBox="1"/>
+          <p:nvPr/>
+        </p:nvSpPr>
+        <p:spPr>
+          <a:xfrm>
+            <a:off x="4599432" y="3813048"/>
+            <a:ext cx="548640" cy="315468"/>
+          </a:xfrm>
+          <a:prstGeom prst="rect">
+            <a:avLst/>
+          </a:prstGeom>
+          <a:noFill/>
+          <a:ln/>
+        </p:spPr>
+        <p:txBody>
+          <a:bodyPr wrap="square" lIns="0" tIns="0" rIns="0" bIns="0" rtlCol="0" anchor="ctr"/>
+          <a:lstStyle/>
+          <a:p>
+            <a:pPr algn="r" indent="0" marL="0">
+              <a:buNone/>
+            </a:pPr>
+            <a:r>
+              <a:rPr lang="en-US" sz="850" dirty="0">
+                <a:solidFill>
                   <a:srgbClr val="5E7280"/>
                 </a:solidFill>
                 <a:latin typeface="Poppins" pitchFamily="34" charset="0"/>
@@ -29691,14 +29847,14 @@
       </p:sp>
       <p:sp>
         <p:nvSpPr>
-          <p:cNvPr id="80" name="Text 78"/>
-          <p:cNvSpPr txBox="1"/>
-          <p:nvPr/>
-        </p:nvSpPr>
-        <p:spPr>
-          <a:xfrm>
-            <a:off x="5294376" y="3813048"/>
-            <a:ext cx="658368" cy="315468"/>
+          <p:cNvPr id="84" name="Text 82"/>
+          <p:cNvSpPr txBox="1"/>
+          <p:nvPr/>
+        </p:nvSpPr>
+        <p:spPr>
+          <a:xfrm>
+            <a:off x="5184648" y="3813048"/>
+            <a:ext cx="603504" cy="315468"/>
           </a:xfrm>
           <a:prstGeom prst="rect">
             <a:avLst/>
@@ -29730,14 +29886,14 @@
       </p:sp>
       <p:sp>
         <p:nvSpPr>
-          <p:cNvPr id="81" name="Shape 79"/>
-          <p:cNvSpPr/>
-          <p:nvPr/>
-        </p:nvSpPr>
-        <p:spPr>
-          <a:xfrm>
-            <a:off x="6044184" y="3925062"/>
-            <a:ext cx="731520" cy="100584"/>
+          <p:cNvPr id="85" name="Shape 83"/>
+          <p:cNvSpPr/>
+          <p:nvPr/>
+        </p:nvSpPr>
+        <p:spPr>
+          <a:xfrm>
+            <a:off x="5879592" y="3925062"/>
+            <a:ext cx="566928" cy="100584"/>
           </a:xfrm>
           <a:prstGeom prst="roundRect">
             <a:avLst>
@@ -29752,14 +29908,14 @@
       </p:sp>
       <p:sp>
         <p:nvSpPr>
-          <p:cNvPr id="82" name="Shape 80"/>
-          <p:cNvSpPr/>
-          <p:nvPr/>
-        </p:nvSpPr>
-        <p:spPr>
-          <a:xfrm>
-            <a:off x="6044184" y="3925062"/>
-            <a:ext cx="241402" cy="100584"/>
+          <p:cNvPr id="86" name="Shape 84"/>
+          <p:cNvSpPr/>
+          <p:nvPr/>
+        </p:nvSpPr>
+        <p:spPr>
+          <a:xfrm>
+            <a:off x="5879592" y="3925062"/>
+            <a:ext cx="187086" cy="100584"/>
           </a:xfrm>
           <a:prstGeom prst="roundRect">
             <a:avLst>
@@ -29774,13 +29930,13 @@
       </p:sp>
       <p:sp>
         <p:nvSpPr>
-          <p:cNvPr id="83" name="Shape 81"/>
-          <p:cNvSpPr/>
-          <p:nvPr/>
-        </p:nvSpPr>
-        <p:spPr>
-          <a:xfrm>
-            <a:off x="6743700" y="3879342"/>
+          <p:cNvPr id="87" name="Shape 85"/>
+          <p:cNvSpPr/>
+          <p:nvPr/>
+        </p:nvSpPr>
+        <p:spPr>
+          <a:xfrm>
+            <a:off x="6419454" y="3879342"/>
             <a:ext cx="20117" cy="192024"/>
           </a:xfrm>
           <a:prstGeom prst="rect">
@@ -29794,14 +29950,14 @@
       </p:sp>
       <p:sp>
         <p:nvSpPr>
-          <p:cNvPr id="84" name="Text 82"/>
-          <p:cNvSpPr txBox="1"/>
-          <p:nvPr/>
-        </p:nvSpPr>
-        <p:spPr>
-          <a:xfrm>
-            <a:off x="6812280" y="3813048"/>
-            <a:ext cx="384048" cy="315468"/>
+          <p:cNvPr id="88" name="Text 86"/>
+          <p:cNvSpPr txBox="1"/>
+          <p:nvPr/>
+        </p:nvSpPr>
+        <p:spPr>
+          <a:xfrm>
+            <a:off x="6464808" y="3813048"/>
+            <a:ext cx="329184" cy="315468"/>
           </a:xfrm>
           <a:prstGeom prst="rect">
             <a:avLst/>
@@ -29833,14 +29989,14 @@
       </p:sp>
       <p:sp>
         <p:nvSpPr>
-          <p:cNvPr id="85" name="Text 83"/>
-          <p:cNvSpPr txBox="1"/>
-          <p:nvPr/>
-        </p:nvSpPr>
-        <p:spPr>
-          <a:xfrm>
-            <a:off x="7013448" y="3813048"/>
-            <a:ext cx="822960" cy="315468"/>
+          <p:cNvPr id="89" name="Text 87"/>
+          <p:cNvSpPr txBox="1"/>
+          <p:nvPr/>
+        </p:nvSpPr>
+        <p:spPr>
+          <a:xfrm>
+            <a:off x="6830568" y="3813048"/>
+            <a:ext cx="987552" cy="315468"/>
           </a:xfrm>
           <a:prstGeom prst="rect">
             <a:avLst/>
@@ -29872,7 +30028,7 @@
       </p:sp>
       <p:sp>
         <p:nvSpPr>
-          <p:cNvPr id="86" name="Shape 84"/>
+          <p:cNvPr id="90" name="Shape 88"/>
           <p:cNvSpPr/>
           <p:nvPr/>
         </p:nvSpPr>
@@ -29892,14 +30048,14 @@
       </p:sp>
       <p:sp>
         <p:nvSpPr>
-          <p:cNvPr id="87" name="Text 85"/>
+          <p:cNvPr id="91" name="Text 89"/>
           <p:cNvSpPr txBox="1"/>
           <p:nvPr/>
         </p:nvSpPr>
         <p:spPr>
           <a:xfrm>
             <a:off x="612648" y="4128516"/>
-            <a:ext cx="1591056" cy="315468"/>
+            <a:ext cx="1371600" cy="315468"/>
           </a:xfrm>
           <a:prstGeom prst="rect">
             <a:avLst/>
@@ -29931,14 +30087,14 @@
       </p:sp>
       <p:sp>
         <p:nvSpPr>
-          <p:cNvPr id="88" name="Text 86"/>
-          <p:cNvSpPr txBox="1"/>
-          <p:nvPr/>
-        </p:nvSpPr>
-        <p:spPr>
-          <a:xfrm>
-            <a:off x="2221992" y="4128516"/>
-            <a:ext cx="566928" cy="315468"/>
+          <p:cNvPr id="92" name="Text 90"/>
+          <p:cNvSpPr txBox="1"/>
+          <p:nvPr/>
+        </p:nvSpPr>
+        <p:spPr>
+          <a:xfrm>
+            <a:off x="2002536" y="4128516"/>
+            <a:ext cx="475488" cy="315468"/>
           </a:xfrm>
           <a:prstGeom prst="rect">
             <a:avLst/>
@@ -29970,14 +30126,14 @@
       </p:sp>
       <p:sp>
         <p:nvSpPr>
-          <p:cNvPr id="89" name="Text 87"/>
-          <p:cNvSpPr txBox="1"/>
-          <p:nvPr/>
-        </p:nvSpPr>
-        <p:spPr>
-          <a:xfrm>
-            <a:off x="2807208" y="4128516"/>
-            <a:ext cx="566928" cy="315468"/>
+          <p:cNvPr id="93" name="Text 91"/>
+          <p:cNvSpPr txBox="1"/>
+          <p:nvPr/>
+        </p:nvSpPr>
+        <p:spPr>
+          <a:xfrm>
+            <a:off x="2514600" y="4128516"/>
+            <a:ext cx="475488" cy="315468"/>
           </a:xfrm>
           <a:prstGeom prst="rect">
             <a:avLst/>
@@ -30009,14 +30165,14 @@
       </p:sp>
       <p:sp>
         <p:nvSpPr>
-          <p:cNvPr id="90" name="Shape 88"/>
-          <p:cNvSpPr/>
-          <p:nvPr/>
-        </p:nvSpPr>
-        <p:spPr>
-          <a:xfrm>
-            <a:off x="3465576" y="4240530"/>
-            <a:ext cx="731520" cy="100584"/>
+          <p:cNvPr id="94" name="Shape 92"/>
+          <p:cNvSpPr/>
+          <p:nvPr/>
+        </p:nvSpPr>
+        <p:spPr>
+          <a:xfrm>
+            <a:off x="3081528" y="4240530"/>
+            <a:ext cx="548640" cy="100584"/>
           </a:xfrm>
           <a:prstGeom prst="roundRect">
             <a:avLst>
@@ -30031,14 +30187,14 @@
       </p:sp>
       <p:sp>
         <p:nvSpPr>
-          <p:cNvPr id="91" name="Shape 89"/>
-          <p:cNvSpPr/>
-          <p:nvPr/>
-        </p:nvSpPr>
-        <p:spPr>
-          <a:xfrm>
-            <a:off x="3465576" y="4240530"/>
-            <a:ext cx="475488" cy="100584"/>
+          <p:cNvPr id="95" name="Shape 93"/>
+          <p:cNvSpPr/>
+          <p:nvPr/>
+        </p:nvSpPr>
+        <p:spPr>
+          <a:xfrm>
+            <a:off x="3081528" y="4240530"/>
+            <a:ext cx="356616" cy="100584"/>
           </a:xfrm>
           <a:prstGeom prst="roundRect">
             <a:avLst>
@@ -30053,13 +30209,13 @@
       </p:sp>
       <p:sp>
         <p:nvSpPr>
-          <p:cNvPr id="92" name="Shape 90"/>
-          <p:cNvSpPr/>
-          <p:nvPr/>
-        </p:nvSpPr>
-        <p:spPr>
-          <a:xfrm>
-            <a:off x="4165092" y="4194810"/>
+          <p:cNvPr id="96" name="Shape 94"/>
+          <p:cNvSpPr/>
+          <p:nvPr/>
+        </p:nvSpPr>
+        <p:spPr>
+          <a:xfrm>
+            <a:off x="3603650" y="4194810"/>
             <a:ext cx="20117" cy="192024"/>
           </a:xfrm>
           <a:prstGeom prst="rect">
@@ -30073,14 +30229,14 @@
       </p:sp>
       <p:sp>
         <p:nvSpPr>
-          <p:cNvPr id="93" name="Text 91"/>
-          <p:cNvSpPr txBox="1"/>
-          <p:nvPr/>
-        </p:nvSpPr>
-        <p:spPr>
-          <a:xfrm>
-            <a:off x="4233672" y="4128516"/>
-            <a:ext cx="384048" cy="315468"/>
+          <p:cNvPr id="97" name="Text 95"/>
+          <p:cNvSpPr txBox="1"/>
+          <p:nvPr/>
+        </p:nvSpPr>
+        <p:spPr>
+          <a:xfrm>
+            <a:off x="3630168" y="4128516"/>
+            <a:ext cx="329184" cy="315468"/>
           </a:xfrm>
           <a:prstGeom prst="rect">
             <a:avLst/>
@@ -30112,13 +30268,13 @@
       </p:sp>
       <p:sp>
         <p:nvSpPr>
-          <p:cNvPr id="94" name="Text 92"/>
-          <p:cNvSpPr txBox="1"/>
-          <p:nvPr/>
-        </p:nvSpPr>
-        <p:spPr>
-          <a:xfrm>
-            <a:off x="4617720" y="4128516"/>
+          <p:cNvPr id="98" name="Text 96"/>
+          <p:cNvSpPr txBox="1"/>
+          <p:nvPr/>
+        </p:nvSpPr>
+        <p:spPr>
+          <a:xfrm>
+            <a:off x="3904488" y="4128516"/>
             <a:ext cx="640080" cy="315468"/>
           </a:xfrm>
           <a:prstGeom prst="rect">
@@ -30135,6 +30291,45 @@
               <a:buNone/>
             </a:pPr>
             <a:r>
+              <a:rPr lang="en-US" sz="850" b="1" dirty="0">
+                <a:solidFill>
+                  <a:srgbClr val="3D8F5F"/>
+                </a:solidFill>
+                <a:latin typeface="Poppins" pitchFamily="34" charset="0"/>
+                <a:ea typeface="Poppins" pitchFamily="34" charset="-122"/>
+                <a:cs typeface="Poppins" pitchFamily="34" charset="-120"/>
+              </a:rPr>
+              <a:t>+899</a:t>
+            </a:r>
+            <a:endParaRPr lang="en-US" sz="850" dirty="0"/>
+          </a:p>
+        </p:txBody>
+      </p:sp>
+      <p:sp>
+        <p:nvSpPr>
+          <p:cNvPr id="99" name="Text 97"/>
+          <p:cNvSpPr txBox="1"/>
+          <p:nvPr/>
+        </p:nvSpPr>
+        <p:spPr>
+          <a:xfrm>
+            <a:off x="4599432" y="4128516"/>
+            <a:ext cx="548640" cy="315468"/>
+          </a:xfrm>
+          <a:prstGeom prst="rect">
+            <a:avLst/>
+          </a:prstGeom>
+          <a:noFill/>
+          <a:ln/>
+        </p:spPr>
+        <p:txBody>
+          <a:bodyPr wrap="square" lIns="0" tIns="0" rIns="0" bIns="0" rtlCol="0" anchor="ctr"/>
+          <a:lstStyle/>
+          <a:p>
+            <a:pPr algn="r" indent="0" marL="0">
+              <a:buNone/>
+            </a:pPr>
+            <a:r>
               <a:rPr lang="en-US" sz="850" dirty="0">
                 <a:solidFill>
                   <a:srgbClr val="5E7280"/>
@@ -30151,14 +30346,14 @@
       </p:sp>
       <p:sp>
         <p:nvSpPr>
-          <p:cNvPr id="95" name="Text 93"/>
-          <p:cNvSpPr txBox="1"/>
-          <p:nvPr/>
-        </p:nvSpPr>
-        <p:spPr>
-          <a:xfrm>
-            <a:off x="5294376" y="4128516"/>
-            <a:ext cx="658368" cy="315468"/>
+          <p:cNvPr id="100" name="Text 98"/>
+          <p:cNvSpPr txBox="1"/>
+          <p:nvPr/>
+        </p:nvSpPr>
+        <p:spPr>
+          <a:xfrm>
+            <a:off x="5184648" y="4128516"/>
+            <a:ext cx="603504" cy="315468"/>
           </a:xfrm>
           <a:prstGeom prst="rect">
             <a:avLst/>
@@ -30190,14 +30385,14 @@
       </p:sp>
       <p:sp>
         <p:nvSpPr>
-          <p:cNvPr id="96" name="Shape 94"/>
-          <p:cNvSpPr/>
-          <p:nvPr/>
-        </p:nvSpPr>
-        <p:spPr>
-          <a:xfrm>
-            <a:off x="6044184" y="4240530"/>
-            <a:ext cx="731520" cy="100584"/>
+          <p:cNvPr id="101" name="Shape 99"/>
+          <p:cNvSpPr/>
+          <p:nvPr/>
+        </p:nvSpPr>
+        <p:spPr>
+          <a:xfrm>
+            <a:off x="5879592" y="4240530"/>
+            <a:ext cx="566928" cy="100584"/>
           </a:xfrm>
           <a:prstGeom prst="roundRect">
             <a:avLst>
@@ -30212,14 +30407,14 @@
       </p:sp>
       <p:sp>
         <p:nvSpPr>
-          <p:cNvPr id="97" name="Shape 95"/>
-          <p:cNvSpPr/>
-          <p:nvPr/>
-        </p:nvSpPr>
-        <p:spPr>
-          <a:xfrm>
-            <a:off x="6044184" y="4240530"/>
-            <a:ext cx="731520" cy="100584"/>
+          <p:cNvPr id="102" name="Shape 100"/>
+          <p:cNvSpPr/>
+          <p:nvPr/>
+        </p:nvSpPr>
+        <p:spPr>
+          <a:xfrm>
+            <a:off x="5879592" y="4240530"/>
+            <a:ext cx="566928" cy="100584"/>
           </a:xfrm>
           <a:prstGeom prst="roundRect">
             <a:avLst>
@@ -30234,13 +30429,13 @@
       </p:sp>
       <p:sp>
         <p:nvSpPr>
-          <p:cNvPr id="98" name="Shape 96"/>
-          <p:cNvSpPr/>
-          <p:nvPr/>
-        </p:nvSpPr>
-        <p:spPr>
-          <a:xfrm>
-            <a:off x="6743700" y="4194810"/>
+          <p:cNvPr id="103" name="Shape 101"/>
+          <p:cNvSpPr/>
+          <p:nvPr/>
+        </p:nvSpPr>
+        <p:spPr>
+          <a:xfrm>
+            <a:off x="6419454" y="4194810"/>
             <a:ext cx="20117" cy="192024"/>
           </a:xfrm>
           <a:prstGeom prst="rect">
@@ -30254,14 +30449,14 @@
       </p:sp>
       <p:sp>
         <p:nvSpPr>
-          <p:cNvPr id="99" name="Text 97"/>
-          <p:cNvSpPr txBox="1"/>
-          <p:nvPr/>
-        </p:nvSpPr>
-        <p:spPr>
-          <a:xfrm>
-            <a:off x="6812280" y="4128516"/>
-            <a:ext cx="384048" cy="315468"/>
+          <p:cNvPr id="104" name="Text 102"/>
+          <p:cNvSpPr txBox="1"/>
+          <p:nvPr/>
+        </p:nvSpPr>
+        <p:spPr>
+          <a:xfrm>
+            <a:off x="6464808" y="4128516"/>
+            <a:ext cx="329184" cy="315468"/>
           </a:xfrm>
           <a:prstGeom prst="rect">
             <a:avLst/>
@@ -30293,14 +30488,14 @@
       </p:sp>
       <p:sp>
         <p:nvSpPr>
-          <p:cNvPr id="100" name="Text 98"/>
-          <p:cNvSpPr txBox="1"/>
-          <p:nvPr/>
-        </p:nvSpPr>
-        <p:spPr>
-          <a:xfrm>
-            <a:off x="7013448" y="4128516"/>
-            <a:ext cx="822960" cy="315468"/>
+          <p:cNvPr id="105" name="Text 103"/>
+          <p:cNvSpPr txBox="1"/>
+          <p:nvPr/>
+        </p:nvSpPr>
+        <p:spPr>
+          <a:xfrm>
+            <a:off x="6830568" y="4128516"/>
+            <a:ext cx="987552" cy="315468"/>
           </a:xfrm>
           <a:prstGeom prst="rect">
             <a:avLst/>
@@ -30332,7 +30527,7 @@
       </p:sp>
       <p:sp>
         <p:nvSpPr>
-          <p:cNvPr id="101" name="Shape 99"/>
+          <p:cNvPr id="106" name="Shape 104"/>
           <p:cNvSpPr/>
           <p:nvPr/>
         </p:nvSpPr>
@@ -30352,14 +30547,14 @@
       </p:sp>
       <p:sp>
         <p:nvSpPr>
-          <p:cNvPr id="102" name="Text 100"/>
+          <p:cNvPr id="107" name="Text 105"/>
           <p:cNvSpPr txBox="1"/>
           <p:nvPr/>
         </p:nvSpPr>
         <p:spPr>
           <a:xfrm>
             <a:off x="612648" y="4443984"/>
-            <a:ext cx="1591056" cy="315468"/>
+            <a:ext cx="1371600" cy="315468"/>
           </a:xfrm>
           <a:prstGeom prst="rect">
             <a:avLst/>
@@ -30391,14 +30586,14 @@
       </p:sp>
       <p:sp>
         <p:nvSpPr>
-          <p:cNvPr id="103" name="Text 101"/>
-          <p:cNvSpPr txBox="1"/>
-          <p:nvPr/>
-        </p:nvSpPr>
-        <p:spPr>
-          <a:xfrm>
-            <a:off x="2221992" y="4443984"/>
-            <a:ext cx="566928" cy="315468"/>
+          <p:cNvPr id="108" name="Text 106"/>
+          <p:cNvSpPr txBox="1"/>
+          <p:nvPr/>
+        </p:nvSpPr>
+        <p:spPr>
+          <a:xfrm>
+            <a:off x="2002536" y="4443984"/>
+            <a:ext cx="475488" cy="315468"/>
           </a:xfrm>
           <a:prstGeom prst="rect">
             <a:avLst/>
@@ -30430,14 +30625,14 @@
       </p:sp>
       <p:sp>
         <p:nvSpPr>
-          <p:cNvPr id="104" name="Text 102"/>
-          <p:cNvSpPr txBox="1"/>
-          <p:nvPr/>
-        </p:nvSpPr>
-        <p:spPr>
-          <a:xfrm>
-            <a:off x="2807208" y="4443984"/>
-            <a:ext cx="566928" cy="315468"/>
+          <p:cNvPr id="109" name="Text 107"/>
+          <p:cNvSpPr txBox="1"/>
+          <p:nvPr/>
+        </p:nvSpPr>
+        <p:spPr>
+          <a:xfrm>
+            <a:off x="2514600" y="4443984"/>
+            <a:ext cx="475488" cy="315468"/>
           </a:xfrm>
           <a:prstGeom prst="rect">
             <a:avLst/>
@@ -30469,14 +30664,14 @@
       </p:sp>
       <p:sp>
         <p:nvSpPr>
-          <p:cNvPr id="105" name="Shape 103"/>
-          <p:cNvSpPr/>
-          <p:nvPr/>
-        </p:nvSpPr>
-        <p:spPr>
-          <a:xfrm>
-            <a:off x="3465576" y="4555998"/>
-            <a:ext cx="731520" cy="100584"/>
+          <p:cNvPr id="110" name="Shape 108"/>
+          <p:cNvSpPr/>
+          <p:nvPr/>
+        </p:nvSpPr>
+        <p:spPr>
+          <a:xfrm>
+            <a:off x="3081528" y="4555998"/>
+            <a:ext cx="548640" cy="100584"/>
           </a:xfrm>
           <a:prstGeom prst="roundRect">
             <a:avLst>
@@ -30491,18 +30686,18 @@
       </p:sp>
       <p:sp>
         <p:nvSpPr>
-          <p:cNvPr id="106" name="Shape 104"/>
-          <p:cNvSpPr/>
-          <p:nvPr/>
-        </p:nvSpPr>
-        <p:spPr>
-          <a:xfrm>
-            <a:off x="3465576" y="4555998"/>
-            <a:ext cx="95098" cy="100584"/>
+          <p:cNvPr id="111" name="Shape 109"/>
+          <p:cNvSpPr/>
+          <p:nvPr/>
+        </p:nvSpPr>
+        <p:spPr>
+          <a:xfrm>
+            <a:off x="3081528" y="4555998"/>
+            <a:ext cx="71323" cy="100584"/>
           </a:xfrm>
           <a:prstGeom prst="roundRect">
             <a:avLst>
-              <a:gd name="adj" fmla="val 48077"/>
+              <a:gd name="adj" fmla="val 64103"/>
             </a:avLst>
           </a:prstGeom>
           <a:solidFill>
@@ -30513,13 +30708,13 @@
       </p:sp>
       <p:sp>
         <p:nvSpPr>
-          <p:cNvPr id="107" name="Shape 105"/>
-          <p:cNvSpPr/>
-          <p:nvPr/>
-        </p:nvSpPr>
-        <p:spPr>
-          <a:xfrm>
-            <a:off x="4165092" y="4510278"/>
+          <p:cNvPr id="112" name="Shape 110"/>
+          <p:cNvSpPr/>
+          <p:nvPr/>
+        </p:nvSpPr>
+        <p:spPr>
+          <a:xfrm>
+            <a:off x="3603650" y="4510278"/>
             <a:ext cx="20117" cy="192024"/>
           </a:xfrm>
           <a:prstGeom prst="rect">
@@ -30533,14 +30728,14 @@
       </p:sp>
       <p:sp>
         <p:nvSpPr>
-          <p:cNvPr id="108" name="Text 106"/>
-          <p:cNvSpPr txBox="1"/>
-          <p:nvPr/>
-        </p:nvSpPr>
-        <p:spPr>
-          <a:xfrm>
-            <a:off x="4233672" y="4443984"/>
-            <a:ext cx="384048" cy="315468"/>
+          <p:cNvPr id="113" name="Text 111"/>
+          <p:cNvSpPr txBox="1"/>
+          <p:nvPr/>
+        </p:nvSpPr>
+        <p:spPr>
+          <a:xfrm>
+            <a:off x="3630168" y="4443984"/>
+            <a:ext cx="329184" cy="315468"/>
           </a:xfrm>
           <a:prstGeom prst="rect">
             <a:avLst/>
@@ -30572,13 +30767,13 @@
       </p:sp>
       <p:sp>
         <p:nvSpPr>
-          <p:cNvPr id="109" name="Text 107"/>
-          <p:cNvSpPr txBox="1"/>
-          <p:nvPr/>
-        </p:nvSpPr>
-        <p:spPr>
-          <a:xfrm>
-            <a:off x="4617720" y="4443984"/>
+          <p:cNvPr id="114" name="Text 112"/>
+          <p:cNvSpPr txBox="1"/>
+          <p:nvPr/>
+        </p:nvSpPr>
+        <p:spPr>
+          <a:xfrm>
+            <a:off x="3904488" y="4443984"/>
             <a:ext cx="640080" cy="315468"/>
           </a:xfrm>
           <a:prstGeom prst="rect">
@@ -30595,6 +30790,45 @@
               <a:buNone/>
             </a:pPr>
             <a:r>
+              <a:rPr lang="en-US" sz="850" b="1" dirty="0">
+                <a:solidFill>
+                  <a:srgbClr val="3D8F5F"/>
+                </a:solidFill>
+                <a:latin typeface="Poppins" pitchFamily="34" charset="0"/>
+                <a:ea typeface="Poppins" pitchFamily="34" charset="-122"/>
+                <a:cs typeface="Poppins" pitchFamily="34" charset="-120"/>
+              </a:rPr>
+              <a:t>+59</a:t>
+            </a:r>
+            <a:endParaRPr lang="en-US" sz="850" dirty="0"/>
+          </a:p>
+        </p:txBody>
+      </p:sp>
+      <p:sp>
+        <p:nvSpPr>
+          <p:cNvPr id="115" name="Text 113"/>
+          <p:cNvSpPr txBox="1"/>
+          <p:nvPr/>
+        </p:nvSpPr>
+        <p:spPr>
+          <a:xfrm>
+            <a:off x="4599432" y="4443984"/>
+            <a:ext cx="548640" cy="315468"/>
+          </a:xfrm>
+          <a:prstGeom prst="rect">
+            <a:avLst/>
+          </a:prstGeom>
+          <a:noFill/>
+          <a:ln/>
+        </p:spPr>
+        <p:txBody>
+          <a:bodyPr wrap="square" lIns="0" tIns="0" rIns="0" bIns="0" rtlCol="0" anchor="ctr"/>
+          <a:lstStyle/>
+          <a:p>
+            <a:pPr algn="r" indent="0" marL="0">
+              <a:buNone/>
+            </a:pPr>
+            <a:r>
               <a:rPr lang="en-US" sz="850" dirty="0">
                 <a:solidFill>
                   <a:srgbClr val="5E7280"/>
@@ -30611,14 +30845,14 @@
       </p:sp>
       <p:sp>
         <p:nvSpPr>
-          <p:cNvPr id="110" name="Text 108"/>
-          <p:cNvSpPr txBox="1"/>
-          <p:nvPr/>
-        </p:nvSpPr>
-        <p:spPr>
-          <a:xfrm>
-            <a:off x="5294376" y="4443984"/>
-            <a:ext cx="658368" cy="315468"/>
+          <p:cNvPr id="116" name="Text 114"/>
+          <p:cNvSpPr txBox="1"/>
+          <p:nvPr/>
+        </p:nvSpPr>
+        <p:spPr>
+          <a:xfrm>
+            <a:off x="5184648" y="4443984"/>
+            <a:ext cx="603504" cy="315468"/>
           </a:xfrm>
           <a:prstGeom prst="rect">
             <a:avLst/>
@@ -30650,14 +30884,14 @@
       </p:sp>
       <p:sp>
         <p:nvSpPr>
-          <p:cNvPr id="111" name="Shape 109"/>
-          <p:cNvSpPr/>
-          <p:nvPr/>
-        </p:nvSpPr>
-        <p:spPr>
-          <a:xfrm>
-            <a:off x="6044184" y="4555998"/>
-            <a:ext cx="731520" cy="100584"/>
+          <p:cNvPr id="117" name="Shape 115"/>
+          <p:cNvSpPr/>
+          <p:nvPr/>
+        </p:nvSpPr>
+        <p:spPr>
+          <a:xfrm>
+            <a:off x="5879592" y="4555998"/>
+            <a:ext cx="566928" cy="100584"/>
           </a:xfrm>
           <a:prstGeom prst="roundRect">
             <a:avLst>
@@ -30672,14 +30906,14 @@
       </p:sp>
       <p:sp>
         <p:nvSpPr>
-          <p:cNvPr id="112" name="Shape 110"/>
-          <p:cNvSpPr/>
-          <p:nvPr/>
-        </p:nvSpPr>
-        <p:spPr>
-          <a:xfrm>
-            <a:off x="6044184" y="4555998"/>
-            <a:ext cx="190195" cy="100584"/>
+          <p:cNvPr id="118" name="Shape 116"/>
+          <p:cNvSpPr/>
+          <p:nvPr/>
+        </p:nvSpPr>
+        <p:spPr>
+          <a:xfrm>
+            <a:off x="5879592" y="4555998"/>
+            <a:ext cx="147401" cy="100584"/>
           </a:xfrm>
           <a:prstGeom prst="roundRect">
             <a:avLst>
@@ -30694,13 +30928,13 @@
       </p:sp>
       <p:sp>
         <p:nvSpPr>
-          <p:cNvPr id="113" name="Shape 111"/>
-          <p:cNvSpPr/>
-          <p:nvPr/>
-        </p:nvSpPr>
-        <p:spPr>
-          <a:xfrm>
-            <a:off x="6743700" y="4510278"/>
+          <p:cNvPr id="119" name="Shape 117"/>
+          <p:cNvSpPr/>
+          <p:nvPr/>
+        </p:nvSpPr>
+        <p:spPr>
+          <a:xfrm>
+            <a:off x="6419454" y="4510278"/>
             <a:ext cx="20117" cy="192024"/>
           </a:xfrm>
           <a:prstGeom prst="rect">
@@ -30714,14 +30948,14 @@
       </p:sp>
       <p:sp>
         <p:nvSpPr>
-          <p:cNvPr id="114" name="Text 112"/>
-          <p:cNvSpPr txBox="1"/>
-          <p:nvPr/>
-        </p:nvSpPr>
-        <p:spPr>
-          <a:xfrm>
-            <a:off x="6812280" y="4443984"/>
-            <a:ext cx="384048" cy="315468"/>
+          <p:cNvPr id="120" name="Text 118"/>
+          <p:cNvSpPr txBox="1"/>
+          <p:nvPr/>
+        </p:nvSpPr>
+        <p:spPr>
+          <a:xfrm>
+            <a:off x="6464808" y="4443984"/>
+            <a:ext cx="329184" cy="315468"/>
           </a:xfrm>
           <a:prstGeom prst="rect">
             <a:avLst/>
@@ -30753,14 +30987,14 @@
       </p:sp>
       <p:sp>
         <p:nvSpPr>
-          <p:cNvPr id="115" name="Text 113"/>
-          <p:cNvSpPr txBox="1"/>
-          <p:nvPr/>
-        </p:nvSpPr>
-        <p:spPr>
-          <a:xfrm>
-            <a:off x="7013448" y="4443984"/>
-            <a:ext cx="822960" cy="315468"/>
+          <p:cNvPr id="121" name="Text 119"/>
+          <p:cNvSpPr txBox="1"/>
+          <p:nvPr/>
+        </p:nvSpPr>
+        <p:spPr>
+          <a:xfrm>
+            <a:off x="6830568" y="4443984"/>
+            <a:ext cx="987552" cy="315468"/>
           </a:xfrm>
           <a:prstGeom prst="rect">
             <a:avLst/>
@@ -30792,7 +31026,7 @@
       </p:sp>
       <p:sp>
         <p:nvSpPr>
-          <p:cNvPr id="116" name="Shape 114"/>
+          <p:cNvPr id="122" name="Shape 120"/>
           <p:cNvSpPr/>
           <p:nvPr/>
         </p:nvSpPr>
@@ -30812,14 +31046,14 @@
       </p:sp>
       <p:sp>
         <p:nvSpPr>
-          <p:cNvPr id="117" name="Text 115"/>
+          <p:cNvPr id="123" name="Text 121"/>
           <p:cNvSpPr txBox="1"/>
           <p:nvPr/>
         </p:nvSpPr>
         <p:spPr>
           <a:xfrm>
             <a:off x="612648" y="4759452"/>
-            <a:ext cx="1591056" cy="315468"/>
+            <a:ext cx="1371600" cy="315468"/>
           </a:xfrm>
           <a:prstGeom prst="rect">
             <a:avLst/>
@@ -30851,14 +31085,14 @@
       </p:sp>
       <p:sp>
         <p:nvSpPr>
-          <p:cNvPr id="118" name="Text 116"/>
-          <p:cNvSpPr txBox="1"/>
-          <p:nvPr/>
-        </p:nvSpPr>
-        <p:spPr>
-          <a:xfrm>
-            <a:off x="2221992" y="4759452"/>
-            <a:ext cx="566928" cy="315468"/>
+          <p:cNvPr id="124" name="Text 122"/>
+          <p:cNvSpPr txBox="1"/>
+          <p:nvPr/>
+        </p:nvSpPr>
+        <p:spPr>
+          <a:xfrm>
+            <a:off x="2002536" y="4759452"/>
+            <a:ext cx="475488" cy="315468"/>
           </a:xfrm>
           <a:prstGeom prst="rect">
             <a:avLst/>
@@ -30890,14 +31124,14 @@
       </p:sp>
       <p:sp>
         <p:nvSpPr>
-          <p:cNvPr id="119" name="Text 117"/>
-          <p:cNvSpPr txBox="1"/>
-          <p:nvPr/>
-        </p:nvSpPr>
-        <p:spPr>
-          <a:xfrm>
-            <a:off x="2807208" y="4759452"/>
-            <a:ext cx="566928" cy="315468"/>
+          <p:cNvPr id="125" name="Text 123"/>
+          <p:cNvSpPr txBox="1"/>
+          <p:nvPr/>
+        </p:nvSpPr>
+        <p:spPr>
+          <a:xfrm>
+            <a:off x="2514600" y="4759452"/>
+            <a:ext cx="475488" cy="315468"/>
           </a:xfrm>
           <a:prstGeom prst="rect">
             <a:avLst/>
@@ -30929,14 +31163,14 @@
       </p:sp>
       <p:sp>
         <p:nvSpPr>
-          <p:cNvPr id="120" name="Shape 118"/>
-          <p:cNvSpPr/>
-          <p:nvPr/>
-        </p:nvSpPr>
-        <p:spPr>
-          <a:xfrm>
-            <a:off x="3465576" y="4871466"/>
-            <a:ext cx="731520" cy="100584"/>
+          <p:cNvPr id="126" name="Shape 124"/>
+          <p:cNvSpPr/>
+          <p:nvPr/>
+        </p:nvSpPr>
+        <p:spPr>
+          <a:xfrm>
+            <a:off x="3081528" y="4871466"/>
+            <a:ext cx="548640" cy="100584"/>
           </a:xfrm>
           <a:prstGeom prst="roundRect">
             <a:avLst>
@@ -30951,13 +31185,13 @@
       </p:sp>
       <p:sp>
         <p:nvSpPr>
-          <p:cNvPr id="121" name="Shape 119"/>
-          <p:cNvSpPr/>
-          <p:nvPr/>
-        </p:nvSpPr>
-        <p:spPr>
-          <a:xfrm>
-            <a:off x="3465576" y="4871466"/>
+          <p:cNvPr id="127" name="Shape 125"/>
+          <p:cNvSpPr/>
+          <p:nvPr/>
+        </p:nvSpPr>
+        <p:spPr>
+          <a:xfrm>
+            <a:off x="3081528" y="4871466"/>
             <a:ext cx="54864" cy="100584"/>
           </a:xfrm>
           <a:prstGeom prst="roundRect">
@@ -30973,13 +31207,13 @@
       </p:sp>
       <p:sp>
         <p:nvSpPr>
-          <p:cNvPr id="122" name="Shape 120"/>
-          <p:cNvSpPr/>
-          <p:nvPr/>
-        </p:nvSpPr>
-        <p:spPr>
-          <a:xfrm>
-            <a:off x="4165092" y="4825746"/>
+          <p:cNvPr id="128" name="Shape 126"/>
+          <p:cNvSpPr/>
+          <p:nvPr/>
+        </p:nvSpPr>
+        <p:spPr>
+          <a:xfrm>
+            <a:off x="3603650" y="4825746"/>
             <a:ext cx="20117" cy="192024"/>
           </a:xfrm>
           <a:prstGeom prst="rect">
@@ -30993,14 +31227,14 @@
       </p:sp>
       <p:sp>
         <p:nvSpPr>
-          <p:cNvPr id="123" name="Text 121"/>
-          <p:cNvSpPr txBox="1"/>
-          <p:nvPr/>
-        </p:nvSpPr>
-        <p:spPr>
-          <a:xfrm>
-            <a:off x="4233672" y="4759452"/>
-            <a:ext cx="384048" cy="315468"/>
+          <p:cNvPr id="129" name="Text 127"/>
+          <p:cNvSpPr txBox="1"/>
+          <p:nvPr/>
+        </p:nvSpPr>
+        <p:spPr>
+          <a:xfrm>
+            <a:off x="3630168" y="4759452"/>
+            <a:ext cx="329184" cy="315468"/>
           </a:xfrm>
           <a:prstGeom prst="rect">
             <a:avLst/>
@@ -31032,13 +31266,13 @@
       </p:sp>
       <p:sp>
         <p:nvSpPr>
-          <p:cNvPr id="124" name="Text 122"/>
-          <p:cNvSpPr txBox="1"/>
-          <p:nvPr/>
-        </p:nvSpPr>
-        <p:spPr>
-          <a:xfrm>
-            <a:off x="4617720" y="4759452"/>
+          <p:cNvPr id="130" name="Text 128"/>
+          <p:cNvSpPr txBox="1"/>
+          <p:nvPr/>
+        </p:nvSpPr>
+        <p:spPr>
+          <a:xfrm>
+            <a:off x="3904488" y="4759452"/>
             <a:ext cx="640080" cy="315468"/>
           </a:xfrm>
           <a:prstGeom prst="rect">
@@ -31057,6 +31291,45 @@
             <a:r>
               <a:rPr lang="en-US" sz="850" dirty="0">
                 <a:solidFill>
+                  <a:srgbClr val="8FA1AC"/>
+                </a:solidFill>
+                <a:latin typeface="Poppins" pitchFamily="34" charset="0"/>
+                <a:ea typeface="Poppins" pitchFamily="34" charset="-122"/>
+                <a:cs typeface="Poppins" pitchFamily="34" charset="-120"/>
+              </a:rPr>
+              <a:t>—</a:t>
+            </a:r>
+            <a:endParaRPr lang="en-US" sz="850" dirty="0"/>
+          </a:p>
+        </p:txBody>
+      </p:sp>
+      <p:sp>
+        <p:nvSpPr>
+          <p:cNvPr id="131" name="Text 129"/>
+          <p:cNvSpPr txBox="1"/>
+          <p:nvPr/>
+        </p:nvSpPr>
+        <p:spPr>
+          <a:xfrm>
+            <a:off x="4599432" y="4759452"/>
+            <a:ext cx="548640" cy="315468"/>
+          </a:xfrm>
+          <a:prstGeom prst="rect">
+            <a:avLst/>
+          </a:prstGeom>
+          <a:noFill/>
+          <a:ln/>
+        </p:spPr>
+        <p:txBody>
+          <a:bodyPr wrap="square" lIns="0" tIns="0" rIns="0" bIns="0" rtlCol="0" anchor="ctr"/>
+          <a:lstStyle/>
+          <a:p>
+            <a:pPr algn="r" indent="0" marL="0">
+              <a:buNone/>
+            </a:pPr>
+            <a:r>
+              <a:rPr lang="en-US" sz="850" dirty="0">
+                <a:solidFill>
                   <a:srgbClr val="5E7280"/>
                 </a:solidFill>
                 <a:latin typeface="Poppins" pitchFamily="34" charset="0"/>
@@ -31071,14 +31344,14 @@
       </p:sp>
       <p:sp>
         <p:nvSpPr>
-          <p:cNvPr id="125" name="Text 123"/>
-          <p:cNvSpPr txBox="1"/>
-          <p:nvPr/>
-        </p:nvSpPr>
-        <p:spPr>
-          <a:xfrm>
-            <a:off x="5294376" y="4759452"/>
-            <a:ext cx="658368" cy="315468"/>
+          <p:cNvPr id="132" name="Text 130"/>
+          <p:cNvSpPr txBox="1"/>
+          <p:nvPr/>
+        </p:nvSpPr>
+        <p:spPr>
+          <a:xfrm>
+            <a:off x="5184648" y="4759452"/>
+            <a:ext cx="603504" cy="315468"/>
           </a:xfrm>
           <a:prstGeom prst="rect">
             <a:avLst/>
@@ -31110,14 +31383,14 @@
       </p:sp>
       <p:sp>
         <p:nvSpPr>
-          <p:cNvPr id="126" name="Text 124"/>
-          <p:cNvSpPr txBox="1"/>
-          <p:nvPr/>
-        </p:nvSpPr>
-        <p:spPr>
-          <a:xfrm>
-            <a:off x="6007608" y="4759452"/>
-            <a:ext cx="969264" cy="315468"/>
+          <p:cNvPr id="133" name="Text 131"/>
+          <p:cNvSpPr txBox="1"/>
+          <p:nvPr/>
+        </p:nvSpPr>
+        <p:spPr>
+          <a:xfrm>
+            <a:off x="5843016" y="4759452"/>
+            <a:ext cx="932688" cy="315468"/>
           </a:xfrm>
           <a:prstGeom prst="rect">
             <a:avLst/>
@@ -31149,14 +31422,14 @@
       </p:sp>
       <p:sp>
         <p:nvSpPr>
-          <p:cNvPr id="127" name="Text 125"/>
-          <p:cNvSpPr txBox="1"/>
-          <p:nvPr/>
-        </p:nvSpPr>
-        <p:spPr>
-          <a:xfrm>
-            <a:off x="7013448" y="4759452"/>
-            <a:ext cx="822960" cy="315468"/>
+          <p:cNvPr id="134" name="Text 132"/>
+          <p:cNvSpPr txBox="1"/>
+          <p:nvPr/>
+        </p:nvSpPr>
+        <p:spPr>
+          <a:xfrm>
+            <a:off x="6830568" y="4759452"/>
+            <a:ext cx="987552" cy="315468"/>
           </a:xfrm>
           <a:prstGeom prst="rect">
             <a:avLst/>
@@ -31188,7 +31461,7 @@
       </p:sp>
       <p:sp>
         <p:nvSpPr>
-          <p:cNvPr id="128" name="Shape 126"/>
+          <p:cNvPr id="135" name="Shape 133"/>
           <p:cNvSpPr/>
           <p:nvPr/>
         </p:nvSpPr>
@@ -31208,14 +31481,14 @@
       </p:sp>
       <p:sp>
         <p:nvSpPr>
-          <p:cNvPr id="129" name="Text 127"/>
+          <p:cNvPr id="136" name="Text 134"/>
           <p:cNvSpPr txBox="1"/>
           <p:nvPr/>
         </p:nvSpPr>
         <p:spPr>
           <a:xfrm>
             <a:off x="612648" y="5074920"/>
-            <a:ext cx="1591056" cy="315468"/>
+            <a:ext cx="1371600" cy="315468"/>
           </a:xfrm>
           <a:prstGeom prst="rect">
             <a:avLst/>
@@ -31247,14 +31520,14 @@
       </p:sp>
       <p:sp>
         <p:nvSpPr>
-          <p:cNvPr id="130" name="Text 128"/>
-          <p:cNvSpPr txBox="1"/>
-          <p:nvPr/>
-        </p:nvSpPr>
-        <p:spPr>
-          <a:xfrm>
-            <a:off x="2221992" y="5074920"/>
-            <a:ext cx="566928" cy="315468"/>
+          <p:cNvPr id="137" name="Text 135"/>
+          <p:cNvSpPr txBox="1"/>
+          <p:nvPr/>
+        </p:nvSpPr>
+        <p:spPr>
+          <a:xfrm>
+            <a:off x="2002536" y="5074920"/>
+            <a:ext cx="475488" cy="315468"/>
           </a:xfrm>
           <a:prstGeom prst="rect">
             <a:avLst/>
@@ -31286,14 +31559,14 @@
       </p:sp>
       <p:sp>
         <p:nvSpPr>
-          <p:cNvPr id="131" name="Text 129"/>
-          <p:cNvSpPr txBox="1"/>
-          <p:nvPr/>
-        </p:nvSpPr>
-        <p:spPr>
-          <a:xfrm>
-            <a:off x="2807208" y="5074920"/>
-            <a:ext cx="566928" cy="315468"/>
+          <p:cNvPr id="138" name="Text 136"/>
+          <p:cNvSpPr txBox="1"/>
+          <p:nvPr/>
+        </p:nvSpPr>
+        <p:spPr>
+          <a:xfrm>
+            <a:off x="2514600" y="5074920"/>
+            <a:ext cx="475488" cy="315468"/>
           </a:xfrm>
           <a:prstGeom prst="rect">
             <a:avLst/>
@@ -31325,14 +31598,14 @@
       </p:sp>
       <p:sp>
         <p:nvSpPr>
-          <p:cNvPr id="132" name="Shape 130"/>
-          <p:cNvSpPr/>
-          <p:nvPr/>
-        </p:nvSpPr>
-        <p:spPr>
-          <a:xfrm>
-            <a:off x="3465576" y="5186934"/>
-            <a:ext cx="731520" cy="100584"/>
+          <p:cNvPr id="139" name="Shape 137"/>
+          <p:cNvSpPr/>
+          <p:nvPr/>
+        </p:nvSpPr>
+        <p:spPr>
+          <a:xfrm>
+            <a:off x="3081528" y="5186934"/>
+            <a:ext cx="548640" cy="100584"/>
           </a:xfrm>
           <a:prstGeom prst="roundRect">
             <a:avLst>
@@ -31347,13 +31620,13 @@
       </p:sp>
       <p:sp>
         <p:nvSpPr>
-          <p:cNvPr id="133" name="Shape 131"/>
-          <p:cNvSpPr/>
-          <p:nvPr/>
-        </p:nvSpPr>
-        <p:spPr>
-          <a:xfrm>
-            <a:off x="3465576" y="5186934"/>
+          <p:cNvPr id="140" name="Shape 138"/>
+          <p:cNvSpPr/>
+          <p:nvPr/>
+        </p:nvSpPr>
+        <p:spPr>
+          <a:xfrm>
+            <a:off x="3081528" y="5186934"/>
             <a:ext cx="54864" cy="100584"/>
           </a:xfrm>
           <a:prstGeom prst="roundRect">
@@ -31369,13 +31642,13 @@
       </p:sp>
       <p:sp>
         <p:nvSpPr>
-          <p:cNvPr id="134" name="Shape 132"/>
-          <p:cNvSpPr/>
-          <p:nvPr/>
-        </p:nvSpPr>
-        <p:spPr>
-          <a:xfrm>
-            <a:off x="4165092" y="5141214"/>
+          <p:cNvPr id="141" name="Shape 139"/>
+          <p:cNvSpPr/>
+          <p:nvPr/>
+        </p:nvSpPr>
+        <p:spPr>
+          <a:xfrm>
+            <a:off x="3603650" y="5141214"/>
             <a:ext cx="20117" cy="192024"/>
           </a:xfrm>
           <a:prstGeom prst="rect">
@@ -31389,14 +31662,14 @@
       </p:sp>
       <p:sp>
         <p:nvSpPr>
-          <p:cNvPr id="135" name="Text 133"/>
-          <p:cNvSpPr txBox="1"/>
-          <p:nvPr/>
-        </p:nvSpPr>
-        <p:spPr>
-          <a:xfrm>
-            <a:off x="4233672" y="5074920"/>
-            <a:ext cx="384048" cy="315468"/>
+          <p:cNvPr id="142" name="Text 140"/>
+          <p:cNvSpPr txBox="1"/>
+          <p:nvPr/>
+        </p:nvSpPr>
+        <p:spPr>
+          <a:xfrm>
+            <a:off x="3630168" y="5074920"/>
+            <a:ext cx="329184" cy="315468"/>
           </a:xfrm>
           <a:prstGeom prst="rect">
             <a:avLst/>
@@ -31428,13 +31701,13 @@
       </p:sp>
       <p:sp>
         <p:nvSpPr>
-          <p:cNvPr id="136" name="Text 134"/>
-          <p:cNvSpPr txBox="1"/>
-          <p:nvPr/>
-        </p:nvSpPr>
-        <p:spPr>
-          <a:xfrm>
-            <a:off x="4617720" y="5074920"/>
+          <p:cNvPr id="143" name="Text 141"/>
+          <p:cNvSpPr txBox="1"/>
+          <p:nvPr/>
+        </p:nvSpPr>
+        <p:spPr>
+          <a:xfrm>
+            <a:off x="3904488" y="5074920"/>
             <a:ext cx="640080" cy="315468"/>
           </a:xfrm>
           <a:prstGeom prst="rect">
@@ -31453,6 +31726,45 @@
             <a:r>
               <a:rPr lang="en-US" sz="850" dirty="0">
                 <a:solidFill>
+                  <a:srgbClr val="8FA1AC"/>
+                </a:solidFill>
+                <a:latin typeface="Poppins" pitchFamily="34" charset="0"/>
+                <a:ea typeface="Poppins" pitchFamily="34" charset="-122"/>
+                <a:cs typeface="Poppins" pitchFamily="34" charset="-120"/>
+              </a:rPr>
+              <a:t>—</a:t>
+            </a:r>
+            <a:endParaRPr lang="en-US" sz="850" dirty="0"/>
+          </a:p>
+        </p:txBody>
+      </p:sp>
+      <p:sp>
+        <p:nvSpPr>
+          <p:cNvPr id="144" name="Text 142"/>
+          <p:cNvSpPr txBox="1"/>
+          <p:nvPr/>
+        </p:nvSpPr>
+        <p:spPr>
+          <a:xfrm>
+            <a:off x="4599432" y="5074920"/>
+            <a:ext cx="548640" cy="315468"/>
+          </a:xfrm>
+          <a:prstGeom prst="rect">
+            <a:avLst/>
+          </a:prstGeom>
+          <a:noFill/>
+          <a:ln/>
+        </p:spPr>
+        <p:txBody>
+          <a:bodyPr wrap="square" lIns="0" tIns="0" rIns="0" bIns="0" rtlCol="0" anchor="ctr"/>
+          <a:lstStyle/>
+          <a:p>
+            <a:pPr algn="r" indent="0" marL="0">
+              <a:buNone/>
+            </a:pPr>
+            <a:r>
+              <a:rPr lang="en-US" sz="850" dirty="0">
+                <a:solidFill>
                   <a:srgbClr val="5E7280"/>
                 </a:solidFill>
                 <a:latin typeface="Poppins" pitchFamily="34" charset="0"/>
@@ -31467,14 +31779,14 @@
       </p:sp>
       <p:sp>
         <p:nvSpPr>
-          <p:cNvPr id="137" name="Text 135"/>
-          <p:cNvSpPr txBox="1"/>
-          <p:nvPr/>
-        </p:nvSpPr>
-        <p:spPr>
-          <a:xfrm>
-            <a:off x="5294376" y="5074920"/>
-            <a:ext cx="658368" cy="315468"/>
+          <p:cNvPr id="145" name="Text 143"/>
+          <p:cNvSpPr txBox="1"/>
+          <p:nvPr/>
+        </p:nvSpPr>
+        <p:spPr>
+          <a:xfrm>
+            <a:off x="5184648" y="5074920"/>
+            <a:ext cx="603504" cy="315468"/>
           </a:xfrm>
           <a:prstGeom prst="rect">
             <a:avLst/>
@@ -31506,14 +31818,14 @@
       </p:sp>
       <p:sp>
         <p:nvSpPr>
-          <p:cNvPr id="138" name="Text 136"/>
-          <p:cNvSpPr txBox="1"/>
-          <p:nvPr/>
-        </p:nvSpPr>
-        <p:spPr>
-          <a:xfrm>
-            <a:off x="6007608" y="5074920"/>
-            <a:ext cx="969264" cy="315468"/>
+          <p:cNvPr id="146" name="Text 144"/>
+          <p:cNvSpPr txBox="1"/>
+          <p:nvPr/>
+        </p:nvSpPr>
+        <p:spPr>
+          <a:xfrm>
+            <a:off x="5843016" y="5074920"/>
+            <a:ext cx="932688" cy="315468"/>
           </a:xfrm>
           <a:prstGeom prst="rect">
             <a:avLst/>
@@ -31545,14 +31857,14 @@
       </p:sp>
       <p:sp>
         <p:nvSpPr>
-          <p:cNvPr id="139" name="Text 137"/>
-          <p:cNvSpPr txBox="1"/>
-          <p:nvPr/>
-        </p:nvSpPr>
-        <p:spPr>
-          <a:xfrm>
-            <a:off x="7013448" y="5074920"/>
-            <a:ext cx="822960" cy="315468"/>
+          <p:cNvPr id="147" name="Text 145"/>
+          <p:cNvSpPr txBox="1"/>
+          <p:nvPr/>
+        </p:nvSpPr>
+        <p:spPr>
+          <a:xfrm>
+            <a:off x="6830568" y="5074920"/>
+            <a:ext cx="987552" cy="315468"/>
           </a:xfrm>
           <a:prstGeom prst="rect">
             <a:avLst/>
@@ -31584,7 +31896,7 @@
       </p:sp>
       <p:sp>
         <p:nvSpPr>
-          <p:cNvPr id="140" name="Shape 138"/>
+          <p:cNvPr id="148" name="Shape 146"/>
           <p:cNvSpPr/>
           <p:nvPr/>
         </p:nvSpPr>
@@ -31604,14 +31916,14 @@
       </p:sp>
       <p:sp>
         <p:nvSpPr>
-          <p:cNvPr id="141" name="Text 139"/>
+          <p:cNvPr id="149" name="Text 147"/>
           <p:cNvSpPr txBox="1"/>
           <p:nvPr/>
         </p:nvSpPr>
         <p:spPr>
           <a:xfrm>
             <a:off x="612648" y="5426964"/>
-            <a:ext cx="1591056" cy="274320"/>
+            <a:ext cx="1371600" cy="274320"/>
           </a:xfrm>
           <a:prstGeom prst="rect">
             <a:avLst/>
@@ -31643,14 +31955,14 @@
       </p:sp>
       <p:sp>
         <p:nvSpPr>
-          <p:cNvPr id="142" name="Text 140"/>
-          <p:cNvSpPr txBox="1"/>
-          <p:nvPr/>
-        </p:nvSpPr>
-        <p:spPr>
-          <a:xfrm>
-            <a:off x="2221992" y="5426964"/>
-            <a:ext cx="566928" cy="274320"/>
+          <p:cNvPr id="150" name="Text 148"/>
+          <p:cNvSpPr txBox="1"/>
+          <p:nvPr/>
+        </p:nvSpPr>
+        <p:spPr>
+          <a:xfrm>
+            <a:off x="2002536" y="5426964"/>
+            <a:ext cx="475488" cy="274320"/>
           </a:xfrm>
           <a:prstGeom prst="rect">
             <a:avLst/>
@@ -31682,14 +31994,14 @@
       </p:sp>
       <p:sp>
         <p:nvSpPr>
-          <p:cNvPr id="143" name="Text 141"/>
-          <p:cNvSpPr txBox="1"/>
-          <p:nvPr/>
-        </p:nvSpPr>
-        <p:spPr>
-          <a:xfrm>
-            <a:off x="2807208" y="5426964"/>
-            <a:ext cx="566928" cy="274320"/>
+          <p:cNvPr id="151" name="Text 149"/>
+          <p:cNvSpPr txBox="1"/>
+          <p:nvPr/>
+        </p:nvSpPr>
+        <p:spPr>
+          <a:xfrm>
+            <a:off x="2514600" y="5426964"/>
+            <a:ext cx="475488" cy="274320"/>
           </a:xfrm>
           <a:prstGeom prst="rect">
             <a:avLst/>
@@ -31721,13 +32033,13 @@
       </p:sp>
       <p:sp>
         <p:nvSpPr>
-          <p:cNvPr id="144" name="Text 142"/>
-          <p:cNvSpPr txBox="1"/>
-          <p:nvPr/>
-        </p:nvSpPr>
-        <p:spPr>
-          <a:xfrm>
-            <a:off x="4617720" y="5426964"/>
+          <p:cNvPr id="152" name="Text 150"/>
+          <p:cNvSpPr txBox="1"/>
+          <p:nvPr/>
+        </p:nvSpPr>
+        <p:spPr>
+          <a:xfrm>
+            <a:off x="3904488" y="5426964"/>
             <a:ext cx="640080" cy="274320"/>
           </a:xfrm>
           <a:prstGeom prst="rect">
@@ -31746,6 +32058,45 @@
             <a:r>
               <a:rPr lang="en-US" sz="850" b="1" dirty="0">
                 <a:solidFill>
+                  <a:srgbClr val="3D8F5F"/>
+                </a:solidFill>
+                <a:latin typeface="Poppins" pitchFamily="34" charset="0"/>
+                <a:ea typeface="Poppins" pitchFamily="34" charset="-122"/>
+                <a:cs typeface="Poppins" pitchFamily="34" charset="-120"/>
+              </a:rPr>
+              <a:t>+1,204</a:t>
+            </a:r>
+            <a:endParaRPr lang="en-US" sz="850" dirty="0"/>
+          </a:p>
+        </p:txBody>
+      </p:sp>
+      <p:sp>
+        <p:nvSpPr>
+          <p:cNvPr id="153" name="Text 151"/>
+          <p:cNvSpPr txBox="1"/>
+          <p:nvPr/>
+        </p:nvSpPr>
+        <p:spPr>
+          <a:xfrm>
+            <a:off x="4599432" y="5426964"/>
+            <a:ext cx="548640" cy="274320"/>
+          </a:xfrm>
+          <a:prstGeom prst="rect">
+            <a:avLst/>
+          </a:prstGeom>
+          <a:noFill/>
+          <a:ln/>
+        </p:spPr>
+        <p:txBody>
+          <a:bodyPr wrap="square" lIns="0" tIns="0" rIns="0" bIns="0" rtlCol="0" anchor="ctr"/>
+          <a:lstStyle/>
+          <a:p>
+            <a:pPr algn="r" indent="0" marL="0">
+              <a:buNone/>
+            </a:pPr>
+            <a:r>
+              <a:rPr lang="en-US" sz="850" b="1" dirty="0">
+                <a:solidFill>
                   <a:srgbClr val="12293A"/>
                 </a:solidFill>
                 <a:latin typeface="Poppins" pitchFamily="34" charset="0"/>
@@ -31760,14 +32111,14 @@
       </p:sp>
       <p:sp>
         <p:nvSpPr>
-          <p:cNvPr id="145" name="Text 143"/>
-          <p:cNvSpPr txBox="1"/>
-          <p:nvPr/>
-        </p:nvSpPr>
-        <p:spPr>
-          <a:xfrm>
-            <a:off x="5294376" y="5426964"/>
-            <a:ext cx="658368" cy="274320"/>
+          <p:cNvPr id="154" name="Text 152"/>
+          <p:cNvSpPr txBox="1"/>
+          <p:nvPr/>
+        </p:nvSpPr>
+        <p:spPr>
+          <a:xfrm>
+            <a:off x="5184648" y="5426964"/>
+            <a:ext cx="603504" cy="274320"/>
           </a:xfrm>
           <a:prstGeom prst="rect">
             <a:avLst/>
@@ -31799,14 +32150,14 @@
       </p:sp>
       <p:sp>
         <p:nvSpPr>
-          <p:cNvPr id="146" name="Text 144"/>
-          <p:cNvSpPr txBox="1"/>
-          <p:nvPr/>
-        </p:nvSpPr>
-        <p:spPr>
-          <a:xfrm>
-            <a:off x="6007608" y="5426964"/>
-            <a:ext cx="969264" cy="274320"/>
+          <p:cNvPr id="155" name="Text 153"/>
+          <p:cNvSpPr txBox="1"/>
+          <p:nvPr/>
+        </p:nvSpPr>
+        <p:spPr>
+          <a:xfrm>
+            <a:off x="5843016" y="5426964"/>
+            <a:ext cx="932688" cy="274320"/>
           </a:xfrm>
           <a:prstGeom prst="rect">
             <a:avLst/>
@@ -31838,14 +32189,14 @@
       </p:sp>
       <p:sp>
         <p:nvSpPr>
-          <p:cNvPr id="147" name="Text 145"/>
-          <p:cNvSpPr txBox="1"/>
-          <p:nvPr/>
-        </p:nvSpPr>
-        <p:spPr>
-          <a:xfrm>
-            <a:off x="7013448" y="5426964"/>
-            <a:ext cx="822960" cy="274320"/>
+          <p:cNvPr id="156" name="Text 154"/>
+          <p:cNvSpPr txBox="1"/>
+          <p:nvPr/>
+        </p:nvSpPr>
+        <p:spPr>
+          <a:xfrm>
+            <a:off x="6830568" y="5426964"/>
+            <a:ext cx="987552" cy="274320"/>
           </a:xfrm>
           <a:prstGeom prst="rect">
             <a:avLst/>
@@ -31877,7 +32228,7 @@
       </p:sp>
       <p:sp>
         <p:nvSpPr>
-          <p:cNvPr id="148" name="Text 146"/>
+          <p:cNvPr id="157" name="Text 155"/>
           <p:cNvSpPr txBox="1"/>
           <p:nvPr/>
         </p:nvSpPr>
@@ -31916,7 +32267,7 @@
       </p:sp>
       <p:sp>
         <p:nvSpPr>
-          <p:cNvPr id="149" name="Shape 147"/>
+          <p:cNvPr id="158" name="Shape 156"/>
           <p:cNvSpPr/>
           <p:nvPr/>
         </p:nvSpPr>
@@ -31945,7 +32296,7 @@
       </p:sp>
       <p:sp>
         <p:nvSpPr>
-          <p:cNvPr id="150" name="Text 148"/>
+          <p:cNvPr id="159" name="Text 157"/>
           <p:cNvSpPr txBox="1"/>
           <p:nvPr/>
         </p:nvSpPr>
@@ -31984,7 +32335,7 @@
       </p:sp>
       <p:sp>
         <p:nvSpPr>
-          <p:cNvPr id="151" name="Text 149"/>
+          <p:cNvPr id="160" name="Text 158"/>
           <p:cNvSpPr txBox="1"/>
           <p:nvPr/>
         </p:nvSpPr>
@@ -32125,7 +32476,7 @@
                 <a:ea typeface="Poppins" pitchFamily="34" charset="-122"/>
                 <a:cs typeface="Poppins" pitchFamily="34" charset="-120"/>
               </a:rPr>
-              <a:t>New MRR added $1,659 in the week. </a:t>
+              <a:t>Net new MRR moved +$1,204 in the week. </a:t>
             </a:r>
             <a:pPr indent="0" marL="0">
               <a:spcAft>
@@ -32142,7 +32493,7 @@
                 <a:ea typeface="Poppins" pitchFamily="34" charset="-122"/>
                 <a:cs typeface="Poppins" pitchFamily="34" charset="-120"/>
               </a:rPr>
-              <a:t>Q3 stands at $15,126 — 54% of the $28k OKR2 against a 97% pace mark. BRG Granville Tavern $899, Hallmark Coyote's Roadhouse $701, CSHG Walker Baker Evans $59.</a:t>
+              <a:t>Q3 stands at $15,126 — 54% of the $28k OKR2 against a 97% pace mark. New MRR added $1,659 (BRG Granville Tavern $899, Hallmark Coyote's Roadhouse $701, CSHG Walker Baker Evans $59); The Jungle Tingalpa churned $455, so net movement is +$1,204.</a:t>
             </a:r>
             <a:endParaRPr lang="en-US" sz="900" dirty="0"/>
           </a:p>
@@ -32184,7 +32535,7 @@
       </p:sp>
       <p:sp>
         <p:nvSpPr>
-          <p:cNvPr id="152" name="Shape 150"/>
+          <p:cNvPr id="161" name="Shape 159"/>
           <p:cNvSpPr/>
           <p:nvPr/>
         </p:nvSpPr>
@@ -32206,7 +32557,7 @@
       </p:sp>
       <p:sp>
         <p:nvSpPr>
-          <p:cNvPr id="153" name="Text 151"/>
+          <p:cNvPr id="162" name="Text 160"/>
           <p:cNvSpPr txBox="1"/>
           <p:nvPr/>
         </p:nvSpPr>
